--- a/lectures/01/Intro.pptx
+++ b/lectures/01/Intro.pptx
@@ -256,7 +256,7 @@
           <a:p>
             <a:fld id="{FA80D1D5-23B0-48CF-B740-339E0CD4C8AC}" type="datetimeFigureOut">
               <a:rPr lang="en-US" smtClean="0"/>
-              <a:t>2/7/2026</a:t>
+              <a:t>2/13/2026</a:t>
             </a:fld>
             <a:endParaRPr lang="en-US"/>
           </a:p>
@@ -12785,7 +12785,7 @@
           <a:p>
             <a:fld id="{85DDA0F7-7300-4760-98C6-85A3ACBFC286}" type="datetimeFigureOut">
               <a:rPr lang="en-US" smtClean="0"/>
-              <a:t>2/7/2026</a:t>
+              <a:t>2/13/2026</a:t>
             </a:fld>
             <a:endParaRPr lang="en-US"/>
           </a:p>
@@ -12983,7 +12983,7 @@
           <a:p>
             <a:fld id="{85DDA0F7-7300-4760-98C6-85A3ACBFC286}" type="datetimeFigureOut">
               <a:rPr lang="en-US" smtClean="0"/>
-              <a:t>2/7/2026</a:t>
+              <a:t>2/13/2026</a:t>
             </a:fld>
             <a:endParaRPr lang="en-US"/>
           </a:p>
@@ -13191,7 +13191,7 @@
           <a:p>
             <a:fld id="{85DDA0F7-7300-4760-98C6-85A3ACBFC286}" type="datetimeFigureOut">
               <a:rPr lang="en-US" smtClean="0"/>
-              <a:t>2/7/2026</a:t>
+              <a:t>2/13/2026</a:t>
             </a:fld>
             <a:endParaRPr lang="en-US"/>
           </a:p>
@@ -13389,7 +13389,7 @@
           <a:p>
             <a:fld id="{85DDA0F7-7300-4760-98C6-85A3ACBFC286}" type="datetimeFigureOut">
               <a:rPr lang="en-US" smtClean="0"/>
-              <a:t>2/7/2026</a:t>
+              <a:t>2/13/2026</a:t>
             </a:fld>
             <a:endParaRPr lang="en-US"/>
           </a:p>
@@ -13664,7 +13664,7 @@
           <a:p>
             <a:fld id="{85DDA0F7-7300-4760-98C6-85A3ACBFC286}" type="datetimeFigureOut">
               <a:rPr lang="en-US" smtClean="0"/>
-              <a:t>2/7/2026</a:t>
+              <a:t>2/13/2026</a:t>
             </a:fld>
             <a:endParaRPr lang="en-US"/>
           </a:p>
@@ -13929,7 +13929,7 @@
           <a:p>
             <a:fld id="{85DDA0F7-7300-4760-98C6-85A3ACBFC286}" type="datetimeFigureOut">
               <a:rPr lang="en-US" smtClean="0"/>
-              <a:t>2/7/2026</a:t>
+              <a:t>2/13/2026</a:t>
             </a:fld>
             <a:endParaRPr lang="en-US"/>
           </a:p>
@@ -14341,7 +14341,7 @@
           <a:p>
             <a:fld id="{85DDA0F7-7300-4760-98C6-85A3ACBFC286}" type="datetimeFigureOut">
               <a:rPr lang="en-US" smtClean="0"/>
-              <a:t>2/7/2026</a:t>
+              <a:t>2/13/2026</a:t>
             </a:fld>
             <a:endParaRPr lang="en-US"/>
           </a:p>
@@ -14482,7 +14482,7 @@
           <a:p>
             <a:fld id="{85DDA0F7-7300-4760-98C6-85A3ACBFC286}" type="datetimeFigureOut">
               <a:rPr lang="en-US" smtClean="0"/>
-              <a:t>2/7/2026</a:t>
+              <a:t>2/13/2026</a:t>
             </a:fld>
             <a:endParaRPr lang="en-US"/>
           </a:p>
@@ -14595,7 +14595,7 @@
           <a:p>
             <a:fld id="{85DDA0F7-7300-4760-98C6-85A3ACBFC286}" type="datetimeFigureOut">
               <a:rPr lang="en-US" smtClean="0"/>
-              <a:t>2/7/2026</a:t>
+              <a:t>2/13/2026</a:t>
             </a:fld>
             <a:endParaRPr lang="en-US"/>
           </a:p>
@@ -14906,7 +14906,7 @@
           <a:p>
             <a:fld id="{85DDA0F7-7300-4760-98C6-85A3ACBFC286}" type="datetimeFigureOut">
               <a:rPr lang="en-US" smtClean="0"/>
-              <a:t>2/7/2026</a:t>
+              <a:t>2/13/2026</a:t>
             </a:fld>
             <a:endParaRPr lang="en-US"/>
           </a:p>
@@ -15194,7 +15194,7 @@
           <a:p>
             <a:fld id="{85DDA0F7-7300-4760-98C6-85A3ACBFC286}" type="datetimeFigureOut">
               <a:rPr lang="en-US" smtClean="0"/>
-              <a:t>2/7/2026</a:t>
+              <a:t>2/13/2026</a:t>
             </a:fld>
             <a:endParaRPr lang="en-US"/>
           </a:p>
@@ -15435,7 +15435,7 @@
           <a:p>
             <a:fld id="{85DDA0F7-7300-4760-98C6-85A3ACBFC286}" type="datetimeFigureOut">
               <a:rPr lang="en-US" smtClean="0"/>
-              <a:t>2/7/2026</a:t>
+              <a:t>2/13/2026</a:t>
             </a:fld>
             <a:endParaRPr lang="en-US"/>
           </a:p>
@@ -26018,8 +26018,8 @@
           </a:p>
         </p:txBody>
       </p:sp>
-      <mc:AlternateContent xmlns:mc="http://schemas.openxmlformats.org/markup-compatibility/2006">
-        <mc:Choice xmlns:a14="http://schemas.microsoft.com/office/drawing/2010/main" Requires="a14">
+      <mc:AlternateContent xmlns:mc="http://schemas.openxmlformats.org/markup-compatibility/2006" xmlns:a14="http://schemas.microsoft.com/office/drawing/2010/main">
+        <mc:Choice Requires="a14">
           <p:sp>
             <p:nvSpPr>
               <p:cNvPr id="3" name="Content Placeholder 2">
@@ -26195,37 +26195,7 @@
                       <a:rPr lang="en-US" b="0" i="1" smtClean="0">
                         <a:latin typeface="Cambria Math" panose="02040503050406030204" pitchFamily="18" charset="0"/>
                       </a:rPr>
-                      <m:t>=</m:t>
-                    </m:r>
-                    <m:r>
-                      <a:rPr lang="en-US" b="0" i="1" smtClean="0">
-                        <a:latin typeface="Cambria Math" panose="02040503050406030204" pitchFamily="18" charset="0"/>
-                      </a:rPr>
-                      <m:t>16</m:t>
-                    </m:r>
-                    <m:r>
-                      <a:rPr lang="en-US" b="0" i="1" smtClean="0">
-                        <a:latin typeface="Cambria Math" panose="02040503050406030204" pitchFamily="18" charset="0"/>
-                      </a:rPr>
-                      <m:t>+</m:t>
-                    </m:r>
-                    <m:r>
-                      <a:rPr lang="en-US" b="0" i="1" smtClean="0">
-                        <a:latin typeface="Cambria Math" panose="02040503050406030204" pitchFamily="18" charset="0"/>
-                      </a:rPr>
-                      <m:t>13</m:t>
-                    </m:r>
-                    <m:r>
-                      <a:rPr lang="en-US" b="0" i="1" smtClean="0">
-                        <a:latin typeface="Cambria Math" panose="02040503050406030204" pitchFamily="18" charset="0"/>
-                      </a:rPr>
-                      <m:t>=</m:t>
-                    </m:r>
-                    <m:r>
-                      <a:rPr lang="en-US" b="0" i="1" smtClean="0">
-                        <a:latin typeface="Cambria Math" panose="02040503050406030204" pitchFamily="18" charset="0"/>
-                      </a:rPr>
-                      <m:t>29</m:t>
+                      <m:t>=16+13=29</m:t>
                     </m:r>
                   </m:oMath>
                 </a14:m>
@@ -26492,61 +26462,19 @@
                       <a:rPr lang="en-US" b="0" i="1" smtClean="0">
                         <a:latin typeface="Cambria Math" panose="02040503050406030204" pitchFamily="18" charset="0"/>
                       </a:rPr>
-                      <m:t>=</m:t>
+                      <m:t>=8+</m:t>
+                    </m:r>
+                    <m:r>
+                      <a:rPr lang="ru-RU" b="0" i="1" smtClean="0">
+                        <a:latin typeface="Cambria Math" panose="02040503050406030204" pitchFamily="18" charset="0"/>
+                      </a:rPr>
+                      <m:t>0+</m:t>
                     </m:r>
                     <m:r>
                       <a:rPr lang="en-US" b="0" i="1" smtClean="0">
                         <a:latin typeface="Cambria Math" panose="02040503050406030204" pitchFamily="18" charset="0"/>
                       </a:rPr>
-                      <m:t>8</m:t>
-                    </m:r>
-                    <m:r>
-                      <a:rPr lang="en-US" b="0" i="1" smtClean="0">
-                        <a:latin typeface="Cambria Math" panose="02040503050406030204" pitchFamily="18" charset="0"/>
-                      </a:rPr>
-                      <m:t>+</m:t>
-                    </m:r>
-                    <m:r>
-                      <a:rPr lang="ru-RU" b="0" i="1" smtClean="0">
-                        <a:latin typeface="Cambria Math" panose="02040503050406030204" pitchFamily="18" charset="0"/>
-                      </a:rPr>
-                      <m:t>0</m:t>
-                    </m:r>
-                    <m:r>
-                      <a:rPr lang="ru-RU" b="0" i="1" smtClean="0">
-                        <a:latin typeface="Cambria Math" panose="02040503050406030204" pitchFamily="18" charset="0"/>
-                      </a:rPr>
-                      <m:t>+</m:t>
-                    </m:r>
-                    <m:r>
-                      <a:rPr lang="en-US" b="0" i="1" smtClean="0">
-                        <a:latin typeface="Cambria Math" panose="02040503050406030204" pitchFamily="18" charset="0"/>
-                      </a:rPr>
-                      <m:t>2</m:t>
-                    </m:r>
-                    <m:r>
-                      <a:rPr lang="en-US" b="0" i="1" smtClean="0">
-                        <a:latin typeface="Cambria Math" panose="02040503050406030204" pitchFamily="18" charset="0"/>
-                      </a:rPr>
-                      <m:t>+</m:t>
-                    </m:r>
-                    <m:r>
-                      <a:rPr lang="en-US" b="0" i="1" smtClean="0">
-                        <a:latin typeface="Cambria Math" panose="02040503050406030204" pitchFamily="18" charset="0"/>
-                      </a:rPr>
-                      <m:t>1</m:t>
-                    </m:r>
-                    <m:r>
-                      <a:rPr lang="en-US" b="0" i="1" smtClean="0">
-                        <a:latin typeface="Cambria Math" panose="02040503050406030204" pitchFamily="18" charset="0"/>
-                      </a:rPr>
-                      <m:t>=</m:t>
-                    </m:r>
-                    <m:r>
-                      <a:rPr lang="en-US" b="0" i="1" smtClean="0">
-                        <a:latin typeface="Cambria Math" panose="02040503050406030204" pitchFamily="18" charset="0"/>
-                      </a:rPr>
-                      <m:t>11</m:t>
+                      <m:t>2+1=11</m:t>
                     </m:r>
                   </m:oMath>
                 </a14:m>
@@ -26750,85 +26678,7 @@
                       <a:rPr lang="en-US" b="0" i="1" smtClean="0">
                         <a:latin typeface="Cambria Math" panose="02040503050406030204" pitchFamily="18" charset="0"/>
                       </a:rPr>
-                      <m:t>=</m:t>
-                    </m:r>
-                    <m:r>
-                      <a:rPr lang="en-US" b="0" i="1" smtClean="0">
-                        <a:latin typeface="Cambria Math" panose="02040503050406030204" pitchFamily="18" charset="0"/>
-                      </a:rPr>
-                      <m:t>2</m:t>
-                    </m:r>
-                    <m:r>
-                      <a:rPr lang="en-US" b="0" i="1" smtClean="0">
-                        <a:latin typeface="Cambria Math" panose="02040503050406030204" pitchFamily="18" charset="0"/>
-                      </a:rPr>
-                      <m:t>∗</m:t>
-                    </m:r>
-                    <m:r>
-                      <a:rPr lang="en-US" b="0" i="1" smtClean="0">
-                        <a:latin typeface="Cambria Math" panose="02040503050406030204" pitchFamily="18" charset="0"/>
-                      </a:rPr>
-                      <m:t>64</m:t>
-                    </m:r>
-                    <m:r>
-                      <a:rPr lang="en-US" b="0" i="1" smtClean="0">
-                        <a:latin typeface="Cambria Math" panose="02040503050406030204" pitchFamily="18" charset="0"/>
-                      </a:rPr>
-                      <m:t>+</m:t>
-                    </m:r>
-                    <m:r>
-                      <a:rPr lang="en-US" b="0" i="1" smtClean="0">
-                        <a:latin typeface="Cambria Math" panose="02040503050406030204" pitchFamily="18" charset="0"/>
-                      </a:rPr>
-                      <m:t>8</m:t>
-                    </m:r>
-                    <m:r>
-                      <a:rPr lang="en-US" b="0" i="1" smtClean="0">
-                        <a:latin typeface="Cambria Math" panose="02040503050406030204" pitchFamily="18" charset="0"/>
-                      </a:rPr>
-                      <m:t>+</m:t>
-                    </m:r>
-                    <m:r>
-                      <a:rPr lang="en-US" b="0" i="1" smtClean="0">
-                        <a:latin typeface="Cambria Math" panose="02040503050406030204" pitchFamily="18" charset="0"/>
-                      </a:rPr>
-                      <m:t>5</m:t>
-                    </m:r>
-                    <m:r>
-                      <a:rPr lang="en-US" b="0" i="1" smtClean="0">
-                        <a:latin typeface="Cambria Math" panose="02040503050406030204" pitchFamily="18" charset="0"/>
-                      </a:rPr>
-                      <m:t>=</m:t>
-                    </m:r>
-                    <m:r>
-                      <a:rPr lang="en-US" b="0" i="1" smtClean="0">
-                        <a:latin typeface="Cambria Math" panose="02040503050406030204" pitchFamily="18" charset="0"/>
-                      </a:rPr>
-                      <m:t>128</m:t>
-                    </m:r>
-                    <m:r>
-                      <a:rPr lang="en-US" b="0" i="1" smtClean="0">
-                        <a:latin typeface="Cambria Math" panose="02040503050406030204" pitchFamily="18" charset="0"/>
-                      </a:rPr>
-                      <m:t>+</m:t>
-                    </m:r>
-                    <m:r>
-                      <a:rPr lang="en-US" b="0" i="1" smtClean="0">
-                        <a:latin typeface="Cambria Math" panose="02040503050406030204" pitchFamily="18" charset="0"/>
-                      </a:rPr>
-                      <m:t>13</m:t>
-                    </m:r>
-                    <m:r>
-                      <a:rPr lang="en-US" b="0" i="1" smtClean="0">
-                        <a:latin typeface="Cambria Math" panose="02040503050406030204" pitchFamily="18" charset="0"/>
-                      </a:rPr>
-                      <m:t>=</m:t>
-                    </m:r>
-                    <m:r>
-                      <a:rPr lang="en-US" b="0" i="1" smtClean="0">
-                        <a:latin typeface="Cambria Math" panose="02040503050406030204" pitchFamily="18" charset="0"/>
-                      </a:rPr>
-                      <m:t>141</m:t>
+                      <m:t>=2∗64+8+5=128+13=141</m:t>
                     </m:r>
                   </m:oMath>
                 </a14:m>
@@ -26849,49 +26699,7 @@
                       <a:rPr lang="en-US" b="0" i="1" smtClean="0">
                         <a:latin typeface="Cambria Math" panose="02040503050406030204" pitchFamily="18" charset="0"/>
                       </a:rPr>
-                      <m:t>59</m:t>
-                    </m:r>
-                    <m:r>
-                      <a:rPr lang="en-US" b="0" i="1" smtClean="0">
-                        <a:latin typeface="Cambria Math" panose="02040503050406030204" pitchFamily="18" charset="0"/>
-                      </a:rPr>
-                      <m:t>=</m:t>
-                    </m:r>
-                    <m:r>
-                      <a:rPr lang="en-US" b="0" i="1" smtClean="0">
-                        <a:latin typeface="Cambria Math" panose="02040503050406030204" pitchFamily="18" charset="0"/>
-                      </a:rPr>
-                      <m:t>48</m:t>
-                    </m:r>
-                    <m:r>
-                      <a:rPr lang="en-US" b="0" i="1" smtClean="0">
-                        <a:latin typeface="Cambria Math" panose="02040503050406030204" pitchFamily="18" charset="0"/>
-                      </a:rPr>
-                      <m:t>+</m:t>
-                    </m:r>
-                    <m:r>
-                      <a:rPr lang="en-US" b="0" i="1" smtClean="0">
-                        <a:latin typeface="Cambria Math" panose="02040503050406030204" pitchFamily="18" charset="0"/>
-                      </a:rPr>
-                      <m:t>11</m:t>
-                    </m:r>
-                    <m:r>
-                      <a:rPr lang="en-US" b="0" i="1" smtClean="0">
-                        <a:latin typeface="Cambria Math" panose="02040503050406030204" pitchFamily="18" charset="0"/>
-                      </a:rPr>
-                      <m:t>=</m:t>
-                    </m:r>
-                    <m:r>
-                      <a:rPr lang="en-US" b="0" i="1" smtClean="0">
-                        <a:latin typeface="Cambria Math" panose="02040503050406030204" pitchFamily="18" charset="0"/>
-                      </a:rPr>
-                      <m:t>3</m:t>
-                    </m:r>
-                    <m:r>
-                      <a:rPr lang="en-US" b="0" i="1" smtClean="0">
-                        <a:latin typeface="Cambria Math" panose="02040503050406030204" pitchFamily="18" charset="0"/>
-                      </a:rPr>
-                      <m:t>∗</m:t>
+                      <m:t>59=48+11=3∗</m:t>
                     </m:r>
                     <m:sSup>
                       <m:sSupPr>
@@ -26922,19 +26730,7 @@
                       <a:rPr lang="en-US" b="0" i="1" smtClean="0">
                         <a:latin typeface="Cambria Math" panose="02040503050406030204" pitchFamily="18" charset="0"/>
                       </a:rPr>
-                      <m:t>+</m:t>
-                    </m:r>
-                    <m:r>
-                      <a:rPr lang="en-US" b="0" i="1" smtClean="0">
-                        <a:latin typeface="Cambria Math" panose="02040503050406030204" pitchFamily="18" charset="0"/>
-                      </a:rPr>
-                      <m:t>11</m:t>
-                    </m:r>
-                    <m:r>
-                      <a:rPr lang="en-US" b="0" i="1" smtClean="0">
-                        <a:latin typeface="Cambria Math" panose="02040503050406030204" pitchFamily="18" charset="0"/>
-                      </a:rPr>
-                      <m:t>∗</m:t>
+                      <m:t>+11∗</m:t>
                     </m:r>
                     <m:sSup>
                       <m:sSupPr>
@@ -27023,61 +26819,7 @@
                       <a:rPr lang="en-US" b="0" i="1" smtClean="0">
                         <a:latin typeface="Cambria Math" panose="02040503050406030204" pitchFamily="18" charset="0"/>
                       </a:rPr>
-                      <m:t>19</m:t>
-                    </m:r>
-                    <m:r>
-                      <a:rPr lang="en-US" b="0" i="1" smtClean="0">
-                        <a:latin typeface="Cambria Math" panose="02040503050406030204" pitchFamily="18" charset="0"/>
-                      </a:rPr>
-                      <m:t>=</m:t>
-                    </m:r>
-                    <m:r>
-                      <a:rPr lang="en-US" b="0" i="1" smtClean="0">
-                        <a:latin typeface="Cambria Math" panose="02040503050406030204" pitchFamily="18" charset="0"/>
-                      </a:rPr>
-                      <m:t>16</m:t>
-                    </m:r>
-                    <m:r>
-                      <a:rPr lang="en-US" b="0" i="1" smtClean="0">
-                        <a:latin typeface="Cambria Math" panose="02040503050406030204" pitchFamily="18" charset="0"/>
-                      </a:rPr>
-                      <m:t>+</m:t>
-                    </m:r>
-                    <m:r>
-                      <a:rPr lang="en-US" b="0" i="1" smtClean="0">
-                        <a:latin typeface="Cambria Math" panose="02040503050406030204" pitchFamily="18" charset="0"/>
-                      </a:rPr>
-                      <m:t>2</m:t>
-                    </m:r>
-                    <m:r>
-                      <a:rPr lang="en-US" b="0" i="1" smtClean="0">
-                        <a:latin typeface="Cambria Math" panose="02040503050406030204" pitchFamily="18" charset="0"/>
-                      </a:rPr>
-                      <m:t>+</m:t>
-                    </m:r>
-                    <m:r>
-                      <a:rPr lang="en-US" b="0" i="1" smtClean="0">
-                        <a:latin typeface="Cambria Math" panose="02040503050406030204" pitchFamily="18" charset="0"/>
-                      </a:rPr>
-                      <m:t>1</m:t>
-                    </m:r>
-                    <m:r>
-                      <a:rPr lang="en-US" b="0" i="1" smtClean="0">
-                        <a:latin typeface="Cambria Math" panose="02040503050406030204" pitchFamily="18" charset="0"/>
-                      </a:rPr>
-                      <m:t>=</m:t>
-                    </m:r>
-                    <m:r>
-                      <a:rPr lang="en-US" b="0" i="1" smtClean="0">
-                        <a:latin typeface="Cambria Math" panose="02040503050406030204" pitchFamily="18" charset="0"/>
-                      </a:rPr>
-                      <m:t>1</m:t>
-                    </m:r>
-                    <m:r>
-                      <a:rPr lang="en-US" b="0" i="1" smtClean="0">
-                        <a:latin typeface="Cambria Math" panose="02040503050406030204" pitchFamily="18" charset="0"/>
-                      </a:rPr>
-                      <m:t>∗</m:t>
+                      <m:t>19=16+2+1=1∗</m:t>
                     </m:r>
                     <m:sSup>
                       <m:sSupPr>
@@ -27108,19 +26850,7 @@
                       <a:rPr lang="en-US" b="0" i="1" smtClean="0">
                         <a:latin typeface="Cambria Math" panose="02040503050406030204" pitchFamily="18" charset="0"/>
                       </a:rPr>
-                      <m:t>+</m:t>
-                    </m:r>
-                    <m:r>
-                      <a:rPr lang="en-US" b="0" i="1" smtClean="0">
-                        <a:latin typeface="Cambria Math" panose="02040503050406030204" pitchFamily="18" charset="0"/>
-                      </a:rPr>
-                      <m:t>0</m:t>
-                    </m:r>
-                    <m:r>
-                      <a:rPr lang="en-US" b="0" i="1" smtClean="0">
-                        <a:latin typeface="Cambria Math" panose="02040503050406030204" pitchFamily="18" charset="0"/>
-                      </a:rPr>
-                      <m:t>∗</m:t>
+                      <m:t>+0∗</m:t>
                     </m:r>
                     <m:sSup>
                       <m:sSupPr>
@@ -27151,19 +26881,7 @@
                       <a:rPr lang="en-US" b="0" i="1" smtClean="0">
                         <a:latin typeface="Cambria Math" panose="02040503050406030204" pitchFamily="18" charset="0"/>
                       </a:rPr>
-                      <m:t>+</m:t>
-                    </m:r>
-                    <m:r>
-                      <a:rPr lang="en-US" b="0" i="1" smtClean="0">
-                        <a:latin typeface="Cambria Math" panose="02040503050406030204" pitchFamily="18" charset="0"/>
-                      </a:rPr>
-                      <m:t>0</m:t>
-                    </m:r>
-                    <m:r>
-                      <a:rPr lang="en-US" b="0" i="1" smtClean="0">
-                        <a:latin typeface="Cambria Math" panose="02040503050406030204" pitchFamily="18" charset="0"/>
-                      </a:rPr>
-                      <m:t>∗</m:t>
+                      <m:t>+0∗</m:t>
                     </m:r>
                     <m:sSup>
                       <m:sSupPr>
@@ -27194,19 +26912,7 @@
                       <a:rPr lang="en-US" b="0" i="1" smtClean="0">
                         <a:latin typeface="Cambria Math" panose="02040503050406030204" pitchFamily="18" charset="0"/>
                       </a:rPr>
-                      <m:t>+</m:t>
-                    </m:r>
-                    <m:r>
-                      <a:rPr lang="en-US" b="0" i="1" smtClean="0">
-                        <a:latin typeface="Cambria Math" panose="02040503050406030204" pitchFamily="18" charset="0"/>
-                      </a:rPr>
-                      <m:t>1</m:t>
-                    </m:r>
-                    <m:r>
-                      <a:rPr lang="en-US" b="0" i="1" smtClean="0">
-                        <a:latin typeface="Cambria Math" panose="02040503050406030204" pitchFamily="18" charset="0"/>
-                      </a:rPr>
-                      <m:t>∗</m:t>
+                      <m:t>+1∗</m:t>
                     </m:r>
                     <m:sSup>
                       <m:sSupPr>
@@ -27237,19 +26943,7 @@
                       <a:rPr lang="en-US" b="0" i="1" smtClean="0">
                         <a:latin typeface="Cambria Math" panose="02040503050406030204" pitchFamily="18" charset="0"/>
                       </a:rPr>
-                      <m:t>+</m:t>
-                    </m:r>
-                    <m:r>
-                      <a:rPr lang="en-US" b="0" i="1" smtClean="0">
-                        <a:latin typeface="Cambria Math" panose="02040503050406030204" pitchFamily="18" charset="0"/>
-                      </a:rPr>
-                      <m:t>1</m:t>
-                    </m:r>
-                    <m:r>
-                      <a:rPr lang="en-US" b="0" i="1" smtClean="0">
-                        <a:latin typeface="Cambria Math" panose="02040503050406030204" pitchFamily="18" charset="0"/>
-                      </a:rPr>
-                      <m:t>∗</m:t>
+                      <m:t>+1∗</m:t>
                     </m:r>
                     <m:sSup>
                       <m:sSupPr>
@@ -27314,7 +27008,7 @@
             </p:txBody>
           </p:sp>
         </mc:Choice>
-        <mc:Fallback>
+        <mc:Fallback xmlns="">
           <p:sp>
             <p:nvSpPr>
               <p:cNvPr id="3" name="Content Placeholder 2">

--- a/lectures/01/Intro.pptx
+++ b/lectures/01/Intro.pptx
@@ -5,7 +5,7 @@
     <p:sldMasterId id="2147483648" r:id="rId1"/>
   </p:sldMasterIdLst>
   <p:notesMasterIdLst>
-    <p:notesMasterId r:id="rId51"/>
+    <p:notesMasterId r:id="rId52"/>
   </p:notesMasterIdLst>
   <p:sldIdLst>
     <p:sldId id="256" r:id="rId2"/>
@@ -15,48 +15,49 @@
     <p:sldId id="260" r:id="rId6"/>
     <p:sldId id="261" r:id="rId7"/>
     <p:sldId id="262" r:id="rId8"/>
-    <p:sldId id="263" r:id="rId9"/>
-    <p:sldId id="265" r:id="rId10"/>
-    <p:sldId id="267" r:id="rId11"/>
-    <p:sldId id="266" r:id="rId12"/>
-    <p:sldId id="268" r:id="rId13"/>
-    <p:sldId id="269" r:id="rId14"/>
-    <p:sldId id="270" r:id="rId15"/>
-    <p:sldId id="271" r:id="rId16"/>
-    <p:sldId id="272" r:id="rId17"/>
-    <p:sldId id="264" r:id="rId18"/>
-    <p:sldId id="273" r:id="rId19"/>
-    <p:sldId id="274" r:id="rId20"/>
-    <p:sldId id="275" r:id="rId21"/>
-    <p:sldId id="277" r:id="rId22"/>
-    <p:sldId id="276" r:id="rId23"/>
-    <p:sldId id="278" r:id="rId24"/>
-    <p:sldId id="279" r:id="rId25"/>
-    <p:sldId id="281" r:id="rId26"/>
-    <p:sldId id="280" r:id="rId27"/>
-    <p:sldId id="282" r:id="rId28"/>
-    <p:sldId id="285" r:id="rId29"/>
-    <p:sldId id="292" r:id="rId30"/>
-    <p:sldId id="283" r:id="rId31"/>
-    <p:sldId id="299" r:id="rId32"/>
-    <p:sldId id="546" r:id="rId33"/>
-    <p:sldId id="547" r:id="rId34"/>
-    <p:sldId id="286" r:id="rId35"/>
-    <p:sldId id="287" r:id="rId36"/>
-    <p:sldId id="288" r:id="rId37"/>
-    <p:sldId id="289" r:id="rId38"/>
-    <p:sldId id="290" r:id="rId39"/>
-    <p:sldId id="548" r:id="rId40"/>
-    <p:sldId id="550" r:id="rId41"/>
-    <p:sldId id="551" r:id="rId42"/>
-    <p:sldId id="291" r:id="rId43"/>
-    <p:sldId id="293" r:id="rId44"/>
-    <p:sldId id="294" r:id="rId45"/>
-    <p:sldId id="295" r:id="rId46"/>
-    <p:sldId id="296" r:id="rId47"/>
-    <p:sldId id="297" r:id="rId48"/>
-    <p:sldId id="298" r:id="rId49"/>
-    <p:sldId id="549" r:id="rId50"/>
+    <p:sldId id="552" r:id="rId9"/>
+    <p:sldId id="263" r:id="rId10"/>
+    <p:sldId id="265" r:id="rId11"/>
+    <p:sldId id="267" r:id="rId12"/>
+    <p:sldId id="266" r:id="rId13"/>
+    <p:sldId id="268" r:id="rId14"/>
+    <p:sldId id="269" r:id="rId15"/>
+    <p:sldId id="270" r:id="rId16"/>
+    <p:sldId id="271" r:id="rId17"/>
+    <p:sldId id="272" r:id="rId18"/>
+    <p:sldId id="264" r:id="rId19"/>
+    <p:sldId id="273" r:id="rId20"/>
+    <p:sldId id="274" r:id="rId21"/>
+    <p:sldId id="275" r:id="rId22"/>
+    <p:sldId id="277" r:id="rId23"/>
+    <p:sldId id="276" r:id="rId24"/>
+    <p:sldId id="278" r:id="rId25"/>
+    <p:sldId id="279" r:id="rId26"/>
+    <p:sldId id="281" r:id="rId27"/>
+    <p:sldId id="280" r:id="rId28"/>
+    <p:sldId id="282" r:id="rId29"/>
+    <p:sldId id="285" r:id="rId30"/>
+    <p:sldId id="292" r:id="rId31"/>
+    <p:sldId id="283" r:id="rId32"/>
+    <p:sldId id="299" r:id="rId33"/>
+    <p:sldId id="546" r:id="rId34"/>
+    <p:sldId id="547" r:id="rId35"/>
+    <p:sldId id="286" r:id="rId36"/>
+    <p:sldId id="287" r:id="rId37"/>
+    <p:sldId id="288" r:id="rId38"/>
+    <p:sldId id="289" r:id="rId39"/>
+    <p:sldId id="290" r:id="rId40"/>
+    <p:sldId id="548" r:id="rId41"/>
+    <p:sldId id="550" r:id="rId42"/>
+    <p:sldId id="551" r:id="rId43"/>
+    <p:sldId id="291" r:id="rId44"/>
+    <p:sldId id="293" r:id="rId45"/>
+    <p:sldId id="294" r:id="rId46"/>
+    <p:sldId id="295" r:id="rId47"/>
+    <p:sldId id="296" r:id="rId48"/>
+    <p:sldId id="297" r:id="rId49"/>
+    <p:sldId id="298" r:id="rId50"/>
+    <p:sldId id="549" r:id="rId51"/>
   </p:sldIdLst>
   <p:sldSz cx="12192000" cy="6858000"/>
   <p:notesSz cx="6858000" cy="9144000"/>
@@ -156,6 +157,64 @@
     </a:lvl9pPr>
   </p:defaultTextStyle>
   <p:extLst>
+    <p:ext uri="{521415D9-36F7-43E2-AB2F-B90AF26B5E84}">
+      <p14:sectionLst xmlns:p14="http://schemas.microsoft.com/office/powerpoint/2010/main">
+        <p14:section name="Default Section" id="{3CC712C7-4693-4CC6-997F-31779A21E295}">
+          <p14:sldIdLst>
+            <p14:sldId id="256"/>
+            <p14:sldId id="257"/>
+            <p14:sldId id="258"/>
+            <p14:sldId id="259"/>
+            <p14:sldId id="260"/>
+            <p14:sldId id="261"/>
+            <p14:sldId id="262"/>
+            <p14:sldId id="552"/>
+            <p14:sldId id="263"/>
+            <p14:sldId id="265"/>
+            <p14:sldId id="267"/>
+            <p14:sldId id="266"/>
+            <p14:sldId id="268"/>
+            <p14:sldId id="269"/>
+            <p14:sldId id="270"/>
+            <p14:sldId id="271"/>
+            <p14:sldId id="272"/>
+            <p14:sldId id="264"/>
+            <p14:sldId id="273"/>
+            <p14:sldId id="274"/>
+            <p14:sldId id="275"/>
+            <p14:sldId id="277"/>
+            <p14:sldId id="276"/>
+            <p14:sldId id="278"/>
+            <p14:sldId id="279"/>
+            <p14:sldId id="281"/>
+            <p14:sldId id="280"/>
+            <p14:sldId id="282"/>
+            <p14:sldId id="285"/>
+            <p14:sldId id="292"/>
+            <p14:sldId id="283"/>
+            <p14:sldId id="299"/>
+            <p14:sldId id="546"/>
+            <p14:sldId id="547"/>
+            <p14:sldId id="286"/>
+            <p14:sldId id="287"/>
+            <p14:sldId id="288"/>
+            <p14:sldId id="289"/>
+            <p14:sldId id="290"/>
+            <p14:sldId id="548"/>
+            <p14:sldId id="550"/>
+            <p14:sldId id="551"/>
+            <p14:sldId id="291"/>
+            <p14:sldId id="293"/>
+            <p14:sldId id="294"/>
+            <p14:sldId id="295"/>
+            <p14:sldId id="296"/>
+            <p14:sldId id="297"/>
+            <p14:sldId id="298"/>
+            <p14:sldId id="549"/>
+          </p14:sldIdLst>
+        </p14:section>
+      </p14:sectionLst>
+    </p:ext>
     <p:ext uri="{EFAFB233-063F-42B5-8137-9DF3F51BA10A}">
       <p15:sldGuideLst xmlns:p15="http://schemas.microsoft.com/office/powerpoint/2012/main">
         <p15:guide id="1" orient="horz" pos="2160" userDrawn="1">
@@ -256,7 +315,7 @@
           <a:p>
             <a:fld id="{FA80D1D5-23B0-48CF-B740-339E0CD4C8AC}" type="datetimeFigureOut">
               <a:rPr lang="en-US" smtClean="0"/>
-              <a:t>2/13/2026</a:t>
+              <a:t>3/1/2026</a:t>
             </a:fld>
             <a:endParaRPr lang="en-US"/>
           </a:p>
@@ -934,7 +993,7 @@
           <a:p>
             <a:fld id="{04C6FD83-05D8-42D1-B0E7-B1E4B88E64DC}" type="slidenum">
               <a:rPr lang="en-US" smtClean="0"/>
-              <a:t>10</a:t>
+              <a:t>11</a:t>
             </a:fld>
             <a:endParaRPr lang="en-US"/>
           </a:p>
@@ -1175,7 +1234,7 @@
           <a:p>
             <a:fld id="{04C6FD83-05D8-42D1-B0E7-B1E4B88E64DC}" type="slidenum">
               <a:rPr lang="en-US" smtClean="0"/>
-              <a:t>11</a:t>
+              <a:t>12</a:t>
             </a:fld>
             <a:endParaRPr lang="en-US"/>
           </a:p>
@@ -1317,7 +1376,7 @@
           <a:p>
             <a:fld id="{04C6FD83-05D8-42D1-B0E7-B1E4B88E64DC}" type="slidenum">
               <a:rPr lang="en-US" smtClean="0"/>
-              <a:t>12</a:t>
+              <a:t>13</a:t>
             </a:fld>
             <a:endParaRPr lang="en-US"/>
           </a:p>
@@ -1475,7 +1534,7 @@
           <a:p>
             <a:fld id="{04C6FD83-05D8-42D1-B0E7-B1E4B88E64DC}" type="slidenum">
               <a:rPr lang="en-US" smtClean="0"/>
-              <a:t>13</a:t>
+              <a:t>14</a:t>
             </a:fld>
             <a:endParaRPr lang="en-US"/>
           </a:p>
@@ -1668,7 +1727,7 @@
           <a:p>
             <a:fld id="{04C6FD83-05D8-42D1-B0E7-B1E4B88E64DC}" type="slidenum">
               <a:rPr lang="en-US" smtClean="0"/>
-              <a:t>14</a:t>
+              <a:t>15</a:t>
             </a:fld>
             <a:endParaRPr lang="en-US"/>
           </a:p>
@@ -1999,7 +2058,7 @@
           <a:p>
             <a:fld id="{04C6FD83-05D8-42D1-B0E7-B1E4B88E64DC}" type="slidenum">
               <a:rPr lang="en-US" smtClean="0"/>
-              <a:t>15</a:t>
+              <a:t>16</a:t>
             </a:fld>
             <a:endParaRPr lang="en-US"/>
           </a:p>
@@ -2270,7 +2329,7 @@
           <a:p>
             <a:fld id="{04C6FD83-05D8-42D1-B0E7-B1E4B88E64DC}" type="slidenum">
               <a:rPr lang="en-US" smtClean="0"/>
-              <a:t>16</a:t>
+              <a:t>17</a:t>
             </a:fld>
             <a:endParaRPr lang="en-US"/>
           </a:p>
@@ -2354,7 +2413,7 @@
           <a:p>
             <a:fld id="{04C6FD83-05D8-42D1-B0E7-B1E4B88E64DC}" type="slidenum">
               <a:rPr lang="en-US" smtClean="0"/>
-              <a:t>17</a:t>
+              <a:t>18</a:t>
             </a:fld>
             <a:endParaRPr lang="en-US"/>
           </a:p>
@@ -2548,7 +2607,7 @@
           <a:p>
             <a:fld id="{04C6FD83-05D8-42D1-B0E7-B1E4B88E64DC}" type="slidenum">
               <a:rPr lang="en-US" smtClean="0"/>
-              <a:t>18</a:t>
+              <a:t>19</a:t>
             </a:fld>
             <a:endParaRPr lang="en-US"/>
           </a:p>
@@ -2731,7 +2790,7 @@
           <a:p>
             <a:fld id="{04C6FD83-05D8-42D1-B0E7-B1E4B88E64DC}" type="slidenum">
               <a:rPr lang="en-US" smtClean="0"/>
-              <a:t>19</a:t>
+              <a:t>20</a:t>
             </a:fld>
             <a:endParaRPr lang="en-US"/>
           </a:p>
@@ -2979,7 +3038,7 @@
           <a:p>
             <a:fld id="{04C6FD83-05D8-42D1-B0E7-B1E4B88E64DC}" type="slidenum">
               <a:rPr lang="en-US" smtClean="0"/>
-              <a:t>20</a:t>
+              <a:t>21</a:t>
             </a:fld>
             <a:endParaRPr lang="en-US"/>
           </a:p>
@@ -3331,7 +3390,7 @@
           <a:p>
             <a:fld id="{04C6FD83-05D8-42D1-B0E7-B1E4B88E64DC}" type="slidenum">
               <a:rPr lang="en-US" smtClean="0"/>
-              <a:t>21</a:t>
+              <a:t>22</a:t>
             </a:fld>
             <a:endParaRPr lang="en-US"/>
           </a:p>
@@ -3623,7 +3682,7 @@
           <a:p>
             <a:fld id="{04C6FD83-05D8-42D1-B0E7-B1E4B88E64DC}" type="slidenum">
               <a:rPr lang="en-US" smtClean="0"/>
-              <a:t>22</a:t>
+              <a:t>23</a:t>
             </a:fld>
             <a:endParaRPr lang="en-US"/>
           </a:p>
@@ -3936,7 +3995,7 @@
           <a:p>
             <a:fld id="{04C6FD83-05D8-42D1-B0E7-B1E4B88E64DC}" type="slidenum">
               <a:rPr lang="en-US" smtClean="0"/>
-              <a:t>23</a:t>
+              <a:t>24</a:t>
             </a:fld>
             <a:endParaRPr lang="en-US"/>
           </a:p>
@@ -4228,7 +4287,7 @@
           <a:p>
             <a:fld id="{04C6FD83-05D8-42D1-B0E7-B1E4B88E64DC}" type="slidenum">
               <a:rPr lang="en-US" smtClean="0"/>
-              <a:t>24</a:t>
+              <a:t>25</a:t>
             </a:fld>
             <a:endParaRPr lang="en-US"/>
           </a:p>
@@ -4593,7 +4652,7 @@
           <a:p>
             <a:fld id="{04C6FD83-05D8-42D1-B0E7-B1E4B88E64DC}" type="slidenum">
               <a:rPr lang="en-US" smtClean="0"/>
-              <a:t>25</a:t>
+              <a:t>26</a:t>
             </a:fld>
             <a:endParaRPr lang="en-US"/>
           </a:p>
@@ -4842,7 +4901,7 @@
           <a:p>
             <a:fld id="{04C6FD83-05D8-42D1-B0E7-B1E4B88E64DC}" type="slidenum">
               <a:rPr lang="en-US" smtClean="0"/>
-              <a:t>26</a:t>
+              <a:t>27</a:t>
             </a:fld>
             <a:endParaRPr lang="en-US"/>
           </a:p>
@@ -5367,7 +5426,7 @@
           <a:p>
             <a:fld id="{04C6FD83-05D8-42D1-B0E7-B1E4B88E64DC}" type="slidenum">
               <a:rPr lang="en-US" smtClean="0"/>
-              <a:t>27</a:t>
+              <a:t>28</a:t>
             </a:fld>
             <a:endParaRPr lang="en-US"/>
           </a:p>
@@ -5685,7 +5744,7 @@
           <a:p>
             <a:fld id="{04C6FD83-05D8-42D1-B0E7-B1E4B88E64DC}" type="slidenum">
               <a:rPr lang="en-US" smtClean="0"/>
-              <a:t>28</a:t>
+              <a:t>29</a:t>
             </a:fld>
             <a:endParaRPr lang="en-US"/>
           </a:p>
@@ -5866,7 +5925,7 @@
           <a:p>
             <a:fld id="{04C6FD83-05D8-42D1-B0E7-B1E4B88E64DC}" type="slidenum">
               <a:rPr lang="en-US" smtClean="0"/>
-              <a:t>29</a:t>
+              <a:t>30</a:t>
             </a:fld>
             <a:endParaRPr lang="en-US"/>
           </a:p>
@@ -6356,7 +6415,7 @@
           <a:p>
             <a:fld id="{04C6FD83-05D8-42D1-B0E7-B1E4B88E64DC}" type="slidenum">
               <a:rPr lang="en-US" smtClean="0"/>
-              <a:t>30</a:t>
+              <a:t>31</a:t>
             </a:fld>
             <a:endParaRPr lang="en-US"/>
           </a:p>
@@ -6572,7 +6631,7 @@
           <a:p>
             <a:fld id="{04C6FD83-05D8-42D1-B0E7-B1E4B88E64DC}" type="slidenum">
               <a:rPr lang="en-US" smtClean="0"/>
-              <a:t>31</a:t>
+              <a:t>32</a:t>
             </a:fld>
             <a:endParaRPr lang="en-US"/>
           </a:p>
@@ -6656,7 +6715,7 @@
           <a:p>
             <a:fld id="{04C6FD83-05D8-42D1-B0E7-B1E4B88E64DC}" type="slidenum">
               <a:rPr lang="en-US" smtClean="0"/>
-              <a:t>32</a:t>
+              <a:t>33</a:t>
             </a:fld>
             <a:endParaRPr lang="en-US"/>
           </a:p>
@@ -7014,7 +7073,7 @@
           <a:p>
             <a:fld id="{04C6FD83-05D8-42D1-B0E7-B1E4B88E64DC}" type="slidenum">
               <a:rPr lang="en-US" smtClean="0"/>
-              <a:t>33</a:t>
+              <a:t>34</a:t>
             </a:fld>
             <a:endParaRPr lang="en-US"/>
           </a:p>
@@ -7515,7 +7574,7 @@
           <a:p>
             <a:fld id="{04C6FD83-05D8-42D1-B0E7-B1E4B88E64DC}" type="slidenum">
               <a:rPr lang="en-US" smtClean="0"/>
-              <a:t>34</a:t>
+              <a:t>35</a:t>
             </a:fld>
             <a:endParaRPr lang="en-US"/>
           </a:p>
@@ -7909,7 +7968,7 @@
           <a:p>
             <a:fld id="{04C6FD83-05D8-42D1-B0E7-B1E4B88E64DC}" type="slidenum">
               <a:rPr lang="en-US" smtClean="0"/>
-              <a:t>35</a:t>
+              <a:t>36</a:t>
             </a:fld>
             <a:endParaRPr lang="en-US"/>
           </a:p>
@@ -8310,7 +8369,7 @@
           <a:p>
             <a:fld id="{04C6FD83-05D8-42D1-B0E7-B1E4B88E64DC}" type="slidenum">
               <a:rPr lang="en-US" smtClean="0"/>
-              <a:t>36</a:t>
+              <a:t>37</a:t>
             </a:fld>
             <a:endParaRPr lang="en-US"/>
           </a:p>
@@ -8622,7 +8681,7 @@
           <a:p>
             <a:fld id="{04C6FD83-05D8-42D1-B0E7-B1E4B88E64DC}" type="slidenum">
               <a:rPr lang="en-US" smtClean="0"/>
-              <a:t>37</a:t>
+              <a:t>38</a:t>
             </a:fld>
             <a:endParaRPr lang="en-US"/>
           </a:p>
@@ -8834,7 +8893,7 @@
           <a:p>
             <a:fld id="{04C6FD83-05D8-42D1-B0E7-B1E4B88E64DC}" type="slidenum">
               <a:rPr lang="en-US" smtClean="0"/>
-              <a:t>38</a:t>
+              <a:t>39</a:t>
             </a:fld>
             <a:endParaRPr lang="en-US"/>
           </a:p>
@@ -8918,7 +8977,7 @@
           <a:p>
             <a:fld id="{04C6FD83-05D8-42D1-B0E7-B1E4B88E64DC}" type="slidenum">
               <a:rPr lang="en-US" smtClean="0"/>
-              <a:t>39</a:t>
+              <a:t>40</a:t>
             </a:fld>
             <a:endParaRPr lang="en-US"/>
           </a:p>
@@ -9286,7 +9345,7 @@
           <a:p>
             <a:fld id="{04C6FD83-05D8-42D1-B0E7-B1E4B88E64DC}" type="slidenum">
               <a:rPr lang="en-US" smtClean="0"/>
-              <a:t>40</a:t>
+              <a:t>41</a:t>
             </a:fld>
             <a:endParaRPr lang="en-US"/>
           </a:p>
@@ -9542,7 +9601,7 @@
           <a:p>
             <a:fld id="{04C6FD83-05D8-42D1-B0E7-B1E4B88E64DC}" type="slidenum">
               <a:rPr lang="en-US" smtClean="0"/>
-              <a:t>41</a:t>
+              <a:t>42</a:t>
             </a:fld>
             <a:endParaRPr lang="en-US"/>
           </a:p>
@@ -9626,7 +9685,7 @@
           <a:p>
             <a:fld id="{04C6FD83-05D8-42D1-B0E7-B1E4B88E64DC}" type="slidenum">
               <a:rPr lang="en-US" smtClean="0"/>
-              <a:t>42</a:t>
+              <a:t>43</a:t>
             </a:fld>
             <a:endParaRPr lang="en-US"/>
           </a:p>
@@ -9773,7 +9832,7 @@
           <a:p>
             <a:fld id="{04C6FD83-05D8-42D1-B0E7-B1E4B88E64DC}" type="slidenum">
               <a:rPr lang="en-US" smtClean="0"/>
-              <a:t>43</a:t>
+              <a:t>44</a:t>
             </a:fld>
             <a:endParaRPr lang="en-US"/>
           </a:p>
@@ -9930,7 +9989,7 @@
           <a:p>
             <a:fld id="{04C6FD83-05D8-42D1-B0E7-B1E4B88E64DC}" type="slidenum">
               <a:rPr lang="en-US" smtClean="0"/>
-              <a:t>44</a:t>
+              <a:t>45</a:t>
             </a:fld>
             <a:endParaRPr lang="en-US"/>
           </a:p>
@@ -10108,7 +10167,7 @@
           <a:p>
             <a:fld id="{04C6FD83-05D8-42D1-B0E7-B1E4B88E64DC}" type="slidenum">
               <a:rPr lang="en-US" smtClean="0"/>
-              <a:t>45</a:t>
+              <a:t>46</a:t>
             </a:fld>
             <a:endParaRPr lang="en-US"/>
           </a:p>
@@ -10374,7 +10433,7 @@
           <a:p>
             <a:fld id="{04C6FD83-05D8-42D1-B0E7-B1E4B88E64DC}" type="slidenum">
               <a:rPr lang="en-US" smtClean="0"/>
-              <a:t>46</a:t>
+              <a:t>47</a:t>
             </a:fld>
             <a:endParaRPr lang="en-US"/>
           </a:p>
@@ -10656,7 +10715,7 @@
           <a:p>
             <a:fld id="{04C6FD83-05D8-42D1-B0E7-B1E4B88E64DC}" type="slidenum">
               <a:rPr lang="en-US" smtClean="0"/>
-              <a:t>47</a:t>
+              <a:t>48</a:t>
             </a:fld>
             <a:endParaRPr lang="en-US"/>
           </a:p>
@@ -10986,7 +11045,7 @@
           <a:p>
             <a:fld id="{04C6FD83-05D8-42D1-B0E7-B1E4B88E64DC}" type="slidenum">
               <a:rPr lang="en-US" smtClean="0"/>
-              <a:t>48</a:t>
+              <a:t>49</a:t>
             </a:fld>
             <a:endParaRPr lang="en-US"/>
           </a:p>
@@ -11092,7 +11151,7 @@
           <a:p>
             <a:fld id="{04C6FD83-05D8-42D1-B0E7-B1E4B88E64DC}" type="slidenum">
               <a:rPr lang="en-US" smtClean="0"/>
-              <a:t>49</a:t>
+              <a:t>50</a:t>
             </a:fld>
             <a:endParaRPr lang="en-US"/>
           </a:p>
@@ -12285,7 +12344,7 @@
           <a:p>
             <a:fld id="{04C6FD83-05D8-42D1-B0E7-B1E4B88E64DC}" type="slidenum">
               <a:rPr lang="en-US" smtClean="0"/>
-              <a:t>8</a:t>
+              <a:t>9</a:t>
             </a:fld>
             <a:endParaRPr lang="en-US"/>
           </a:p>
@@ -12619,7 +12678,7 @@
           <a:p>
             <a:fld id="{04C6FD83-05D8-42D1-B0E7-B1E4B88E64DC}" type="slidenum">
               <a:rPr lang="en-US" smtClean="0"/>
-              <a:t>9</a:t>
+              <a:t>10</a:t>
             </a:fld>
             <a:endParaRPr lang="en-US"/>
           </a:p>
@@ -12785,7 +12844,7 @@
           <a:p>
             <a:fld id="{85DDA0F7-7300-4760-98C6-85A3ACBFC286}" type="datetimeFigureOut">
               <a:rPr lang="en-US" smtClean="0"/>
-              <a:t>2/13/2026</a:t>
+              <a:t>3/1/2026</a:t>
             </a:fld>
             <a:endParaRPr lang="en-US"/>
           </a:p>
@@ -12983,7 +13042,7 @@
           <a:p>
             <a:fld id="{85DDA0F7-7300-4760-98C6-85A3ACBFC286}" type="datetimeFigureOut">
               <a:rPr lang="en-US" smtClean="0"/>
-              <a:t>2/13/2026</a:t>
+              <a:t>3/1/2026</a:t>
             </a:fld>
             <a:endParaRPr lang="en-US"/>
           </a:p>
@@ -13191,7 +13250,7 @@
           <a:p>
             <a:fld id="{85DDA0F7-7300-4760-98C6-85A3ACBFC286}" type="datetimeFigureOut">
               <a:rPr lang="en-US" smtClean="0"/>
-              <a:t>2/13/2026</a:t>
+              <a:t>3/1/2026</a:t>
             </a:fld>
             <a:endParaRPr lang="en-US"/>
           </a:p>
@@ -13389,7 +13448,7 @@
           <a:p>
             <a:fld id="{85DDA0F7-7300-4760-98C6-85A3ACBFC286}" type="datetimeFigureOut">
               <a:rPr lang="en-US" smtClean="0"/>
-              <a:t>2/13/2026</a:t>
+              <a:t>3/1/2026</a:t>
             </a:fld>
             <a:endParaRPr lang="en-US"/>
           </a:p>
@@ -13664,7 +13723,7 @@
           <a:p>
             <a:fld id="{85DDA0F7-7300-4760-98C6-85A3ACBFC286}" type="datetimeFigureOut">
               <a:rPr lang="en-US" smtClean="0"/>
-              <a:t>2/13/2026</a:t>
+              <a:t>3/1/2026</a:t>
             </a:fld>
             <a:endParaRPr lang="en-US"/>
           </a:p>
@@ -13929,7 +13988,7 @@
           <a:p>
             <a:fld id="{85DDA0F7-7300-4760-98C6-85A3ACBFC286}" type="datetimeFigureOut">
               <a:rPr lang="en-US" smtClean="0"/>
-              <a:t>2/13/2026</a:t>
+              <a:t>3/1/2026</a:t>
             </a:fld>
             <a:endParaRPr lang="en-US"/>
           </a:p>
@@ -14341,7 +14400,7 @@
           <a:p>
             <a:fld id="{85DDA0F7-7300-4760-98C6-85A3ACBFC286}" type="datetimeFigureOut">
               <a:rPr lang="en-US" smtClean="0"/>
-              <a:t>2/13/2026</a:t>
+              <a:t>3/1/2026</a:t>
             </a:fld>
             <a:endParaRPr lang="en-US"/>
           </a:p>
@@ -14482,7 +14541,7 @@
           <a:p>
             <a:fld id="{85DDA0F7-7300-4760-98C6-85A3ACBFC286}" type="datetimeFigureOut">
               <a:rPr lang="en-US" smtClean="0"/>
-              <a:t>2/13/2026</a:t>
+              <a:t>3/1/2026</a:t>
             </a:fld>
             <a:endParaRPr lang="en-US"/>
           </a:p>
@@ -14595,7 +14654,7 @@
           <a:p>
             <a:fld id="{85DDA0F7-7300-4760-98C6-85A3ACBFC286}" type="datetimeFigureOut">
               <a:rPr lang="en-US" smtClean="0"/>
-              <a:t>2/13/2026</a:t>
+              <a:t>3/1/2026</a:t>
             </a:fld>
             <a:endParaRPr lang="en-US"/>
           </a:p>
@@ -14906,7 +14965,7 @@
           <a:p>
             <a:fld id="{85DDA0F7-7300-4760-98C6-85A3ACBFC286}" type="datetimeFigureOut">
               <a:rPr lang="en-US" smtClean="0"/>
-              <a:t>2/13/2026</a:t>
+              <a:t>3/1/2026</a:t>
             </a:fld>
             <a:endParaRPr lang="en-US"/>
           </a:p>
@@ -15194,7 +15253,7 @@
           <a:p>
             <a:fld id="{85DDA0F7-7300-4760-98C6-85A3ACBFC286}" type="datetimeFigureOut">
               <a:rPr lang="en-US" smtClean="0"/>
-              <a:t>2/13/2026</a:t>
+              <a:t>3/1/2026</a:t>
             </a:fld>
             <a:endParaRPr lang="en-US"/>
           </a:p>
@@ -15435,7 +15494,7 @@
           <a:p>
             <a:fld id="{85DDA0F7-7300-4760-98C6-85A3ACBFC286}" type="datetimeFigureOut">
               <a:rPr lang="en-US" smtClean="0"/>
-              <a:t>2/13/2026</a:t>
+              <a:t>3/1/2026</a:t>
             </a:fld>
             <a:endParaRPr lang="en-US"/>
           </a:p>
@@ -15928,6 +15987,2012 @@
   <p:cSld>
     <p:spTree>
       <p:nvGrpSpPr>
+        <p:cNvPr id="1" name=""/>
+        <p:cNvGrpSpPr/>
+        <p:nvPr/>
+      </p:nvGrpSpPr>
+      <p:grpSpPr>
+        <a:xfrm>
+          <a:off x="0" y="0"/>
+          <a:ext cx="0" cy="0"/>
+          <a:chOff x="0" y="0"/>
+          <a:chExt cx="0" cy="0"/>
+        </a:xfrm>
+      </p:grpSpPr>
+      <p:sp>
+        <p:nvSpPr>
+          <p:cNvPr id="4" name="Title 3">
+            <a:extLst>
+              <a:ext uri="{FF2B5EF4-FFF2-40B4-BE49-F238E27FC236}">
+                <a16:creationId xmlns:a16="http://schemas.microsoft.com/office/drawing/2014/main" id="{0466239D-AC6F-9C37-2F7F-DBE182E79A3C}"/>
+              </a:ext>
+            </a:extLst>
+          </p:cNvPr>
+          <p:cNvSpPr>
+            <a:spLocks noGrp="1"/>
+          </p:cNvSpPr>
+          <p:nvPr>
+            <p:ph type="title"/>
+          </p:nvPr>
+        </p:nvSpPr>
+        <p:spPr/>
+        <p:txBody>
+          <a:bodyPr/>
+          <a:lstStyle/>
+          <a:p>
+            <a:r>
+              <a:rPr lang="ru-RU" dirty="0"/>
+              <a:t>Нахождение максимального элемента массива (</a:t>
+            </a:r>
+            <a:r>
+              <a:rPr lang="en-US" dirty="0"/>
+              <a:t>x86-64)</a:t>
+            </a:r>
+          </a:p>
+        </p:txBody>
+      </p:sp>
+      <p:sp>
+        <p:nvSpPr>
+          <p:cNvPr id="6" name="TextBox 5">
+            <a:extLst>
+              <a:ext uri="{FF2B5EF4-FFF2-40B4-BE49-F238E27FC236}">
+                <a16:creationId xmlns:a16="http://schemas.microsoft.com/office/drawing/2014/main" id="{3ECF2728-6F83-2C45-80DB-B89E33097825}"/>
+              </a:ext>
+            </a:extLst>
+          </p:cNvPr>
+          <p:cNvSpPr txBox="1"/>
+          <p:nvPr/>
+        </p:nvSpPr>
+        <p:spPr>
+          <a:xfrm>
+            <a:off x="838200" y="1964854"/>
+            <a:ext cx="4502426" cy="4247317"/>
+          </a:xfrm>
+          <a:prstGeom prst="rect">
+            <a:avLst/>
+          </a:prstGeom>
+          <a:noFill/>
+        </p:spPr>
+        <p:txBody>
+          <a:bodyPr wrap="square">
+            <a:spAutoFit/>
+          </a:bodyPr>
+          <a:lstStyle/>
+          <a:p>
+            <a:pPr>
+              <a:buNone/>
+            </a:pPr>
+            <a:r>
+              <a:rPr lang="en-US" b="0" dirty="0">
+                <a:solidFill>
+                  <a:srgbClr val="0000FF"/>
+                </a:solidFill>
+                <a:effectLst/>
+                <a:latin typeface="Consolas" panose="020B0609020204030204" pitchFamily="49" charset="0"/>
+              </a:rPr>
+              <a:t>#include</a:t>
+            </a:r>
+            <a:r>
+              <a:rPr lang="en-US" b="0" dirty="0">
+                <a:solidFill>
+                  <a:srgbClr val="000000"/>
+                </a:solidFill>
+                <a:effectLst/>
+                <a:latin typeface="Consolas" panose="020B0609020204030204" pitchFamily="49" charset="0"/>
+              </a:rPr>
+              <a:t> </a:t>
+            </a:r>
+            <a:r>
+              <a:rPr lang="en-US" b="0" dirty="0">
+                <a:solidFill>
+                  <a:srgbClr val="0000FF"/>
+                </a:solidFill>
+                <a:effectLst/>
+                <a:latin typeface="Consolas" panose="020B0609020204030204" pitchFamily="49" charset="0"/>
+              </a:rPr>
+              <a:t>&lt;</a:t>
+            </a:r>
+            <a:r>
+              <a:rPr lang="en-US" b="0" dirty="0" err="1">
+                <a:solidFill>
+                  <a:srgbClr val="A31515"/>
+                </a:solidFill>
+                <a:effectLst/>
+                <a:latin typeface="Consolas" panose="020B0609020204030204" pitchFamily="49" charset="0"/>
+              </a:rPr>
+              <a:t>limits.h</a:t>
+            </a:r>
+            <a:r>
+              <a:rPr lang="en-US" b="0" dirty="0">
+                <a:solidFill>
+                  <a:srgbClr val="0000FF"/>
+                </a:solidFill>
+                <a:effectLst/>
+                <a:latin typeface="Consolas" panose="020B0609020204030204" pitchFamily="49" charset="0"/>
+              </a:rPr>
+              <a:t>&gt;</a:t>
+            </a:r>
+            <a:endParaRPr lang="en-US" b="0" dirty="0">
+              <a:solidFill>
+                <a:srgbClr val="000000"/>
+              </a:solidFill>
+              <a:effectLst/>
+              <a:latin typeface="Consolas" panose="020B0609020204030204" pitchFamily="49" charset="0"/>
+            </a:endParaRPr>
+          </a:p>
+          <a:p>
+            <a:pPr>
+              <a:buNone/>
+            </a:pPr>
+            <a:endParaRPr lang="en-US" b="0" dirty="0">
+              <a:solidFill>
+                <a:srgbClr val="000000"/>
+              </a:solidFill>
+              <a:effectLst/>
+              <a:latin typeface="Consolas" panose="020B0609020204030204" pitchFamily="49" charset="0"/>
+            </a:endParaRPr>
+          </a:p>
+          <a:p>
+            <a:pPr>
+              <a:buNone/>
+            </a:pPr>
+            <a:r>
+              <a:rPr lang="en-US" b="0" dirty="0">
+                <a:solidFill>
+                  <a:srgbClr val="0000FF"/>
+                </a:solidFill>
+                <a:effectLst/>
+                <a:latin typeface="Consolas" panose="020B0609020204030204" pitchFamily="49" charset="0"/>
+              </a:rPr>
+              <a:t>int</a:t>
+            </a:r>
+            <a:r>
+              <a:rPr lang="en-US" b="0" dirty="0">
+                <a:solidFill>
+                  <a:srgbClr val="000000"/>
+                </a:solidFill>
+                <a:effectLst/>
+                <a:latin typeface="Consolas" panose="020B0609020204030204" pitchFamily="49" charset="0"/>
+              </a:rPr>
+              <a:t> max(</a:t>
+            </a:r>
+            <a:r>
+              <a:rPr lang="en-US" b="0" dirty="0">
+                <a:solidFill>
+                  <a:srgbClr val="0000FF"/>
+                </a:solidFill>
+                <a:effectLst/>
+                <a:latin typeface="Consolas" panose="020B0609020204030204" pitchFamily="49" charset="0"/>
+              </a:rPr>
+              <a:t>int</a:t>
+            </a:r>
+            <a:r>
+              <a:rPr lang="en-US" b="0" dirty="0">
+                <a:solidFill>
+                  <a:srgbClr val="000000"/>
+                </a:solidFill>
+                <a:effectLst/>
+                <a:latin typeface="Consolas" panose="020B0609020204030204" pitchFamily="49" charset="0"/>
+              </a:rPr>
+              <a:t> *a, </a:t>
+            </a:r>
+            <a:r>
+              <a:rPr lang="en-US" b="0" dirty="0">
+                <a:solidFill>
+                  <a:srgbClr val="0000FF"/>
+                </a:solidFill>
+                <a:effectLst/>
+                <a:latin typeface="Consolas" panose="020B0609020204030204" pitchFamily="49" charset="0"/>
+              </a:rPr>
+              <a:t>int</a:t>
+            </a:r>
+            <a:r>
+              <a:rPr lang="en-US" b="0" dirty="0">
+                <a:solidFill>
+                  <a:srgbClr val="000000"/>
+                </a:solidFill>
+                <a:effectLst/>
+                <a:latin typeface="Consolas" panose="020B0609020204030204" pitchFamily="49" charset="0"/>
+              </a:rPr>
+              <a:t> n) {</a:t>
+            </a:r>
+          </a:p>
+          <a:p>
+            <a:pPr>
+              <a:buNone/>
+            </a:pPr>
+            <a:r>
+              <a:rPr lang="en-US" b="0" dirty="0">
+                <a:solidFill>
+                  <a:srgbClr val="000000"/>
+                </a:solidFill>
+                <a:effectLst/>
+                <a:latin typeface="Consolas" panose="020B0609020204030204" pitchFamily="49" charset="0"/>
+              </a:rPr>
+              <a:t>    </a:t>
+            </a:r>
+            <a:r>
+              <a:rPr lang="en-US" b="0" dirty="0">
+                <a:solidFill>
+                  <a:srgbClr val="0000FF"/>
+                </a:solidFill>
+                <a:effectLst/>
+                <a:latin typeface="Consolas" panose="020B0609020204030204" pitchFamily="49" charset="0"/>
+              </a:rPr>
+              <a:t>if</a:t>
+            </a:r>
+            <a:r>
+              <a:rPr lang="en-US" b="0" dirty="0">
+                <a:solidFill>
+                  <a:srgbClr val="000000"/>
+                </a:solidFill>
+                <a:effectLst/>
+                <a:latin typeface="Consolas" panose="020B0609020204030204" pitchFamily="49" charset="0"/>
+              </a:rPr>
+              <a:t> (n == </a:t>
+            </a:r>
+            <a:r>
+              <a:rPr lang="en-US" b="0" dirty="0">
+                <a:solidFill>
+                  <a:srgbClr val="098658"/>
+                </a:solidFill>
+                <a:effectLst/>
+                <a:latin typeface="Consolas" panose="020B0609020204030204" pitchFamily="49" charset="0"/>
+              </a:rPr>
+              <a:t>0</a:t>
+            </a:r>
+            <a:r>
+              <a:rPr lang="en-US" b="0" dirty="0">
+                <a:solidFill>
+                  <a:srgbClr val="000000"/>
+                </a:solidFill>
+                <a:effectLst/>
+                <a:latin typeface="Consolas" panose="020B0609020204030204" pitchFamily="49" charset="0"/>
+              </a:rPr>
+              <a:t>) {</a:t>
+            </a:r>
+          </a:p>
+          <a:p>
+            <a:pPr>
+              <a:buNone/>
+            </a:pPr>
+            <a:r>
+              <a:rPr lang="en-US" b="0" dirty="0">
+                <a:solidFill>
+                  <a:srgbClr val="000000"/>
+                </a:solidFill>
+                <a:effectLst/>
+                <a:latin typeface="Consolas" panose="020B0609020204030204" pitchFamily="49" charset="0"/>
+              </a:rPr>
+              <a:t>        </a:t>
+            </a:r>
+            <a:r>
+              <a:rPr lang="en-US" b="0" dirty="0">
+                <a:solidFill>
+                  <a:srgbClr val="0000FF"/>
+                </a:solidFill>
+                <a:effectLst/>
+                <a:latin typeface="Consolas" panose="020B0609020204030204" pitchFamily="49" charset="0"/>
+              </a:rPr>
+              <a:t>return</a:t>
+            </a:r>
+            <a:r>
+              <a:rPr lang="en-US" b="0" dirty="0">
+                <a:solidFill>
+                  <a:srgbClr val="000000"/>
+                </a:solidFill>
+                <a:effectLst/>
+                <a:latin typeface="Consolas" panose="020B0609020204030204" pitchFamily="49" charset="0"/>
+              </a:rPr>
+              <a:t> INT_MIN;</a:t>
+            </a:r>
+          </a:p>
+          <a:p>
+            <a:pPr>
+              <a:buNone/>
+            </a:pPr>
+            <a:r>
+              <a:rPr lang="en-US" b="0" dirty="0">
+                <a:solidFill>
+                  <a:srgbClr val="000000"/>
+                </a:solidFill>
+                <a:effectLst/>
+                <a:latin typeface="Consolas" panose="020B0609020204030204" pitchFamily="49" charset="0"/>
+              </a:rPr>
+              <a:t>    }</a:t>
+            </a:r>
+          </a:p>
+          <a:p>
+            <a:pPr>
+              <a:buNone/>
+            </a:pPr>
+            <a:endParaRPr lang="en-US" b="0" dirty="0">
+              <a:solidFill>
+                <a:srgbClr val="000000"/>
+              </a:solidFill>
+              <a:effectLst/>
+              <a:latin typeface="Consolas" panose="020B0609020204030204" pitchFamily="49" charset="0"/>
+            </a:endParaRPr>
+          </a:p>
+          <a:p>
+            <a:pPr>
+              <a:buNone/>
+            </a:pPr>
+            <a:r>
+              <a:rPr lang="en-US" b="0" dirty="0">
+                <a:solidFill>
+                  <a:srgbClr val="000000"/>
+                </a:solidFill>
+                <a:effectLst/>
+                <a:latin typeface="Consolas" panose="020B0609020204030204" pitchFamily="49" charset="0"/>
+              </a:rPr>
+              <a:t>    </a:t>
+            </a:r>
+            <a:r>
+              <a:rPr lang="en-US" b="0" dirty="0">
+                <a:solidFill>
+                  <a:srgbClr val="0000FF"/>
+                </a:solidFill>
+                <a:effectLst/>
+                <a:latin typeface="Consolas" panose="020B0609020204030204" pitchFamily="49" charset="0"/>
+              </a:rPr>
+              <a:t>int</a:t>
+            </a:r>
+            <a:r>
+              <a:rPr lang="en-US" b="0" dirty="0">
+                <a:solidFill>
+                  <a:srgbClr val="000000"/>
+                </a:solidFill>
+                <a:effectLst/>
+                <a:latin typeface="Consolas" panose="020B0609020204030204" pitchFamily="49" charset="0"/>
+              </a:rPr>
+              <a:t> m = a[</a:t>
+            </a:r>
+            <a:r>
+              <a:rPr lang="en-US" b="0" dirty="0">
+                <a:solidFill>
+                  <a:srgbClr val="098658"/>
+                </a:solidFill>
+                <a:effectLst/>
+                <a:latin typeface="Consolas" panose="020B0609020204030204" pitchFamily="49" charset="0"/>
+              </a:rPr>
+              <a:t>0</a:t>
+            </a:r>
+            <a:r>
+              <a:rPr lang="en-US" b="0" dirty="0">
+                <a:solidFill>
+                  <a:srgbClr val="000000"/>
+                </a:solidFill>
+                <a:effectLst/>
+                <a:latin typeface="Consolas" panose="020B0609020204030204" pitchFamily="49" charset="0"/>
+              </a:rPr>
+              <a:t>];</a:t>
+            </a:r>
+          </a:p>
+          <a:p>
+            <a:pPr>
+              <a:buNone/>
+            </a:pPr>
+            <a:r>
+              <a:rPr lang="en-US" b="0" dirty="0">
+                <a:solidFill>
+                  <a:srgbClr val="000000"/>
+                </a:solidFill>
+                <a:effectLst/>
+                <a:latin typeface="Consolas" panose="020B0609020204030204" pitchFamily="49" charset="0"/>
+              </a:rPr>
+              <a:t>    </a:t>
+            </a:r>
+            <a:r>
+              <a:rPr lang="en-US" b="0" dirty="0">
+                <a:solidFill>
+                  <a:srgbClr val="0000FF"/>
+                </a:solidFill>
+                <a:effectLst/>
+                <a:latin typeface="Consolas" panose="020B0609020204030204" pitchFamily="49" charset="0"/>
+              </a:rPr>
+              <a:t>for</a:t>
+            </a:r>
+            <a:r>
+              <a:rPr lang="en-US" b="0" dirty="0">
+                <a:solidFill>
+                  <a:srgbClr val="000000"/>
+                </a:solidFill>
+                <a:effectLst/>
+                <a:latin typeface="Consolas" panose="020B0609020204030204" pitchFamily="49" charset="0"/>
+              </a:rPr>
+              <a:t> (</a:t>
+            </a:r>
+            <a:r>
+              <a:rPr lang="en-US" b="0" dirty="0">
+                <a:solidFill>
+                  <a:srgbClr val="0000FF"/>
+                </a:solidFill>
+                <a:effectLst/>
+                <a:latin typeface="Consolas" panose="020B0609020204030204" pitchFamily="49" charset="0"/>
+              </a:rPr>
+              <a:t>int</a:t>
+            </a:r>
+            <a:r>
+              <a:rPr lang="en-US" b="0" dirty="0">
+                <a:solidFill>
+                  <a:srgbClr val="000000"/>
+                </a:solidFill>
+                <a:effectLst/>
+                <a:latin typeface="Consolas" panose="020B0609020204030204" pitchFamily="49" charset="0"/>
+              </a:rPr>
+              <a:t> </a:t>
+            </a:r>
+            <a:r>
+              <a:rPr lang="en-US" b="0" dirty="0" err="1">
+                <a:solidFill>
+                  <a:srgbClr val="000000"/>
+                </a:solidFill>
+                <a:effectLst/>
+                <a:latin typeface="Consolas" panose="020B0609020204030204" pitchFamily="49" charset="0"/>
+              </a:rPr>
+              <a:t>i</a:t>
+            </a:r>
+            <a:r>
+              <a:rPr lang="en-US" b="0" dirty="0">
+                <a:solidFill>
+                  <a:srgbClr val="000000"/>
+                </a:solidFill>
+                <a:effectLst/>
+                <a:latin typeface="Consolas" panose="020B0609020204030204" pitchFamily="49" charset="0"/>
+              </a:rPr>
+              <a:t> = </a:t>
+            </a:r>
+            <a:r>
+              <a:rPr lang="en-US" b="0" dirty="0">
+                <a:solidFill>
+                  <a:srgbClr val="098658"/>
+                </a:solidFill>
+                <a:effectLst/>
+                <a:latin typeface="Consolas" panose="020B0609020204030204" pitchFamily="49" charset="0"/>
+              </a:rPr>
+              <a:t>1</a:t>
+            </a:r>
+            <a:r>
+              <a:rPr lang="en-US" b="0" dirty="0">
+                <a:solidFill>
+                  <a:srgbClr val="000000"/>
+                </a:solidFill>
+                <a:effectLst/>
+                <a:latin typeface="Consolas" panose="020B0609020204030204" pitchFamily="49" charset="0"/>
+              </a:rPr>
+              <a:t>; </a:t>
+            </a:r>
+            <a:r>
+              <a:rPr lang="en-US" b="0" dirty="0" err="1">
+                <a:solidFill>
+                  <a:srgbClr val="000000"/>
+                </a:solidFill>
+                <a:effectLst/>
+                <a:latin typeface="Consolas" panose="020B0609020204030204" pitchFamily="49" charset="0"/>
+              </a:rPr>
+              <a:t>i</a:t>
+            </a:r>
+            <a:r>
+              <a:rPr lang="en-US" b="0" dirty="0">
+                <a:solidFill>
+                  <a:srgbClr val="000000"/>
+                </a:solidFill>
+                <a:effectLst/>
+                <a:latin typeface="Consolas" panose="020B0609020204030204" pitchFamily="49" charset="0"/>
+              </a:rPr>
+              <a:t> &lt; n; </a:t>
+            </a:r>
+            <a:r>
+              <a:rPr lang="en-US" b="0" dirty="0" err="1">
+                <a:solidFill>
+                  <a:srgbClr val="000000"/>
+                </a:solidFill>
+                <a:effectLst/>
+                <a:latin typeface="Consolas" panose="020B0609020204030204" pitchFamily="49" charset="0"/>
+              </a:rPr>
+              <a:t>i</a:t>
+            </a:r>
+            <a:r>
+              <a:rPr lang="en-US" b="0" dirty="0">
+                <a:solidFill>
+                  <a:srgbClr val="000000"/>
+                </a:solidFill>
+                <a:effectLst/>
+                <a:latin typeface="Consolas" panose="020B0609020204030204" pitchFamily="49" charset="0"/>
+              </a:rPr>
+              <a:t>++) {</a:t>
+            </a:r>
+          </a:p>
+          <a:p>
+            <a:pPr>
+              <a:buNone/>
+            </a:pPr>
+            <a:r>
+              <a:rPr lang="en-US" b="0" dirty="0">
+                <a:solidFill>
+                  <a:srgbClr val="000000"/>
+                </a:solidFill>
+                <a:effectLst/>
+                <a:latin typeface="Consolas" panose="020B0609020204030204" pitchFamily="49" charset="0"/>
+              </a:rPr>
+              <a:t>        </a:t>
+            </a:r>
+            <a:r>
+              <a:rPr lang="en-US" b="0" dirty="0">
+                <a:solidFill>
+                  <a:srgbClr val="0000FF"/>
+                </a:solidFill>
+                <a:effectLst/>
+                <a:latin typeface="Consolas" panose="020B0609020204030204" pitchFamily="49" charset="0"/>
+              </a:rPr>
+              <a:t>if</a:t>
+            </a:r>
+            <a:r>
+              <a:rPr lang="en-US" b="0" dirty="0">
+                <a:solidFill>
+                  <a:srgbClr val="000000"/>
+                </a:solidFill>
+                <a:effectLst/>
+                <a:latin typeface="Consolas" panose="020B0609020204030204" pitchFamily="49" charset="0"/>
+              </a:rPr>
+              <a:t> (a[</a:t>
+            </a:r>
+            <a:r>
+              <a:rPr lang="en-US" b="0" dirty="0" err="1">
+                <a:solidFill>
+                  <a:srgbClr val="000000"/>
+                </a:solidFill>
+                <a:effectLst/>
+                <a:latin typeface="Consolas" panose="020B0609020204030204" pitchFamily="49" charset="0"/>
+              </a:rPr>
+              <a:t>i</a:t>
+            </a:r>
+            <a:r>
+              <a:rPr lang="en-US" b="0" dirty="0">
+                <a:solidFill>
+                  <a:srgbClr val="000000"/>
+                </a:solidFill>
+                <a:effectLst/>
+                <a:latin typeface="Consolas" panose="020B0609020204030204" pitchFamily="49" charset="0"/>
+              </a:rPr>
+              <a:t>] &gt; m) {</a:t>
+            </a:r>
+          </a:p>
+          <a:p>
+            <a:pPr>
+              <a:buNone/>
+            </a:pPr>
+            <a:r>
+              <a:rPr lang="en-US" b="0" dirty="0">
+                <a:solidFill>
+                  <a:srgbClr val="000000"/>
+                </a:solidFill>
+                <a:effectLst/>
+                <a:latin typeface="Consolas" panose="020B0609020204030204" pitchFamily="49" charset="0"/>
+              </a:rPr>
+              <a:t>            m = a[</a:t>
+            </a:r>
+            <a:r>
+              <a:rPr lang="en-US" b="0" dirty="0" err="1">
+                <a:solidFill>
+                  <a:srgbClr val="000000"/>
+                </a:solidFill>
+                <a:effectLst/>
+                <a:latin typeface="Consolas" panose="020B0609020204030204" pitchFamily="49" charset="0"/>
+              </a:rPr>
+              <a:t>i</a:t>
+            </a:r>
+            <a:r>
+              <a:rPr lang="en-US" b="0" dirty="0">
+                <a:solidFill>
+                  <a:srgbClr val="000000"/>
+                </a:solidFill>
+                <a:effectLst/>
+                <a:latin typeface="Consolas" panose="020B0609020204030204" pitchFamily="49" charset="0"/>
+              </a:rPr>
+              <a:t>];</a:t>
+            </a:r>
+          </a:p>
+          <a:p>
+            <a:pPr>
+              <a:buNone/>
+            </a:pPr>
+            <a:r>
+              <a:rPr lang="en-US" b="0" dirty="0">
+                <a:solidFill>
+                  <a:srgbClr val="000000"/>
+                </a:solidFill>
+                <a:effectLst/>
+                <a:latin typeface="Consolas" panose="020B0609020204030204" pitchFamily="49" charset="0"/>
+              </a:rPr>
+              <a:t>        }</a:t>
+            </a:r>
+          </a:p>
+          <a:p>
+            <a:pPr>
+              <a:buNone/>
+            </a:pPr>
+            <a:r>
+              <a:rPr lang="en-US" b="0" dirty="0">
+                <a:solidFill>
+                  <a:srgbClr val="000000"/>
+                </a:solidFill>
+                <a:effectLst/>
+                <a:latin typeface="Consolas" panose="020B0609020204030204" pitchFamily="49" charset="0"/>
+              </a:rPr>
+              <a:t>    }</a:t>
+            </a:r>
+          </a:p>
+          <a:p>
+            <a:pPr>
+              <a:buNone/>
+            </a:pPr>
+            <a:r>
+              <a:rPr lang="en-US" b="0" dirty="0">
+                <a:solidFill>
+                  <a:srgbClr val="000000"/>
+                </a:solidFill>
+                <a:effectLst/>
+                <a:latin typeface="Consolas" panose="020B0609020204030204" pitchFamily="49" charset="0"/>
+              </a:rPr>
+              <a:t>    </a:t>
+            </a:r>
+            <a:r>
+              <a:rPr lang="en-US" b="0" dirty="0">
+                <a:solidFill>
+                  <a:srgbClr val="0000FF"/>
+                </a:solidFill>
+                <a:effectLst/>
+                <a:latin typeface="Consolas" panose="020B0609020204030204" pitchFamily="49" charset="0"/>
+              </a:rPr>
+              <a:t>return</a:t>
+            </a:r>
+            <a:r>
+              <a:rPr lang="en-US" b="0" dirty="0">
+                <a:solidFill>
+                  <a:srgbClr val="000000"/>
+                </a:solidFill>
+                <a:effectLst/>
+                <a:latin typeface="Consolas" panose="020B0609020204030204" pitchFamily="49" charset="0"/>
+              </a:rPr>
+              <a:t> m;</a:t>
+            </a:r>
+          </a:p>
+          <a:p>
+            <a:pPr>
+              <a:buNone/>
+            </a:pPr>
+            <a:r>
+              <a:rPr lang="en-US" b="0" dirty="0">
+                <a:solidFill>
+                  <a:srgbClr val="000000"/>
+                </a:solidFill>
+                <a:effectLst/>
+                <a:latin typeface="Consolas" panose="020B0609020204030204" pitchFamily="49" charset="0"/>
+              </a:rPr>
+              <a:t>}</a:t>
+            </a:r>
+          </a:p>
+        </p:txBody>
+      </p:sp>
+      <p:sp>
+        <p:nvSpPr>
+          <p:cNvPr id="17" name="TextBox 16">
+            <a:extLst>
+              <a:ext uri="{FF2B5EF4-FFF2-40B4-BE49-F238E27FC236}">
+                <a16:creationId xmlns:a16="http://schemas.microsoft.com/office/drawing/2014/main" id="{A3690909-DF54-B0B9-8B78-592C2C410E9E}"/>
+              </a:ext>
+            </a:extLst>
+          </p:cNvPr>
+          <p:cNvSpPr txBox="1"/>
+          <p:nvPr/>
+        </p:nvSpPr>
+        <p:spPr>
+          <a:xfrm>
+            <a:off x="5785658" y="1964854"/>
+            <a:ext cx="6406342" cy="4524315"/>
+          </a:xfrm>
+          <a:prstGeom prst="rect">
+            <a:avLst/>
+          </a:prstGeom>
+          <a:noFill/>
+        </p:spPr>
+        <p:txBody>
+          <a:bodyPr wrap="square">
+            <a:spAutoFit/>
+          </a:bodyPr>
+          <a:lstStyle/>
+          <a:p>
+            <a:pPr>
+              <a:buNone/>
+            </a:pPr>
+            <a:r>
+              <a:rPr lang="en-US" b="0" dirty="0">
+                <a:solidFill>
+                  <a:srgbClr val="0000FF"/>
+                </a:solidFill>
+                <a:effectLst/>
+                <a:latin typeface="Consolas" panose="020B0609020204030204" pitchFamily="49" charset="0"/>
+              </a:rPr>
+              <a:t>max</a:t>
+            </a:r>
+            <a:r>
+              <a:rPr lang="en-US" b="0" dirty="0">
+                <a:solidFill>
+                  <a:srgbClr val="000000"/>
+                </a:solidFill>
+                <a:effectLst/>
+                <a:latin typeface="Consolas" panose="020B0609020204030204" pitchFamily="49" charset="0"/>
+              </a:rPr>
+              <a:t>:</a:t>
+            </a:r>
+          </a:p>
+          <a:p>
+            <a:pPr>
+              <a:buNone/>
+            </a:pPr>
+            <a:r>
+              <a:rPr lang="en-US" b="0" dirty="0">
+                <a:solidFill>
+                  <a:srgbClr val="000000"/>
+                </a:solidFill>
+                <a:effectLst/>
+                <a:latin typeface="Consolas" panose="020B0609020204030204" pitchFamily="49" charset="0"/>
+              </a:rPr>
+              <a:t>  </a:t>
+            </a:r>
+            <a:r>
+              <a:rPr lang="en-US" b="0" dirty="0">
+                <a:solidFill>
+                  <a:srgbClr val="0000FF"/>
+                </a:solidFill>
+                <a:effectLst/>
+                <a:latin typeface="Consolas" panose="020B0609020204030204" pitchFamily="49" charset="0"/>
+              </a:rPr>
+              <a:t>mov</a:t>
+            </a:r>
+            <a:r>
+              <a:rPr lang="en-US" b="0" dirty="0">
+                <a:solidFill>
+                  <a:srgbClr val="000000"/>
+                </a:solidFill>
+                <a:effectLst/>
+                <a:latin typeface="Consolas" panose="020B0609020204030204" pitchFamily="49" charset="0"/>
+              </a:rPr>
+              <a:t> </a:t>
+            </a:r>
+            <a:r>
+              <a:rPr lang="en-US" b="0" dirty="0" err="1">
+                <a:solidFill>
+                  <a:srgbClr val="4864AA"/>
+                </a:solidFill>
+                <a:effectLst/>
+                <a:latin typeface="Consolas" panose="020B0609020204030204" pitchFamily="49" charset="0"/>
+              </a:rPr>
+              <a:t>eax</a:t>
+            </a:r>
+            <a:r>
+              <a:rPr lang="en-US" b="0" dirty="0">
+                <a:solidFill>
+                  <a:srgbClr val="000000"/>
+                </a:solidFill>
+                <a:effectLst/>
+                <a:latin typeface="Consolas" panose="020B0609020204030204" pitchFamily="49" charset="0"/>
+              </a:rPr>
+              <a:t>, -</a:t>
+            </a:r>
+            <a:r>
+              <a:rPr lang="en-US" b="0" dirty="0">
+                <a:solidFill>
+                  <a:srgbClr val="098658"/>
+                </a:solidFill>
+                <a:effectLst/>
+                <a:latin typeface="Consolas" panose="020B0609020204030204" pitchFamily="49" charset="0"/>
+              </a:rPr>
+              <a:t>2147483648           </a:t>
+            </a:r>
+            <a:r>
+              <a:rPr lang="en-US" b="0" dirty="0">
+                <a:solidFill>
+                  <a:srgbClr val="00B050"/>
+                </a:solidFill>
+                <a:effectLst/>
+                <a:latin typeface="Consolas" panose="020B0609020204030204" pitchFamily="49" charset="0"/>
+              </a:rPr>
+              <a:t># b8 00 00 00 80</a:t>
+            </a:r>
+            <a:endParaRPr lang="en-US" b="0" dirty="0">
+              <a:solidFill>
+                <a:srgbClr val="000000"/>
+              </a:solidFill>
+              <a:effectLst/>
+              <a:latin typeface="Consolas" panose="020B0609020204030204" pitchFamily="49" charset="0"/>
+            </a:endParaRPr>
+          </a:p>
+          <a:p>
+            <a:pPr>
+              <a:buNone/>
+            </a:pPr>
+            <a:r>
+              <a:rPr lang="en-US" b="0" dirty="0">
+                <a:solidFill>
+                  <a:srgbClr val="000000"/>
+                </a:solidFill>
+                <a:effectLst/>
+                <a:latin typeface="Consolas" panose="020B0609020204030204" pitchFamily="49" charset="0"/>
+              </a:rPr>
+              <a:t>  </a:t>
+            </a:r>
+            <a:r>
+              <a:rPr lang="en-US" b="0" dirty="0">
+                <a:solidFill>
+                  <a:srgbClr val="0000FF"/>
+                </a:solidFill>
+                <a:effectLst/>
+                <a:latin typeface="Consolas" panose="020B0609020204030204" pitchFamily="49" charset="0"/>
+              </a:rPr>
+              <a:t>test</a:t>
+            </a:r>
+            <a:r>
+              <a:rPr lang="en-US" b="0" dirty="0">
+                <a:solidFill>
+                  <a:srgbClr val="000000"/>
+                </a:solidFill>
+                <a:effectLst/>
+                <a:latin typeface="Consolas" panose="020B0609020204030204" pitchFamily="49" charset="0"/>
+              </a:rPr>
+              <a:t> </a:t>
+            </a:r>
+            <a:r>
+              <a:rPr lang="en-US" b="0" dirty="0" err="1">
+                <a:solidFill>
+                  <a:srgbClr val="4864AA"/>
+                </a:solidFill>
+                <a:effectLst/>
+                <a:latin typeface="Consolas" panose="020B0609020204030204" pitchFamily="49" charset="0"/>
+              </a:rPr>
+              <a:t>esi</a:t>
+            </a:r>
+            <a:r>
+              <a:rPr lang="en-US" b="0" dirty="0">
+                <a:solidFill>
+                  <a:srgbClr val="000000"/>
+                </a:solidFill>
+                <a:effectLst/>
+                <a:latin typeface="Consolas" panose="020B0609020204030204" pitchFamily="49" charset="0"/>
+              </a:rPr>
+              <a:t>, </a:t>
+            </a:r>
+            <a:r>
+              <a:rPr lang="en-US" b="0" dirty="0" err="1">
+                <a:solidFill>
+                  <a:srgbClr val="4864AA"/>
+                </a:solidFill>
+                <a:effectLst/>
+                <a:latin typeface="Consolas" panose="020B0609020204030204" pitchFamily="49" charset="0"/>
+              </a:rPr>
+              <a:t>esi</a:t>
+            </a:r>
+            <a:r>
+              <a:rPr lang="en-US" b="0" dirty="0">
+                <a:solidFill>
+                  <a:srgbClr val="4864AA"/>
+                </a:solidFill>
+                <a:effectLst/>
+                <a:latin typeface="Consolas" panose="020B0609020204030204" pitchFamily="49" charset="0"/>
+              </a:rPr>
+              <a:t>                  </a:t>
+            </a:r>
+            <a:r>
+              <a:rPr lang="en-US" b="0" dirty="0">
+                <a:solidFill>
+                  <a:srgbClr val="00B050"/>
+                </a:solidFill>
+                <a:effectLst/>
+                <a:latin typeface="Consolas" panose="020B0609020204030204" pitchFamily="49" charset="0"/>
+              </a:rPr>
+              <a:t># 85 f6</a:t>
+            </a:r>
+            <a:endParaRPr lang="en-US" b="0" dirty="0">
+              <a:solidFill>
+                <a:srgbClr val="000000"/>
+              </a:solidFill>
+              <a:effectLst/>
+              <a:latin typeface="Consolas" panose="020B0609020204030204" pitchFamily="49" charset="0"/>
+            </a:endParaRPr>
+          </a:p>
+          <a:p>
+            <a:pPr>
+              <a:buNone/>
+            </a:pPr>
+            <a:r>
+              <a:rPr lang="en-US" b="0" dirty="0">
+                <a:solidFill>
+                  <a:srgbClr val="000000"/>
+                </a:solidFill>
+                <a:effectLst/>
+                <a:latin typeface="Consolas" panose="020B0609020204030204" pitchFamily="49" charset="0"/>
+              </a:rPr>
+              <a:t>  </a:t>
+            </a:r>
+            <a:r>
+              <a:rPr lang="en-US" b="0" dirty="0">
+                <a:solidFill>
+                  <a:srgbClr val="0000FF"/>
+                </a:solidFill>
+                <a:effectLst/>
+                <a:latin typeface="Consolas" panose="020B0609020204030204" pitchFamily="49" charset="0"/>
+              </a:rPr>
+              <a:t>je</a:t>
+            </a:r>
+            <a:r>
+              <a:rPr lang="en-US" b="0" dirty="0">
+                <a:solidFill>
+                  <a:srgbClr val="000000"/>
+                </a:solidFill>
+                <a:effectLst/>
+                <a:latin typeface="Consolas" panose="020B0609020204030204" pitchFamily="49" charset="0"/>
+              </a:rPr>
+              <a:t> </a:t>
+            </a:r>
+            <a:r>
+              <a:rPr lang="en-US" b="0" dirty="0">
+                <a:solidFill>
+                  <a:srgbClr val="008080"/>
+                </a:solidFill>
+                <a:effectLst/>
+                <a:latin typeface="Consolas" panose="020B0609020204030204" pitchFamily="49" charset="0"/>
+              </a:rPr>
+              <a:t>.L1                         </a:t>
+            </a:r>
+            <a:r>
+              <a:rPr lang="en-US" b="0" dirty="0">
+                <a:solidFill>
+                  <a:srgbClr val="00B050"/>
+                </a:solidFill>
+                <a:effectLst/>
+                <a:latin typeface="Consolas" panose="020B0609020204030204" pitchFamily="49" charset="0"/>
+              </a:rPr>
+              <a:t># 74 15</a:t>
+            </a:r>
+          </a:p>
+          <a:p>
+            <a:pPr>
+              <a:buNone/>
+            </a:pPr>
+            <a:r>
+              <a:rPr lang="en-US" b="0" dirty="0">
+                <a:solidFill>
+                  <a:srgbClr val="000000"/>
+                </a:solidFill>
+                <a:effectLst/>
+                <a:latin typeface="Consolas" panose="020B0609020204030204" pitchFamily="49" charset="0"/>
+              </a:rPr>
+              <a:t>  </a:t>
+            </a:r>
+            <a:r>
+              <a:rPr lang="en-US" b="0" dirty="0">
+                <a:solidFill>
+                  <a:srgbClr val="0000FF"/>
+                </a:solidFill>
+                <a:effectLst/>
+                <a:latin typeface="Consolas" panose="020B0609020204030204" pitchFamily="49" charset="0"/>
+              </a:rPr>
+              <a:t>mov</a:t>
+            </a:r>
+            <a:r>
+              <a:rPr lang="en-US" b="0" dirty="0">
+                <a:solidFill>
+                  <a:srgbClr val="000000"/>
+                </a:solidFill>
+                <a:effectLst/>
+                <a:latin typeface="Consolas" panose="020B0609020204030204" pitchFamily="49" charset="0"/>
+              </a:rPr>
+              <a:t> </a:t>
+            </a:r>
+            <a:r>
+              <a:rPr lang="en-US" b="0" dirty="0" err="1">
+                <a:solidFill>
+                  <a:srgbClr val="4864AA"/>
+                </a:solidFill>
+                <a:effectLst/>
+                <a:latin typeface="Consolas" panose="020B0609020204030204" pitchFamily="49" charset="0"/>
+              </a:rPr>
+              <a:t>eax</a:t>
+            </a:r>
+            <a:r>
+              <a:rPr lang="en-US" b="0" dirty="0">
+                <a:solidFill>
+                  <a:srgbClr val="000000"/>
+                </a:solidFill>
+                <a:effectLst/>
+                <a:latin typeface="Consolas" panose="020B0609020204030204" pitchFamily="49" charset="0"/>
+              </a:rPr>
+              <a:t>, </a:t>
+            </a:r>
+            <a:r>
+              <a:rPr lang="en-US" b="0" dirty="0">
+                <a:solidFill>
+                  <a:srgbClr val="808080"/>
+                </a:solidFill>
+                <a:effectLst/>
+                <a:latin typeface="Consolas" panose="020B0609020204030204" pitchFamily="49" charset="0"/>
+              </a:rPr>
+              <a:t>DWORD</a:t>
+            </a:r>
+            <a:r>
+              <a:rPr lang="en-US" b="0" dirty="0">
+                <a:solidFill>
+                  <a:srgbClr val="000000"/>
+                </a:solidFill>
+                <a:effectLst/>
+                <a:latin typeface="Consolas" panose="020B0609020204030204" pitchFamily="49" charset="0"/>
+              </a:rPr>
+              <a:t> </a:t>
+            </a:r>
+            <a:r>
+              <a:rPr lang="en-US" b="0" dirty="0">
+                <a:solidFill>
+                  <a:srgbClr val="808080"/>
+                </a:solidFill>
+                <a:effectLst/>
+                <a:latin typeface="Consolas" panose="020B0609020204030204" pitchFamily="49" charset="0"/>
+              </a:rPr>
+              <a:t>PTR</a:t>
+            </a:r>
+            <a:r>
+              <a:rPr lang="en-US" b="0" dirty="0">
+                <a:solidFill>
+                  <a:srgbClr val="000000"/>
+                </a:solidFill>
+                <a:effectLst/>
+                <a:latin typeface="Consolas" panose="020B0609020204030204" pitchFamily="49" charset="0"/>
+              </a:rPr>
+              <a:t> [</a:t>
+            </a:r>
+            <a:r>
+              <a:rPr lang="en-US" b="0" dirty="0" err="1">
+                <a:solidFill>
+                  <a:srgbClr val="4864AA"/>
+                </a:solidFill>
+                <a:effectLst/>
+                <a:latin typeface="Consolas" panose="020B0609020204030204" pitchFamily="49" charset="0"/>
+              </a:rPr>
+              <a:t>rdi</a:t>
+            </a:r>
+            <a:r>
+              <a:rPr lang="en-US" b="0" dirty="0">
+                <a:solidFill>
+                  <a:srgbClr val="000000"/>
+                </a:solidFill>
+                <a:effectLst/>
+                <a:latin typeface="Consolas" panose="020B0609020204030204" pitchFamily="49" charset="0"/>
+              </a:rPr>
+              <a:t>]       </a:t>
+            </a:r>
+            <a:r>
+              <a:rPr lang="en-US" b="0" dirty="0">
+                <a:solidFill>
+                  <a:srgbClr val="00B050"/>
+                </a:solidFill>
+                <a:effectLst/>
+                <a:latin typeface="Consolas" panose="020B0609020204030204" pitchFamily="49" charset="0"/>
+              </a:rPr>
+              <a:t># 8b 07</a:t>
+            </a:r>
+            <a:endParaRPr lang="en-US" b="0" dirty="0">
+              <a:solidFill>
+                <a:srgbClr val="000000"/>
+              </a:solidFill>
+              <a:effectLst/>
+              <a:latin typeface="Consolas" panose="020B0609020204030204" pitchFamily="49" charset="0"/>
+            </a:endParaRPr>
+          </a:p>
+          <a:p>
+            <a:pPr>
+              <a:buNone/>
+            </a:pPr>
+            <a:r>
+              <a:rPr lang="en-US" b="0" dirty="0">
+                <a:solidFill>
+                  <a:srgbClr val="000000"/>
+                </a:solidFill>
+                <a:effectLst/>
+                <a:latin typeface="Consolas" panose="020B0609020204030204" pitchFamily="49" charset="0"/>
+              </a:rPr>
+              <a:t>  </a:t>
+            </a:r>
+            <a:r>
+              <a:rPr lang="en-US" b="0" dirty="0" err="1">
+                <a:solidFill>
+                  <a:srgbClr val="0000FF"/>
+                </a:solidFill>
+                <a:effectLst/>
+                <a:latin typeface="Consolas" panose="020B0609020204030204" pitchFamily="49" charset="0"/>
+              </a:rPr>
+              <a:t>xor</a:t>
+            </a:r>
+            <a:r>
+              <a:rPr lang="en-US" b="0" dirty="0">
+                <a:solidFill>
+                  <a:srgbClr val="000000"/>
+                </a:solidFill>
+                <a:effectLst/>
+                <a:latin typeface="Consolas" panose="020B0609020204030204" pitchFamily="49" charset="0"/>
+              </a:rPr>
+              <a:t> </a:t>
+            </a:r>
+            <a:r>
+              <a:rPr lang="en-US" b="0" dirty="0" err="1">
+                <a:solidFill>
+                  <a:srgbClr val="4864AA"/>
+                </a:solidFill>
+                <a:effectLst/>
+                <a:latin typeface="Consolas" panose="020B0609020204030204" pitchFamily="49" charset="0"/>
+              </a:rPr>
+              <a:t>edx</a:t>
+            </a:r>
+            <a:r>
+              <a:rPr lang="en-US" b="0" dirty="0">
+                <a:solidFill>
+                  <a:srgbClr val="000000"/>
+                </a:solidFill>
+                <a:effectLst/>
+                <a:latin typeface="Consolas" panose="020B0609020204030204" pitchFamily="49" charset="0"/>
+              </a:rPr>
+              <a:t>, </a:t>
+            </a:r>
+            <a:r>
+              <a:rPr lang="en-US" b="0" dirty="0" err="1">
+                <a:solidFill>
+                  <a:srgbClr val="4864AA"/>
+                </a:solidFill>
+                <a:effectLst/>
+                <a:latin typeface="Consolas" panose="020B0609020204030204" pitchFamily="49" charset="0"/>
+              </a:rPr>
+              <a:t>edx</a:t>
+            </a:r>
+            <a:r>
+              <a:rPr lang="en-US" b="0" dirty="0">
+                <a:solidFill>
+                  <a:srgbClr val="4864AA"/>
+                </a:solidFill>
+                <a:effectLst/>
+                <a:latin typeface="Consolas" panose="020B0609020204030204" pitchFamily="49" charset="0"/>
+              </a:rPr>
+              <a:t>                   </a:t>
+            </a:r>
+            <a:r>
+              <a:rPr lang="en-US" dirty="0">
+                <a:solidFill>
+                  <a:srgbClr val="00B050"/>
+                </a:solidFill>
+                <a:latin typeface="Consolas" panose="020B0609020204030204" pitchFamily="49" charset="0"/>
+              </a:rPr>
+              <a:t># 31 d2</a:t>
+            </a:r>
+            <a:endParaRPr lang="en-US" b="0" dirty="0">
+              <a:solidFill>
+                <a:srgbClr val="000000"/>
+              </a:solidFill>
+              <a:effectLst/>
+              <a:latin typeface="Consolas" panose="020B0609020204030204" pitchFamily="49" charset="0"/>
+            </a:endParaRPr>
+          </a:p>
+          <a:p>
+            <a:pPr>
+              <a:buNone/>
+            </a:pPr>
+            <a:r>
+              <a:rPr lang="en-US" b="0" dirty="0">
+                <a:solidFill>
+                  <a:srgbClr val="0000FF"/>
+                </a:solidFill>
+                <a:effectLst/>
+                <a:latin typeface="Consolas" panose="020B0609020204030204" pitchFamily="49" charset="0"/>
+              </a:rPr>
+              <a:t>.L3</a:t>
+            </a:r>
+            <a:r>
+              <a:rPr lang="en-US" b="0" dirty="0">
+                <a:solidFill>
+                  <a:srgbClr val="000000"/>
+                </a:solidFill>
+                <a:effectLst/>
+                <a:latin typeface="Consolas" panose="020B0609020204030204" pitchFamily="49" charset="0"/>
+              </a:rPr>
+              <a:t>:</a:t>
+            </a:r>
+          </a:p>
+          <a:p>
+            <a:pPr>
+              <a:buNone/>
+            </a:pPr>
+            <a:r>
+              <a:rPr lang="en-US" b="0" dirty="0">
+                <a:solidFill>
+                  <a:srgbClr val="000000"/>
+                </a:solidFill>
+                <a:effectLst/>
+                <a:latin typeface="Consolas" panose="020B0609020204030204" pitchFamily="49" charset="0"/>
+              </a:rPr>
+              <a:t>  </a:t>
+            </a:r>
+            <a:r>
+              <a:rPr lang="en-US" b="0" dirty="0" err="1">
+                <a:solidFill>
+                  <a:srgbClr val="0000FF"/>
+                </a:solidFill>
+                <a:effectLst/>
+                <a:latin typeface="Consolas" panose="020B0609020204030204" pitchFamily="49" charset="0"/>
+              </a:rPr>
+              <a:t>inc</a:t>
+            </a:r>
+            <a:r>
+              <a:rPr lang="en-US" b="0" dirty="0">
+                <a:solidFill>
+                  <a:srgbClr val="000000"/>
+                </a:solidFill>
+                <a:effectLst/>
+                <a:latin typeface="Consolas" panose="020B0609020204030204" pitchFamily="49" charset="0"/>
+              </a:rPr>
+              <a:t> </a:t>
+            </a:r>
+            <a:r>
+              <a:rPr lang="en-US" b="0" dirty="0" err="1">
+                <a:solidFill>
+                  <a:srgbClr val="4864AA"/>
+                </a:solidFill>
+                <a:effectLst/>
+                <a:latin typeface="Consolas" panose="020B0609020204030204" pitchFamily="49" charset="0"/>
+              </a:rPr>
+              <a:t>rdx</a:t>
+            </a:r>
+            <a:r>
+              <a:rPr lang="en-US" b="0" dirty="0">
+                <a:solidFill>
+                  <a:srgbClr val="4864AA"/>
+                </a:solidFill>
+                <a:effectLst/>
+                <a:latin typeface="Consolas" panose="020B0609020204030204" pitchFamily="49" charset="0"/>
+              </a:rPr>
+              <a:t>                        </a:t>
+            </a:r>
+            <a:r>
+              <a:rPr lang="en-US" b="0" dirty="0">
+                <a:solidFill>
+                  <a:srgbClr val="00B050"/>
+                </a:solidFill>
+                <a:effectLst/>
+                <a:latin typeface="Consolas" panose="020B0609020204030204" pitchFamily="49" charset="0"/>
+              </a:rPr>
+              <a:t># 48 ff c2</a:t>
+            </a:r>
+            <a:endParaRPr lang="en-US" b="0" dirty="0">
+              <a:solidFill>
+                <a:srgbClr val="000000"/>
+              </a:solidFill>
+              <a:effectLst/>
+              <a:latin typeface="Consolas" panose="020B0609020204030204" pitchFamily="49" charset="0"/>
+            </a:endParaRPr>
+          </a:p>
+          <a:p>
+            <a:pPr>
+              <a:buNone/>
+            </a:pPr>
+            <a:r>
+              <a:rPr lang="en-US" b="0" dirty="0">
+                <a:solidFill>
+                  <a:srgbClr val="000000"/>
+                </a:solidFill>
+                <a:effectLst/>
+                <a:latin typeface="Consolas" panose="020B0609020204030204" pitchFamily="49" charset="0"/>
+              </a:rPr>
+              <a:t>  </a:t>
+            </a:r>
+            <a:r>
+              <a:rPr lang="en-US" b="0" dirty="0" err="1">
+                <a:solidFill>
+                  <a:srgbClr val="0000FF"/>
+                </a:solidFill>
+                <a:effectLst/>
+                <a:latin typeface="Consolas" panose="020B0609020204030204" pitchFamily="49" charset="0"/>
+              </a:rPr>
+              <a:t>cmp</a:t>
+            </a:r>
+            <a:r>
+              <a:rPr lang="en-US" b="0" dirty="0">
+                <a:solidFill>
+                  <a:srgbClr val="000000"/>
+                </a:solidFill>
+                <a:effectLst/>
+                <a:latin typeface="Consolas" panose="020B0609020204030204" pitchFamily="49" charset="0"/>
+              </a:rPr>
+              <a:t> </a:t>
+            </a:r>
+            <a:r>
+              <a:rPr lang="en-US" b="0" dirty="0" err="1">
+                <a:solidFill>
+                  <a:srgbClr val="4864AA"/>
+                </a:solidFill>
+                <a:effectLst/>
+                <a:latin typeface="Consolas" panose="020B0609020204030204" pitchFamily="49" charset="0"/>
+              </a:rPr>
+              <a:t>esi</a:t>
+            </a:r>
+            <a:r>
+              <a:rPr lang="en-US" b="0" dirty="0">
+                <a:solidFill>
+                  <a:srgbClr val="000000"/>
+                </a:solidFill>
+                <a:effectLst/>
+                <a:latin typeface="Consolas" panose="020B0609020204030204" pitchFamily="49" charset="0"/>
+              </a:rPr>
+              <a:t>, </a:t>
+            </a:r>
+            <a:r>
+              <a:rPr lang="en-US" b="0" dirty="0" err="1">
+                <a:solidFill>
+                  <a:srgbClr val="4864AA"/>
+                </a:solidFill>
+                <a:effectLst/>
+                <a:latin typeface="Consolas" panose="020B0609020204030204" pitchFamily="49" charset="0"/>
+              </a:rPr>
+              <a:t>edx</a:t>
+            </a:r>
+            <a:r>
+              <a:rPr lang="en-US" b="0" dirty="0">
+                <a:solidFill>
+                  <a:srgbClr val="4864AA"/>
+                </a:solidFill>
+                <a:effectLst/>
+                <a:latin typeface="Consolas" panose="020B0609020204030204" pitchFamily="49" charset="0"/>
+              </a:rPr>
+              <a:t>                   </a:t>
+            </a:r>
+            <a:r>
+              <a:rPr lang="en-US" b="0" dirty="0">
+                <a:solidFill>
+                  <a:srgbClr val="00B050"/>
+                </a:solidFill>
+                <a:effectLst/>
+                <a:latin typeface="Consolas" panose="020B0609020204030204" pitchFamily="49" charset="0"/>
+              </a:rPr>
+              <a:t># 39 d6</a:t>
+            </a:r>
+            <a:endParaRPr lang="en-US" b="0" dirty="0">
+              <a:solidFill>
+                <a:srgbClr val="000000"/>
+              </a:solidFill>
+              <a:effectLst/>
+              <a:latin typeface="Consolas" panose="020B0609020204030204" pitchFamily="49" charset="0"/>
+            </a:endParaRPr>
+          </a:p>
+          <a:p>
+            <a:pPr>
+              <a:buNone/>
+            </a:pPr>
+            <a:r>
+              <a:rPr lang="en-US" b="0" dirty="0">
+                <a:solidFill>
+                  <a:srgbClr val="000000"/>
+                </a:solidFill>
+                <a:effectLst/>
+                <a:latin typeface="Consolas" panose="020B0609020204030204" pitchFamily="49" charset="0"/>
+              </a:rPr>
+              <a:t>  </a:t>
+            </a:r>
+            <a:r>
+              <a:rPr lang="en-US" b="0" dirty="0" err="1">
+                <a:solidFill>
+                  <a:srgbClr val="0000FF"/>
+                </a:solidFill>
+                <a:effectLst/>
+                <a:latin typeface="Consolas" panose="020B0609020204030204" pitchFamily="49" charset="0"/>
+              </a:rPr>
+              <a:t>jle</a:t>
+            </a:r>
+            <a:r>
+              <a:rPr lang="en-US" b="0" dirty="0">
+                <a:solidFill>
+                  <a:srgbClr val="000000"/>
+                </a:solidFill>
+                <a:effectLst/>
+                <a:latin typeface="Consolas" panose="020B0609020204030204" pitchFamily="49" charset="0"/>
+              </a:rPr>
+              <a:t> </a:t>
+            </a:r>
+            <a:r>
+              <a:rPr lang="en-US" b="0" dirty="0">
+                <a:solidFill>
+                  <a:srgbClr val="008080"/>
+                </a:solidFill>
+                <a:effectLst/>
+                <a:latin typeface="Consolas" panose="020B0609020204030204" pitchFamily="49" charset="0"/>
+              </a:rPr>
+              <a:t>.L1                        </a:t>
+            </a:r>
+            <a:r>
+              <a:rPr lang="en-US" b="0" dirty="0">
+                <a:solidFill>
+                  <a:srgbClr val="00B050"/>
+                </a:solidFill>
+                <a:effectLst/>
+                <a:latin typeface="Consolas" panose="020B0609020204030204" pitchFamily="49" charset="0"/>
+              </a:rPr>
+              <a:t># 7e 0a</a:t>
+            </a:r>
+          </a:p>
+          <a:p>
+            <a:pPr>
+              <a:buNone/>
+            </a:pPr>
+            <a:r>
+              <a:rPr lang="en-US" b="0" dirty="0">
+                <a:solidFill>
+                  <a:srgbClr val="000000"/>
+                </a:solidFill>
+                <a:effectLst/>
+                <a:latin typeface="Consolas" panose="020B0609020204030204" pitchFamily="49" charset="0"/>
+              </a:rPr>
+              <a:t>  </a:t>
+            </a:r>
+            <a:r>
+              <a:rPr lang="en-US" b="0" dirty="0">
+                <a:solidFill>
+                  <a:srgbClr val="0000FF"/>
+                </a:solidFill>
+                <a:effectLst/>
+                <a:latin typeface="Consolas" panose="020B0609020204030204" pitchFamily="49" charset="0"/>
+              </a:rPr>
+              <a:t>mov</a:t>
+            </a:r>
+            <a:r>
+              <a:rPr lang="en-US" b="0" dirty="0">
+                <a:solidFill>
+                  <a:srgbClr val="000000"/>
+                </a:solidFill>
+                <a:effectLst/>
+                <a:latin typeface="Consolas" panose="020B0609020204030204" pitchFamily="49" charset="0"/>
+              </a:rPr>
+              <a:t> </a:t>
+            </a:r>
+            <a:r>
+              <a:rPr lang="en-US" b="0" dirty="0" err="1">
+                <a:solidFill>
+                  <a:srgbClr val="4864AA"/>
+                </a:solidFill>
+                <a:effectLst/>
+                <a:latin typeface="Consolas" panose="020B0609020204030204" pitchFamily="49" charset="0"/>
+              </a:rPr>
+              <a:t>ecx</a:t>
+            </a:r>
+            <a:r>
+              <a:rPr lang="en-US" b="0" dirty="0">
+                <a:solidFill>
+                  <a:srgbClr val="000000"/>
+                </a:solidFill>
+                <a:effectLst/>
+                <a:latin typeface="Consolas" panose="020B0609020204030204" pitchFamily="49" charset="0"/>
+              </a:rPr>
+              <a:t>, </a:t>
+            </a:r>
+            <a:r>
+              <a:rPr lang="en-US" b="0" dirty="0">
+                <a:solidFill>
+                  <a:srgbClr val="808080"/>
+                </a:solidFill>
+                <a:effectLst/>
+                <a:latin typeface="Consolas" panose="020B0609020204030204" pitchFamily="49" charset="0"/>
+              </a:rPr>
+              <a:t>DWORD</a:t>
+            </a:r>
+            <a:r>
+              <a:rPr lang="en-US" b="0" dirty="0">
+                <a:solidFill>
+                  <a:srgbClr val="000000"/>
+                </a:solidFill>
+                <a:effectLst/>
+                <a:latin typeface="Consolas" panose="020B0609020204030204" pitchFamily="49" charset="0"/>
+              </a:rPr>
+              <a:t> </a:t>
+            </a:r>
+            <a:r>
+              <a:rPr lang="en-US" b="0" dirty="0">
+                <a:solidFill>
+                  <a:srgbClr val="808080"/>
+                </a:solidFill>
+                <a:effectLst/>
+                <a:latin typeface="Consolas" panose="020B0609020204030204" pitchFamily="49" charset="0"/>
+              </a:rPr>
+              <a:t>PTR</a:t>
+            </a:r>
+            <a:r>
+              <a:rPr lang="en-US" b="0" dirty="0">
+                <a:solidFill>
+                  <a:srgbClr val="000000"/>
+                </a:solidFill>
+                <a:effectLst/>
+                <a:latin typeface="Consolas" panose="020B0609020204030204" pitchFamily="49" charset="0"/>
+              </a:rPr>
+              <a:t> [</a:t>
+            </a:r>
+            <a:r>
+              <a:rPr lang="en-US" b="0" dirty="0" err="1">
+                <a:solidFill>
+                  <a:srgbClr val="4864AA"/>
+                </a:solidFill>
+                <a:effectLst/>
+                <a:latin typeface="Consolas" panose="020B0609020204030204" pitchFamily="49" charset="0"/>
+              </a:rPr>
+              <a:t>rdi</a:t>
+            </a:r>
+            <a:r>
+              <a:rPr lang="en-US" b="0" dirty="0" err="1">
+                <a:solidFill>
+                  <a:srgbClr val="000000"/>
+                </a:solidFill>
+                <a:effectLst/>
+                <a:latin typeface="Consolas" panose="020B0609020204030204" pitchFamily="49" charset="0"/>
+              </a:rPr>
+              <a:t>+</a:t>
+            </a:r>
+            <a:r>
+              <a:rPr lang="en-US" b="0" dirty="0" err="1">
+                <a:solidFill>
+                  <a:srgbClr val="4864AA"/>
+                </a:solidFill>
+                <a:effectLst/>
+                <a:latin typeface="Consolas" panose="020B0609020204030204" pitchFamily="49" charset="0"/>
+              </a:rPr>
+              <a:t>rdx</a:t>
+            </a:r>
+            <a:r>
+              <a:rPr lang="en-US" b="0" dirty="0">
+                <a:solidFill>
+                  <a:srgbClr val="000000"/>
+                </a:solidFill>
+                <a:effectLst/>
+                <a:latin typeface="Consolas" panose="020B0609020204030204" pitchFamily="49" charset="0"/>
+              </a:rPr>
+              <a:t>*</a:t>
+            </a:r>
+            <a:r>
+              <a:rPr lang="en-US" b="0" dirty="0">
+                <a:solidFill>
+                  <a:srgbClr val="098658"/>
+                </a:solidFill>
+                <a:effectLst/>
+                <a:latin typeface="Consolas" panose="020B0609020204030204" pitchFamily="49" charset="0"/>
+              </a:rPr>
+              <a:t>4</a:t>
+            </a:r>
+            <a:r>
+              <a:rPr lang="en-US" b="0" dirty="0">
+                <a:solidFill>
+                  <a:srgbClr val="000000"/>
+                </a:solidFill>
+                <a:effectLst/>
+                <a:latin typeface="Consolas" panose="020B0609020204030204" pitchFamily="49" charset="0"/>
+              </a:rPr>
+              <a:t>] </a:t>
+            </a:r>
+            <a:r>
+              <a:rPr lang="en-US" b="0" dirty="0">
+                <a:solidFill>
+                  <a:srgbClr val="00B050"/>
+                </a:solidFill>
+                <a:effectLst/>
+                <a:latin typeface="Consolas" panose="020B0609020204030204" pitchFamily="49" charset="0"/>
+              </a:rPr>
+              <a:t># 8b 0c 97</a:t>
+            </a:r>
+            <a:endParaRPr lang="en-US" b="0" dirty="0">
+              <a:solidFill>
+                <a:srgbClr val="000000"/>
+              </a:solidFill>
+              <a:effectLst/>
+              <a:latin typeface="Consolas" panose="020B0609020204030204" pitchFamily="49" charset="0"/>
+            </a:endParaRPr>
+          </a:p>
+          <a:p>
+            <a:pPr>
+              <a:buNone/>
+            </a:pPr>
+            <a:r>
+              <a:rPr lang="en-US" b="0" dirty="0">
+                <a:solidFill>
+                  <a:srgbClr val="000000"/>
+                </a:solidFill>
+                <a:effectLst/>
+                <a:latin typeface="Consolas" panose="020B0609020204030204" pitchFamily="49" charset="0"/>
+              </a:rPr>
+              <a:t>  </a:t>
+            </a:r>
+            <a:r>
+              <a:rPr lang="en-US" b="0" dirty="0" err="1">
+                <a:solidFill>
+                  <a:srgbClr val="0000FF"/>
+                </a:solidFill>
+                <a:effectLst/>
+                <a:latin typeface="Consolas" panose="020B0609020204030204" pitchFamily="49" charset="0"/>
+              </a:rPr>
+              <a:t>cmp</a:t>
+            </a:r>
+            <a:r>
+              <a:rPr lang="en-US" b="0" dirty="0">
+                <a:solidFill>
+                  <a:srgbClr val="000000"/>
+                </a:solidFill>
+                <a:effectLst/>
+                <a:latin typeface="Consolas" panose="020B0609020204030204" pitchFamily="49" charset="0"/>
+              </a:rPr>
+              <a:t> </a:t>
+            </a:r>
+            <a:r>
+              <a:rPr lang="en-US" b="0" dirty="0" err="1">
+                <a:solidFill>
+                  <a:srgbClr val="4864AA"/>
+                </a:solidFill>
+                <a:effectLst/>
+                <a:latin typeface="Consolas" panose="020B0609020204030204" pitchFamily="49" charset="0"/>
+              </a:rPr>
+              <a:t>eax</a:t>
+            </a:r>
+            <a:r>
+              <a:rPr lang="en-US" b="0" dirty="0">
+                <a:solidFill>
+                  <a:srgbClr val="000000"/>
+                </a:solidFill>
+                <a:effectLst/>
+                <a:latin typeface="Consolas" panose="020B0609020204030204" pitchFamily="49" charset="0"/>
+              </a:rPr>
+              <a:t>, </a:t>
+            </a:r>
+            <a:r>
+              <a:rPr lang="en-US" b="0" dirty="0" err="1">
+                <a:solidFill>
+                  <a:srgbClr val="4864AA"/>
+                </a:solidFill>
+                <a:effectLst/>
+                <a:latin typeface="Consolas" panose="020B0609020204030204" pitchFamily="49" charset="0"/>
+              </a:rPr>
+              <a:t>ecx</a:t>
+            </a:r>
+            <a:r>
+              <a:rPr lang="en-US" b="0" dirty="0">
+                <a:solidFill>
+                  <a:srgbClr val="4864AA"/>
+                </a:solidFill>
+                <a:effectLst/>
+                <a:latin typeface="Consolas" panose="020B0609020204030204" pitchFamily="49" charset="0"/>
+              </a:rPr>
+              <a:t>                   </a:t>
+            </a:r>
+            <a:r>
+              <a:rPr lang="en-US" b="0" dirty="0">
+                <a:solidFill>
+                  <a:srgbClr val="00B050"/>
+                </a:solidFill>
+                <a:effectLst/>
+                <a:latin typeface="Consolas" panose="020B0609020204030204" pitchFamily="49" charset="0"/>
+              </a:rPr>
+              <a:t># 39 c8</a:t>
+            </a:r>
+            <a:endParaRPr lang="en-US" b="0" dirty="0">
+              <a:solidFill>
+                <a:srgbClr val="000000"/>
+              </a:solidFill>
+              <a:effectLst/>
+              <a:latin typeface="Consolas" panose="020B0609020204030204" pitchFamily="49" charset="0"/>
+            </a:endParaRPr>
+          </a:p>
+          <a:p>
+            <a:pPr>
+              <a:buNone/>
+            </a:pPr>
+            <a:r>
+              <a:rPr lang="en-US" b="0" dirty="0">
+                <a:solidFill>
+                  <a:srgbClr val="000000"/>
+                </a:solidFill>
+                <a:effectLst/>
+                <a:latin typeface="Consolas" panose="020B0609020204030204" pitchFamily="49" charset="0"/>
+              </a:rPr>
+              <a:t>  </a:t>
+            </a:r>
+            <a:r>
+              <a:rPr lang="en-US" b="0" dirty="0" err="1">
+                <a:solidFill>
+                  <a:srgbClr val="0000FF"/>
+                </a:solidFill>
+                <a:effectLst/>
+                <a:latin typeface="Consolas" panose="020B0609020204030204" pitchFamily="49" charset="0"/>
+              </a:rPr>
+              <a:t>cmovl</a:t>
+            </a:r>
+            <a:r>
+              <a:rPr lang="en-US" b="0" dirty="0">
+                <a:solidFill>
+                  <a:srgbClr val="000000"/>
+                </a:solidFill>
+                <a:effectLst/>
+                <a:latin typeface="Consolas" panose="020B0609020204030204" pitchFamily="49" charset="0"/>
+              </a:rPr>
+              <a:t> </a:t>
+            </a:r>
+            <a:r>
+              <a:rPr lang="en-US" b="0" dirty="0" err="1">
+                <a:solidFill>
+                  <a:srgbClr val="4864AA"/>
+                </a:solidFill>
+                <a:effectLst/>
+                <a:latin typeface="Consolas" panose="020B0609020204030204" pitchFamily="49" charset="0"/>
+              </a:rPr>
+              <a:t>eax</a:t>
+            </a:r>
+            <a:r>
+              <a:rPr lang="en-US" b="0" dirty="0">
+                <a:solidFill>
+                  <a:srgbClr val="000000"/>
+                </a:solidFill>
+                <a:effectLst/>
+                <a:latin typeface="Consolas" panose="020B0609020204030204" pitchFamily="49" charset="0"/>
+              </a:rPr>
+              <a:t>, </a:t>
+            </a:r>
+            <a:r>
+              <a:rPr lang="en-US" b="0" dirty="0" err="1">
+                <a:solidFill>
+                  <a:srgbClr val="4864AA"/>
+                </a:solidFill>
+                <a:effectLst/>
+                <a:latin typeface="Consolas" panose="020B0609020204030204" pitchFamily="49" charset="0"/>
+              </a:rPr>
+              <a:t>ecx</a:t>
+            </a:r>
+            <a:r>
+              <a:rPr lang="en-US" b="0" dirty="0">
+                <a:solidFill>
+                  <a:srgbClr val="4864AA"/>
+                </a:solidFill>
+                <a:effectLst/>
+                <a:latin typeface="Consolas" panose="020B0609020204030204" pitchFamily="49" charset="0"/>
+              </a:rPr>
+              <a:t>                 </a:t>
+            </a:r>
+            <a:r>
+              <a:rPr lang="en-US" b="0" dirty="0">
+                <a:solidFill>
+                  <a:srgbClr val="00B050"/>
+                </a:solidFill>
+                <a:effectLst/>
+                <a:latin typeface="Consolas" panose="020B0609020204030204" pitchFamily="49" charset="0"/>
+              </a:rPr>
+              <a:t># 0f 4c c1</a:t>
+            </a:r>
+            <a:endParaRPr lang="en-US" b="0" dirty="0">
+              <a:solidFill>
+                <a:srgbClr val="000000"/>
+              </a:solidFill>
+              <a:effectLst/>
+              <a:latin typeface="Consolas" panose="020B0609020204030204" pitchFamily="49" charset="0"/>
+            </a:endParaRPr>
+          </a:p>
+          <a:p>
+            <a:pPr>
+              <a:buNone/>
+            </a:pPr>
+            <a:r>
+              <a:rPr lang="en-US" b="0" dirty="0">
+                <a:solidFill>
+                  <a:srgbClr val="000000"/>
+                </a:solidFill>
+                <a:effectLst/>
+                <a:latin typeface="Consolas" panose="020B0609020204030204" pitchFamily="49" charset="0"/>
+              </a:rPr>
+              <a:t>  </a:t>
+            </a:r>
+            <a:r>
+              <a:rPr lang="en-US" b="0" dirty="0" err="1">
+                <a:solidFill>
+                  <a:srgbClr val="0000FF"/>
+                </a:solidFill>
+                <a:effectLst/>
+                <a:latin typeface="Consolas" panose="020B0609020204030204" pitchFamily="49" charset="0"/>
+              </a:rPr>
+              <a:t>jmp</a:t>
+            </a:r>
+            <a:r>
+              <a:rPr lang="en-US" b="0" dirty="0">
+                <a:solidFill>
+                  <a:srgbClr val="000000"/>
+                </a:solidFill>
+                <a:effectLst/>
+                <a:latin typeface="Consolas" panose="020B0609020204030204" pitchFamily="49" charset="0"/>
+              </a:rPr>
+              <a:t> </a:t>
+            </a:r>
+            <a:r>
+              <a:rPr lang="en-US" b="0" dirty="0">
+                <a:solidFill>
+                  <a:srgbClr val="008080"/>
+                </a:solidFill>
+                <a:effectLst/>
+                <a:latin typeface="Consolas" panose="020B0609020204030204" pitchFamily="49" charset="0"/>
+              </a:rPr>
+              <a:t>.L3                        </a:t>
+            </a:r>
+            <a:r>
+              <a:rPr lang="en-US" dirty="0">
+                <a:solidFill>
+                  <a:srgbClr val="00B050"/>
+                </a:solidFill>
+                <a:latin typeface="Consolas" panose="020B0609020204030204" pitchFamily="49" charset="0"/>
+              </a:rPr>
+              <a:t># </a:t>
+            </a:r>
+            <a:r>
+              <a:rPr lang="en-US" dirty="0" err="1">
+                <a:solidFill>
+                  <a:srgbClr val="00B050"/>
+                </a:solidFill>
+                <a:latin typeface="Consolas" panose="020B0609020204030204" pitchFamily="49" charset="0"/>
+              </a:rPr>
+              <a:t>eb</a:t>
+            </a:r>
+            <a:r>
+              <a:rPr lang="en-US" dirty="0">
+                <a:solidFill>
+                  <a:srgbClr val="00B050"/>
+                </a:solidFill>
+                <a:latin typeface="Consolas" panose="020B0609020204030204" pitchFamily="49" charset="0"/>
+              </a:rPr>
+              <a:t> </a:t>
+            </a:r>
+            <a:r>
+              <a:rPr lang="en-US" dirty="0" err="1">
+                <a:solidFill>
+                  <a:srgbClr val="00B050"/>
+                </a:solidFill>
+                <a:latin typeface="Consolas" panose="020B0609020204030204" pitchFamily="49" charset="0"/>
+              </a:rPr>
+              <a:t>ef</a:t>
+            </a:r>
+            <a:endParaRPr lang="en-US" b="0" dirty="0">
+              <a:solidFill>
+                <a:srgbClr val="000000"/>
+              </a:solidFill>
+              <a:effectLst/>
+              <a:latin typeface="Consolas" panose="020B0609020204030204" pitchFamily="49" charset="0"/>
+            </a:endParaRPr>
+          </a:p>
+          <a:p>
+            <a:pPr>
+              <a:buNone/>
+            </a:pPr>
+            <a:r>
+              <a:rPr lang="en-US" b="0" dirty="0">
+                <a:solidFill>
+                  <a:srgbClr val="0000FF"/>
+                </a:solidFill>
+                <a:effectLst/>
+                <a:latin typeface="Consolas" panose="020B0609020204030204" pitchFamily="49" charset="0"/>
+              </a:rPr>
+              <a:t>.L1</a:t>
+            </a:r>
+            <a:r>
+              <a:rPr lang="en-US" b="0" dirty="0">
+                <a:solidFill>
+                  <a:srgbClr val="000000"/>
+                </a:solidFill>
+                <a:effectLst/>
+                <a:latin typeface="Consolas" panose="020B0609020204030204" pitchFamily="49" charset="0"/>
+              </a:rPr>
+              <a:t>:</a:t>
+            </a:r>
+          </a:p>
+          <a:p>
+            <a:pPr>
+              <a:buNone/>
+            </a:pPr>
+            <a:r>
+              <a:rPr lang="en-US" b="0" dirty="0">
+                <a:solidFill>
+                  <a:srgbClr val="000000"/>
+                </a:solidFill>
+                <a:effectLst/>
+                <a:latin typeface="Consolas" panose="020B0609020204030204" pitchFamily="49" charset="0"/>
+              </a:rPr>
+              <a:t>  </a:t>
+            </a:r>
+            <a:r>
+              <a:rPr lang="en-US" b="0" dirty="0">
+                <a:solidFill>
+                  <a:srgbClr val="0000FF"/>
+                </a:solidFill>
+                <a:effectLst/>
+                <a:latin typeface="Consolas" panose="020B0609020204030204" pitchFamily="49" charset="0"/>
+              </a:rPr>
+              <a:t>ret                            </a:t>
+            </a:r>
+            <a:r>
+              <a:rPr lang="en-US" b="0" dirty="0">
+                <a:solidFill>
+                  <a:srgbClr val="00B050"/>
+                </a:solidFill>
+                <a:effectLst/>
+                <a:latin typeface="Consolas" panose="020B0609020204030204" pitchFamily="49" charset="0"/>
+              </a:rPr>
+              <a:t># c3</a:t>
+            </a:r>
+            <a:endParaRPr lang="en-US" b="0" dirty="0">
+              <a:solidFill>
+                <a:srgbClr val="000000"/>
+              </a:solidFill>
+              <a:effectLst/>
+              <a:latin typeface="Consolas" panose="020B0609020204030204" pitchFamily="49" charset="0"/>
+            </a:endParaRPr>
+          </a:p>
+        </p:txBody>
+      </p:sp>
+      <p:sp>
+        <p:nvSpPr>
+          <p:cNvPr id="19" name="TextBox 18">
+            <a:extLst>
+              <a:ext uri="{FF2B5EF4-FFF2-40B4-BE49-F238E27FC236}">
+                <a16:creationId xmlns:a16="http://schemas.microsoft.com/office/drawing/2014/main" id="{6096FFB2-21F1-898B-168A-CB802B7B410E}"/>
+              </a:ext>
+            </a:extLst>
+          </p:cNvPr>
+          <p:cNvSpPr txBox="1"/>
+          <p:nvPr/>
+        </p:nvSpPr>
+        <p:spPr>
+          <a:xfrm>
+            <a:off x="838200" y="6394003"/>
+            <a:ext cx="4947458" cy="369332"/>
+          </a:xfrm>
+          <a:prstGeom prst="rect">
+            <a:avLst/>
+          </a:prstGeom>
+          <a:noFill/>
+        </p:spPr>
+        <p:txBody>
+          <a:bodyPr wrap="square">
+            <a:spAutoFit/>
+          </a:bodyPr>
+          <a:lstStyle/>
+          <a:p>
+            <a:r>
+              <a:rPr lang="en-US" dirty="0">
+                <a:hlinkClick r:id="rId3"/>
+              </a:rPr>
+              <a:t>https://godbolt.org/z/rfjq9ov3c</a:t>
+            </a:r>
+            <a:endParaRPr lang="en-US" dirty="0"/>
+          </a:p>
+        </p:txBody>
+      </p:sp>
+    </p:spTree>
+    <p:extLst>
+      <p:ext uri="{BB962C8B-B14F-4D97-AF65-F5344CB8AC3E}">
+        <p14:creationId xmlns:p14="http://schemas.microsoft.com/office/powerpoint/2010/main" val="1570858258"/>
+      </p:ext>
+    </p:extLst>
+  </p:cSld>
+  <p:clrMapOvr>
+    <a:masterClrMapping/>
+  </p:clrMapOvr>
+</p:sld>
+</file>
+
+<file path=ppt/slides/slide11.xml><?xml version="1.0" encoding="utf-8"?>
+<p:sld xmlns:a="http://schemas.openxmlformats.org/drawingml/2006/main" xmlns:r="http://schemas.openxmlformats.org/officeDocument/2006/relationships" xmlns:p="http://schemas.openxmlformats.org/presentationml/2006/main">
+  <p:cSld>
+    <p:spTree>
+      <p:nvGrpSpPr>
         <p:cNvPr id="1" name="">
           <a:extLst>
             <a:ext uri="{FF2B5EF4-FFF2-40B4-BE49-F238E27FC236}">
@@ -18128,7 +20193,7 @@
 </p:sld>
 </file>
 
-<file path=ppt/slides/slide11.xml><?xml version="1.0" encoding="utf-8"?>
+<file path=ppt/slides/slide12.xml><?xml version="1.0" encoding="utf-8"?>
 <p:sld xmlns:a="http://schemas.openxmlformats.org/drawingml/2006/main" xmlns:r="http://schemas.openxmlformats.org/officeDocument/2006/relationships" xmlns:p="http://schemas.openxmlformats.org/presentationml/2006/main">
   <p:cSld>
     <p:spTree>
@@ -18302,7 +20367,7 @@
 </p:sld>
 </file>
 
-<file path=ppt/slides/slide12.xml><?xml version="1.0" encoding="utf-8"?>
+<file path=ppt/slides/slide13.xml><?xml version="1.0" encoding="utf-8"?>
 <p:sld xmlns:a="http://schemas.openxmlformats.org/drawingml/2006/main" xmlns:r="http://schemas.openxmlformats.org/officeDocument/2006/relationships" xmlns:p="http://schemas.openxmlformats.org/presentationml/2006/main">
   <p:cSld>
     <p:spTree>
@@ -18472,7 +20537,7 @@
 </p:sld>
 </file>
 
-<file path=ppt/slides/slide13.xml><?xml version="1.0" encoding="utf-8"?>
+<file path=ppt/slides/slide14.xml><?xml version="1.0" encoding="utf-8"?>
 <p:sld xmlns:a="http://schemas.openxmlformats.org/drawingml/2006/main" xmlns:r="http://schemas.openxmlformats.org/officeDocument/2006/relationships" xmlns:p="http://schemas.openxmlformats.org/presentationml/2006/main">
   <p:cSld>
     <p:spTree>
@@ -18638,7 +20703,7 @@
 </p:sld>
 </file>
 
-<file path=ppt/slides/slide14.xml><?xml version="1.0" encoding="utf-8"?>
+<file path=ppt/slides/slide15.xml><?xml version="1.0" encoding="utf-8"?>
 <p:sld xmlns:a="http://schemas.openxmlformats.org/drawingml/2006/main" xmlns:r="http://schemas.openxmlformats.org/officeDocument/2006/relationships" xmlns:p="http://schemas.openxmlformats.org/presentationml/2006/main">
   <p:cSld>
     <p:spTree>
@@ -18805,7 +20870,7 @@
 </p:sld>
 </file>
 
-<file path=ppt/slides/slide15.xml><?xml version="1.0" encoding="utf-8"?>
+<file path=ppt/slides/slide16.xml><?xml version="1.0" encoding="utf-8"?>
 <p:sld xmlns:a="http://schemas.openxmlformats.org/drawingml/2006/main" xmlns:r="http://schemas.openxmlformats.org/officeDocument/2006/relationships" xmlns:p="http://schemas.openxmlformats.org/presentationml/2006/main">
   <p:cSld>
     <p:spTree>
@@ -19353,7 +21418,7 @@
 </p:sld>
 </file>
 
-<file path=ppt/slides/slide16.xml><?xml version="1.0" encoding="utf-8"?>
+<file path=ppt/slides/slide17.xml><?xml version="1.0" encoding="utf-8"?>
 <p:sld xmlns:a="http://schemas.openxmlformats.org/drawingml/2006/main" xmlns:r="http://schemas.openxmlformats.org/officeDocument/2006/relationships" xmlns:p="http://schemas.openxmlformats.org/presentationml/2006/main">
   <p:cSld>
     <p:spTree>
@@ -19541,7 +21606,7 @@
 </p:sld>
 </file>
 
-<file path=ppt/slides/slide17.xml><?xml version="1.0" encoding="utf-8"?>
+<file path=ppt/slides/slide18.xml><?xml version="1.0" encoding="utf-8"?>
 <p:sld xmlns:a="http://schemas.openxmlformats.org/drawingml/2006/main" xmlns:r="http://schemas.openxmlformats.org/officeDocument/2006/relationships" xmlns:p="http://schemas.openxmlformats.org/presentationml/2006/main">
   <p:cSld>
     <p:spTree>
@@ -19628,7 +21693,7 @@
 </p:sld>
 </file>
 
-<file path=ppt/slides/slide18.xml><?xml version="1.0" encoding="utf-8"?>
+<file path=ppt/slides/slide19.xml><?xml version="1.0" encoding="utf-8"?>
 <p:sld xmlns:a="http://schemas.openxmlformats.org/drawingml/2006/main" xmlns:r="http://schemas.openxmlformats.org/officeDocument/2006/relationships" xmlns:p="http://schemas.openxmlformats.org/presentationml/2006/main">
   <p:cSld>
     <p:spTree>
@@ -20014,183 +22079,6 @@
     <p:extLst>
       <p:ext uri="{BB962C8B-B14F-4D97-AF65-F5344CB8AC3E}">
         <p14:creationId xmlns:p14="http://schemas.microsoft.com/office/powerpoint/2010/main" val="4054344436"/>
-      </p:ext>
-    </p:extLst>
-  </p:cSld>
-  <p:clrMapOvr>
-    <a:masterClrMapping/>
-  </p:clrMapOvr>
-</p:sld>
-</file>
-
-<file path=ppt/slides/slide19.xml><?xml version="1.0" encoding="utf-8"?>
-<p:sld xmlns:a="http://schemas.openxmlformats.org/drawingml/2006/main" xmlns:r="http://schemas.openxmlformats.org/officeDocument/2006/relationships" xmlns:p="http://schemas.openxmlformats.org/presentationml/2006/main">
-  <p:cSld>
-    <p:spTree>
-      <p:nvGrpSpPr>
-        <p:cNvPr id="1" name=""/>
-        <p:cNvGrpSpPr/>
-        <p:nvPr/>
-      </p:nvGrpSpPr>
-      <p:grpSpPr>
-        <a:xfrm>
-          <a:off x="0" y="0"/>
-          <a:ext cx="0" cy="0"/>
-          <a:chOff x="0" y="0"/>
-          <a:chExt cx="0" cy="0"/>
-        </a:xfrm>
-      </p:grpSpPr>
-      <p:sp>
-        <p:nvSpPr>
-          <p:cNvPr id="3" name="Title 2">
-            <a:extLst>
-              <a:ext uri="{FF2B5EF4-FFF2-40B4-BE49-F238E27FC236}">
-                <a16:creationId xmlns:a16="http://schemas.microsoft.com/office/drawing/2014/main" id="{2DE9FE59-7895-B313-987D-BFA9DED36450}"/>
-              </a:ext>
-            </a:extLst>
-          </p:cNvPr>
-          <p:cNvSpPr>
-            <a:spLocks noGrp="1"/>
-          </p:cNvSpPr>
-          <p:nvPr>
-            <p:ph type="title"/>
-          </p:nvPr>
-        </p:nvSpPr>
-        <p:spPr/>
-        <p:txBody>
-          <a:bodyPr/>
-          <a:lstStyle/>
-          <a:p>
-            <a:r>
-              <a:rPr lang="ru-RU" dirty="0"/>
-              <a:t>Компиляция программы из командной строки</a:t>
-            </a:r>
-            <a:endParaRPr lang="en-US" dirty="0"/>
-          </a:p>
-        </p:txBody>
-      </p:sp>
-      <p:sp>
-        <p:nvSpPr>
-          <p:cNvPr id="4" name="Content Placeholder 3">
-            <a:extLst>
-              <a:ext uri="{FF2B5EF4-FFF2-40B4-BE49-F238E27FC236}">
-                <a16:creationId xmlns:a16="http://schemas.microsoft.com/office/drawing/2014/main" id="{E4F6319D-5811-540D-900C-59D0E330685F}"/>
-              </a:ext>
-            </a:extLst>
-          </p:cNvPr>
-          <p:cNvSpPr>
-            <a:spLocks noGrp="1"/>
-          </p:cNvSpPr>
-          <p:nvPr>
-            <p:ph idx="1"/>
-          </p:nvPr>
-        </p:nvSpPr>
-        <p:spPr/>
-        <p:txBody>
-          <a:bodyPr/>
-          <a:lstStyle/>
-          <a:p>
-            <a:r>
-              <a:rPr lang="en-US" dirty="0"/>
-              <a:t>GCC / Clang (Linux, MacOS)</a:t>
-            </a:r>
-          </a:p>
-          <a:p>
-            <a:pPr marL="457200" lvl="1" indent="0">
-              <a:buNone/>
-            </a:pPr>
-            <a:r>
-              <a:rPr lang="en-US" dirty="0" err="1"/>
-              <a:t>gcc</a:t>
-            </a:r>
-            <a:r>
-              <a:rPr lang="en-US" dirty="0"/>
-              <a:t> </a:t>
-            </a:r>
-            <a:r>
-              <a:rPr lang="en-US" dirty="0" err="1"/>
-              <a:t>hello.c</a:t>
-            </a:r>
-            <a:r>
-              <a:rPr lang="en-US" dirty="0"/>
-              <a:t> -o hello</a:t>
-            </a:r>
-            <a:br>
-              <a:rPr lang="ru-RU" dirty="0"/>
-            </a:br>
-            <a:r>
-              <a:rPr lang="en-US" dirty="0"/>
-              <a:t>./hello</a:t>
-            </a:r>
-          </a:p>
-          <a:p>
-            <a:r>
-              <a:rPr lang="en-US" dirty="0"/>
-              <a:t>Clang</a:t>
-            </a:r>
-          </a:p>
-          <a:p>
-            <a:pPr marL="457200" lvl="1" indent="0">
-              <a:buNone/>
-            </a:pPr>
-            <a:r>
-              <a:rPr lang="en-US" dirty="0"/>
-              <a:t>clang </a:t>
-            </a:r>
-            <a:r>
-              <a:rPr lang="en-US" dirty="0" err="1"/>
-              <a:t>hello.c</a:t>
-            </a:r>
-            <a:r>
-              <a:rPr lang="en-US" dirty="0"/>
-              <a:t> -o hello</a:t>
-            </a:r>
-          </a:p>
-          <a:p>
-            <a:pPr marL="457200" lvl="1" indent="0">
-              <a:buNone/>
-            </a:pPr>
-            <a:r>
-              <a:rPr lang="en-US" dirty="0"/>
-              <a:t>./hello</a:t>
-            </a:r>
-          </a:p>
-          <a:p>
-            <a:r>
-              <a:rPr lang="en-US" dirty="0"/>
-              <a:t>Microsoft Visual C++ (Windows)</a:t>
-            </a:r>
-          </a:p>
-          <a:p>
-            <a:pPr marL="457200" lvl="1" indent="0">
-              <a:buNone/>
-            </a:pPr>
-            <a:r>
-              <a:rPr lang="en-US" dirty="0"/>
-              <a:t>cl </a:t>
-            </a:r>
-            <a:r>
-              <a:rPr lang="en-US" dirty="0" err="1"/>
-              <a:t>hello.c</a:t>
-            </a:r>
-            <a:endParaRPr lang="en-US" dirty="0"/>
-          </a:p>
-          <a:p>
-            <a:pPr marL="457200" lvl="1" indent="0">
-              <a:buNone/>
-            </a:pPr>
-            <a:r>
-              <a:rPr lang="en-US" dirty="0"/>
-              <a:t>hello.exe</a:t>
-            </a:r>
-            <a:endParaRPr lang="ru-RU" dirty="0"/>
-          </a:p>
-        </p:txBody>
-      </p:sp>
-    </p:spTree>
-    <p:extLst>
-      <p:ext uri="{BB962C8B-B14F-4D97-AF65-F5344CB8AC3E}">
-        <p14:creationId xmlns:p14="http://schemas.microsoft.com/office/powerpoint/2010/main" val="1483649935"/>
       </p:ext>
     </p:extLst>
   </p:cSld>
@@ -20341,6 +22229,183 @@
       </p:grpSpPr>
       <p:sp>
         <p:nvSpPr>
+          <p:cNvPr id="3" name="Title 2">
+            <a:extLst>
+              <a:ext uri="{FF2B5EF4-FFF2-40B4-BE49-F238E27FC236}">
+                <a16:creationId xmlns:a16="http://schemas.microsoft.com/office/drawing/2014/main" id="{2DE9FE59-7895-B313-987D-BFA9DED36450}"/>
+              </a:ext>
+            </a:extLst>
+          </p:cNvPr>
+          <p:cNvSpPr>
+            <a:spLocks noGrp="1"/>
+          </p:cNvSpPr>
+          <p:nvPr>
+            <p:ph type="title"/>
+          </p:nvPr>
+        </p:nvSpPr>
+        <p:spPr/>
+        <p:txBody>
+          <a:bodyPr/>
+          <a:lstStyle/>
+          <a:p>
+            <a:r>
+              <a:rPr lang="ru-RU" dirty="0"/>
+              <a:t>Компиляция программы из командной строки</a:t>
+            </a:r>
+            <a:endParaRPr lang="en-US" dirty="0"/>
+          </a:p>
+        </p:txBody>
+      </p:sp>
+      <p:sp>
+        <p:nvSpPr>
+          <p:cNvPr id="4" name="Content Placeholder 3">
+            <a:extLst>
+              <a:ext uri="{FF2B5EF4-FFF2-40B4-BE49-F238E27FC236}">
+                <a16:creationId xmlns:a16="http://schemas.microsoft.com/office/drawing/2014/main" id="{E4F6319D-5811-540D-900C-59D0E330685F}"/>
+              </a:ext>
+            </a:extLst>
+          </p:cNvPr>
+          <p:cNvSpPr>
+            <a:spLocks noGrp="1"/>
+          </p:cNvSpPr>
+          <p:nvPr>
+            <p:ph idx="1"/>
+          </p:nvPr>
+        </p:nvSpPr>
+        <p:spPr/>
+        <p:txBody>
+          <a:bodyPr/>
+          <a:lstStyle/>
+          <a:p>
+            <a:r>
+              <a:rPr lang="en-US" dirty="0"/>
+              <a:t>GCC / Clang (Linux, MacOS)</a:t>
+            </a:r>
+          </a:p>
+          <a:p>
+            <a:pPr marL="457200" lvl="1" indent="0">
+              <a:buNone/>
+            </a:pPr>
+            <a:r>
+              <a:rPr lang="en-US" dirty="0" err="1"/>
+              <a:t>gcc</a:t>
+            </a:r>
+            <a:r>
+              <a:rPr lang="en-US" dirty="0"/>
+              <a:t> </a:t>
+            </a:r>
+            <a:r>
+              <a:rPr lang="en-US" dirty="0" err="1"/>
+              <a:t>hello.c</a:t>
+            </a:r>
+            <a:r>
+              <a:rPr lang="en-US" dirty="0"/>
+              <a:t> -o hello</a:t>
+            </a:r>
+            <a:br>
+              <a:rPr lang="ru-RU" dirty="0"/>
+            </a:br>
+            <a:r>
+              <a:rPr lang="en-US" dirty="0"/>
+              <a:t>./hello</a:t>
+            </a:r>
+          </a:p>
+          <a:p>
+            <a:r>
+              <a:rPr lang="en-US" dirty="0"/>
+              <a:t>Clang</a:t>
+            </a:r>
+          </a:p>
+          <a:p>
+            <a:pPr marL="457200" lvl="1" indent="0">
+              <a:buNone/>
+            </a:pPr>
+            <a:r>
+              <a:rPr lang="en-US" dirty="0"/>
+              <a:t>clang </a:t>
+            </a:r>
+            <a:r>
+              <a:rPr lang="en-US" dirty="0" err="1"/>
+              <a:t>hello.c</a:t>
+            </a:r>
+            <a:r>
+              <a:rPr lang="en-US" dirty="0"/>
+              <a:t> -o hello</a:t>
+            </a:r>
+          </a:p>
+          <a:p>
+            <a:pPr marL="457200" lvl="1" indent="0">
+              <a:buNone/>
+            </a:pPr>
+            <a:r>
+              <a:rPr lang="en-US" dirty="0"/>
+              <a:t>./hello</a:t>
+            </a:r>
+          </a:p>
+          <a:p>
+            <a:r>
+              <a:rPr lang="en-US" dirty="0"/>
+              <a:t>Microsoft Visual C++ (Windows)</a:t>
+            </a:r>
+          </a:p>
+          <a:p>
+            <a:pPr marL="457200" lvl="1" indent="0">
+              <a:buNone/>
+            </a:pPr>
+            <a:r>
+              <a:rPr lang="en-US" dirty="0"/>
+              <a:t>cl </a:t>
+            </a:r>
+            <a:r>
+              <a:rPr lang="en-US" dirty="0" err="1"/>
+              <a:t>hello.c</a:t>
+            </a:r>
+            <a:endParaRPr lang="en-US" dirty="0"/>
+          </a:p>
+          <a:p>
+            <a:pPr marL="457200" lvl="1" indent="0">
+              <a:buNone/>
+            </a:pPr>
+            <a:r>
+              <a:rPr lang="en-US" dirty="0"/>
+              <a:t>hello.exe</a:t>
+            </a:r>
+            <a:endParaRPr lang="ru-RU" dirty="0"/>
+          </a:p>
+        </p:txBody>
+      </p:sp>
+    </p:spTree>
+    <p:extLst>
+      <p:ext uri="{BB962C8B-B14F-4D97-AF65-F5344CB8AC3E}">
+        <p14:creationId xmlns:p14="http://schemas.microsoft.com/office/powerpoint/2010/main" val="1483649935"/>
+      </p:ext>
+    </p:extLst>
+  </p:cSld>
+  <p:clrMapOvr>
+    <a:masterClrMapping/>
+  </p:clrMapOvr>
+</p:sld>
+</file>
+
+<file path=ppt/slides/slide21.xml><?xml version="1.0" encoding="utf-8"?>
+<p:sld xmlns:a="http://schemas.openxmlformats.org/drawingml/2006/main" xmlns:r="http://schemas.openxmlformats.org/officeDocument/2006/relationships" xmlns:p="http://schemas.openxmlformats.org/presentationml/2006/main">
+  <p:cSld>
+    <p:spTree>
+      <p:nvGrpSpPr>
+        <p:cNvPr id="1" name=""/>
+        <p:cNvGrpSpPr/>
+        <p:nvPr/>
+      </p:nvGrpSpPr>
+      <p:grpSpPr>
+        <a:xfrm>
+          <a:off x="0" y="0"/>
+          <a:ext cx="0" cy="0"/>
+          <a:chOff x="0" y="0"/>
+          <a:chExt cx="0" cy="0"/>
+        </a:xfrm>
+      </p:grpSpPr>
+      <p:sp>
+        <p:nvSpPr>
           <p:cNvPr id="2" name="Title 1">
             <a:extLst>
               <a:ext uri="{FF2B5EF4-FFF2-40B4-BE49-F238E27FC236}">
@@ -20497,7 +22562,7 @@
 </p:sld>
 </file>
 
-<file path=ppt/slides/slide21.xml><?xml version="1.0" encoding="utf-8"?>
+<file path=ppt/slides/slide22.xml><?xml version="1.0" encoding="utf-8"?>
 <p:sld xmlns:a="http://schemas.openxmlformats.org/drawingml/2006/main" xmlns:r="http://schemas.openxmlformats.org/officeDocument/2006/relationships" xmlns:p="http://schemas.openxmlformats.org/presentationml/2006/main">
   <p:cSld>
     <p:spTree>
@@ -20893,7 +22958,7 @@
 </p:sld>
 </file>
 
-<file path=ppt/slides/slide22.xml><?xml version="1.0" encoding="utf-8"?>
+<file path=ppt/slides/slide23.xml><?xml version="1.0" encoding="utf-8"?>
 <p:sld xmlns:a="http://schemas.openxmlformats.org/drawingml/2006/main" xmlns:r="http://schemas.openxmlformats.org/officeDocument/2006/relationships" xmlns:p="http://schemas.openxmlformats.org/presentationml/2006/main">
   <p:cSld>
     <p:spTree>
@@ -21113,7 +23178,7 @@
 </p:sld>
 </file>
 
-<file path=ppt/slides/slide23.xml><?xml version="1.0" encoding="utf-8"?>
+<file path=ppt/slides/slide24.xml><?xml version="1.0" encoding="utf-8"?>
 <p:sld xmlns:a="http://schemas.openxmlformats.org/drawingml/2006/main" xmlns:r="http://schemas.openxmlformats.org/officeDocument/2006/relationships" xmlns:p="http://schemas.openxmlformats.org/presentationml/2006/main">
   <p:cSld>
     <p:spTree>
@@ -21282,7 +23347,7 @@
 </p:sld>
 </file>
 
-<file path=ppt/slides/slide24.xml><?xml version="1.0" encoding="utf-8"?>
+<file path=ppt/slides/slide25.xml><?xml version="1.0" encoding="utf-8"?>
 <p:sld xmlns:a="http://schemas.openxmlformats.org/drawingml/2006/main" xmlns:r="http://schemas.openxmlformats.org/officeDocument/2006/relationships" xmlns:p="http://schemas.openxmlformats.org/presentationml/2006/main">
   <p:cSld>
     <p:spTree>
@@ -21499,7 +23564,7 @@
 </p:sld>
 </file>
 
-<file path=ppt/slides/slide25.xml><?xml version="1.0" encoding="utf-8"?>
+<file path=ppt/slides/slide26.xml><?xml version="1.0" encoding="utf-8"?>
 <p:sld xmlns:a="http://schemas.openxmlformats.org/drawingml/2006/main" xmlns:r="http://schemas.openxmlformats.org/officeDocument/2006/relationships" xmlns:p="http://schemas.openxmlformats.org/presentationml/2006/main">
   <p:cSld>
     <p:spTree>
@@ -21709,7 +23774,7 @@
 </p:sld>
 </file>
 
-<file path=ppt/slides/slide26.xml><?xml version="1.0" encoding="utf-8"?>
+<file path=ppt/slides/slide27.xml><?xml version="1.0" encoding="utf-8"?>
 <p:sld xmlns:a="http://schemas.openxmlformats.org/drawingml/2006/main" xmlns:r="http://schemas.openxmlformats.org/officeDocument/2006/relationships" xmlns:p="http://schemas.openxmlformats.org/presentationml/2006/main">
   <p:cSld>
     <p:spTree>
@@ -23017,7 +25082,7 @@
 </p:sld>
 </file>
 
-<file path=ppt/slides/slide27.xml><?xml version="1.0" encoding="utf-8"?>
+<file path=ppt/slides/slide28.xml><?xml version="1.0" encoding="utf-8"?>
 <p:sld xmlns:a="http://schemas.openxmlformats.org/drawingml/2006/main" xmlns:r="http://schemas.openxmlformats.org/officeDocument/2006/relationships" xmlns:p="http://schemas.openxmlformats.org/presentationml/2006/main">
   <p:cSld>
     <p:spTree>
@@ -24422,7 +26487,7 @@
 </p:sld>
 </file>
 
-<file path=ppt/slides/slide28.xml><?xml version="1.0" encoding="utf-8"?>
+<file path=ppt/slides/slide29.xml><?xml version="1.0" encoding="utf-8"?>
 <p:sld xmlns:a="http://schemas.openxmlformats.org/drawingml/2006/main" xmlns:r="http://schemas.openxmlformats.org/officeDocument/2006/relationships" xmlns:p="http://schemas.openxmlformats.org/presentationml/2006/main">
   <p:cSld>
     <p:spTree>
@@ -25177,273 +27242,6 @@
     <p:extLst>
       <p:ext uri="{BB962C8B-B14F-4D97-AF65-F5344CB8AC3E}">
         <p14:creationId xmlns:p14="http://schemas.microsoft.com/office/powerpoint/2010/main" val="595066499"/>
-      </p:ext>
-    </p:extLst>
-  </p:cSld>
-  <p:clrMapOvr>
-    <a:masterClrMapping/>
-  </p:clrMapOvr>
-</p:sld>
-</file>
-
-<file path=ppt/slides/slide29.xml><?xml version="1.0" encoding="utf-8"?>
-<p:sld xmlns:a="http://schemas.openxmlformats.org/drawingml/2006/main" xmlns:r="http://schemas.openxmlformats.org/officeDocument/2006/relationships" xmlns:p="http://schemas.openxmlformats.org/presentationml/2006/main">
-  <p:cSld>
-    <p:spTree>
-      <p:nvGrpSpPr>
-        <p:cNvPr id="1" name=""/>
-        <p:cNvGrpSpPr/>
-        <p:nvPr/>
-      </p:nvGrpSpPr>
-      <p:grpSpPr>
-        <a:xfrm>
-          <a:off x="0" y="0"/>
-          <a:ext cx="0" cy="0"/>
-          <a:chOff x="0" y="0"/>
-          <a:chExt cx="0" cy="0"/>
-        </a:xfrm>
-      </p:grpSpPr>
-      <p:sp>
-        <p:nvSpPr>
-          <p:cNvPr id="2" name="Title 1">
-            <a:extLst>
-              <a:ext uri="{FF2B5EF4-FFF2-40B4-BE49-F238E27FC236}">
-                <a16:creationId xmlns:a16="http://schemas.microsoft.com/office/drawing/2014/main" id="{BBA32572-1A1E-80D5-ADE4-5C7C8D0A4DA9}"/>
-              </a:ext>
-            </a:extLst>
-          </p:cNvPr>
-          <p:cNvSpPr>
-            <a:spLocks noGrp="1"/>
-          </p:cNvSpPr>
-          <p:nvPr>
-            <p:ph type="title"/>
-          </p:nvPr>
-        </p:nvSpPr>
-        <p:spPr/>
-        <p:txBody>
-          <a:bodyPr/>
-          <a:lstStyle/>
-          <a:p>
-            <a:r>
-              <a:rPr lang="ru-RU" dirty="0"/>
-              <a:t>Объявление переменных в языке </a:t>
-            </a:r>
-            <a:r>
-              <a:rPr lang="en-US" dirty="0"/>
-              <a:t>C</a:t>
-            </a:r>
-          </a:p>
-        </p:txBody>
-      </p:sp>
-      <p:sp>
-        <p:nvSpPr>
-          <p:cNvPr id="3" name="Content Placeholder 2">
-            <a:extLst>
-              <a:ext uri="{FF2B5EF4-FFF2-40B4-BE49-F238E27FC236}">
-                <a16:creationId xmlns:a16="http://schemas.microsoft.com/office/drawing/2014/main" id="{39924E4C-1E34-BF88-6F77-9D205A10E3E0}"/>
-              </a:ext>
-            </a:extLst>
-          </p:cNvPr>
-          <p:cNvSpPr>
-            <a:spLocks noGrp="1"/>
-          </p:cNvSpPr>
-          <p:nvPr>
-            <p:ph idx="1"/>
-          </p:nvPr>
-        </p:nvSpPr>
-        <p:spPr/>
-        <p:txBody>
-          <a:bodyPr>
-            <a:normAutofit fontScale="92500" lnSpcReduction="20000"/>
-          </a:bodyPr>
-          <a:lstStyle/>
-          <a:p>
-            <a:r>
-              <a:rPr lang="ru-RU" dirty="0"/>
-              <a:t>Объявление переменной</a:t>
-            </a:r>
-          </a:p>
-          <a:p>
-            <a:pPr lvl="1">
-              <a:lnSpc>
-                <a:spcPts val="1425"/>
-              </a:lnSpc>
-              <a:buNone/>
-            </a:pPr>
-            <a:r>
-              <a:rPr lang="en-US" dirty="0">
-                <a:solidFill>
-                  <a:srgbClr val="0000FF"/>
-                </a:solidFill>
-                <a:latin typeface="Consolas" panose="020B0609020204030204" pitchFamily="49" charset="0"/>
-              </a:rPr>
-              <a:t>int</a:t>
-            </a:r>
-            <a:r>
-              <a:rPr lang="en-US" dirty="0">
-                <a:solidFill>
-                  <a:srgbClr val="000000"/>
-                </a:solidFill>
-                <a:latin typeface="Consolas" panose="020B0609020204030204" pitchFamily="49" charset="0"/>
-              </a:rPr>
-              <a:t> a;</a:t>
-            </a:r>
-          </a:p>
-          <a:p>
-            <a:pPr lvl="1">
-              <a:lnSpc>
-                <a:spcPts val="1425"/>
-              </a:lnSpc>
-              <a:buNone/>
-            </a:pPr>
-            <a:r>
-              <a:rPr lang="en-US" dirty="0">
-                <a:solidFill>
-                  <a:srgbClr val="0000FF"/>
-                </a:solidFill>
-                <a:latin typeface="Consolas" panose="020B0609020204030204" pitchFamily="49" charset="0"/>
-              </a:rPr>
-              <a:t>int</a:t>
-            </a:r>
-            <a:r>
-              <a:rPr lang="en-US" dirty="0">
-                <a:solidFill>
-                  <a:srgbClr val="000000"/>
-                </a:solidFill>
-                <a:latin typeface="Consolas" panose="020B0609020204030204" pitchFamily="49" charset="0"/>
-              </a:rPr>
-              <a:t> b = </a:t>
-            </a:r>
-            <a:r>
-              <a:rPr lang="en-US" dirty="0">
-                <a:solidFill>
-                  <a:srgbClr val="098658"/>
-                </a:solidFill>
-                <a:latin typeface="Consolas" panose="020B0609020204030204" pitchFamily="49" charset="0"/>
-              </a:rPr>
-              <a:t>0</a:t>
-            </a:r>
-            <a:r>
-              <a:rPr lang="en-US" dirty="0">
-                <a:solidFill>
-                  <a:srgbClr val="000000"/>
-                </a:solidFill>
-                <a:latin typeface="Consolas" panose="020B0609020204030204" pitchFamily="49" charset="0"/>
-              </a:rPr>
-              <a:t>;</a:t>
-            </a:r>
-          </a:p>
-          <a:p>
-            <a:pPr lvl="1">
-              <a:lnSpc>
-                <a:spcPts val="1425"/>
-              </a:lnSpc>
-              <a:buNone/>
-            </a:pPr>
-            <a:r>
-              <a:rPr lang="en-US" dirty="0">
-                <a:solidFill>
-                  <a:srgbClr val="0000FF"/>
-                </a:solidFill>
-                <a:latin typeface="Consolas" panose="020B0609020204030204" pitchFamily="49" charset="0"/>
-              </a:rPr>
-              <a:t>int</a:t>
-            </a:r>
-            <a:r>
-              <a:rPr lang="en-US" dirty="0">
-                <a:solidFill>
-                  <a:srgbClr val="000000"/>
-                </a:solidFill>
-                <a:latin typeface="Consolas" panose="020B0609020204030204" pitchFamily="49" charset="0"/>
-              </a:rPr>
-              <a:t> sum = a + b;</a:t>
-            </a:r>
-            <a:endParaRPr lang="ru-RU" dirty="0">
-              <a:latin typeface="Consolas" panose="020B0609020204030204" pitchFamily="49" charset="0"/>
-            </a:endParaRPr>
-          </a:p>
-          <a:p>
-            <a:r>
-              <a:rPr lang="ru-RU" b="1" dirty="0"/>
-              <a:t>Основные правила</a:t>
-            </a:r>
-            <a:endParaRPr lang="ru-RU" dirty="0"/>
-          </a:p>
-          <a:p>
-            <a:pPr lvl="1"/>
-            <a:r>
-              <a:rPr lang="ru-RU" dirty="0"/>
-              <a:t>при объявлении всегда указывается тип</a:t>
-            </a:r>
-          </a:p>
-          <a:p>
-            <a:pPr lvl="1"/>
-            <a:r>
-              <a:rPr lang="ru-RU" dirty="0"/>
-              <a:t>тип переменной фиксирован на всё время её жизни</a:t>
-            </a:r>
-          </a:p>
-          <a:p>
-            <a:pPr lvl="1"/>
-            <a:r>
-              <a:rPr lang="ru-RU" dirty="0"/>
-              <a:t>переменные бывают:</a:t>
-            </a:r>
-          </a:p>
-          <a:p>
-            <a:pPr lvl="2"/>
-            <a:r>
-              <a:rPr lang="ru-RU" dirty="0"/>
-              <a:t>локальные (внутри функции или блока)</a:t>
-            </a:r>
-          </a:p>
-          <a:p>
-            <a:pPr lvl="2"/>
-            <a:r>
-              <a:rPr lang="ru-RU" dirty="0"/>
-              <a:t>глобальные (вне функций)</a:t>
-            </a:r>
-            <a:endParaRPr lang="en-US" dirty="0"/>
-          </a:p>
-          <a:p>
-            <a:r>
-              <a:rPr lang="ru-RU" b="1" dirty="0"/>
-              <a:t>Инициализация</a:t>
-            </a:r>
-            <a:endParaRPr lang="ru-RU" dirty="0"/>
-          </a:p>
-          <a:p>
-            <a:pPr lvl="1"/>
-            <a:r>
-              <a:rPr lang="ru-RU" dirty="0"/>
-              <a:t>локальные переменные по умолчанию </a:t>
-            </a:r>
-            <a:r>
-              <a:rPr lang="ru-RU" b="1" dirty="0"/>
-              <a:t>не инициализируются</a:t>
-            </a:r>
-            <a:endParaRPr lang="ru-RU" dirty="0"/>
-          </a:p>
-          <a:p>
-            <a:pPr lvl="1"/>
-            <a:r>
-              <a:rPr lang="ru-RU" dirty="0"/>
-              <a:t>глобальные переменные инициализируются нулём</a:t>
-            </a:r>
-          </a:p>
-          <a:p>
-            <a:pPr lvl="1"/>
-            <a:r>
-              <a:rPr lang="ru-RU" dirty="0"/>
-              <a:t>рекомендуется инициализировать переменные при объявлении</a:t>
-            </a:r>
-          </a:p>
-        </p:txBody>
-      </p:sp>
-    </p:spTree>
-    <p:extLst>
-      <p:ext uri="{BB962C8B-B14F-4D97-AF65-F5344CB8AC3E}">
-        <p14:creationId xmlns:p14="http://schemas.microsoft.com/office/powerpoint/2010/main" val="2972155484"/>
       </p:ext>
     </p:extLst>
   </p:cSld>
@@ -25604,6 +27402,273 @@
       </p:grpSpPr>
       <p:sp>
         <p:nvSpPr>
+          <p:cNvPr id="2" name="Title 1">
+            <a:extLst>
+              <a:ext uri="{FF2B5EF4-FFF2-40B4-BE49-F238E27FC236}">
+                <a16:creationId xmlns:a16="http://schemas.microsoft.com/office/drawing/2014/main" id="{BBA32572-1A1E-80D5-ADE4-5C7C8D0A4DA9}"/>
+              </a:ext>
+            </a:extLst>
+          </p:cNvPr>
+          <p:cNvSpPr>
+            <a:spLocks noGrp="1"/>
+          </p:cNvSpPr>
+          <p:nvPr>
+            <p:ph type="title"/>
+          </p:nvPr>
+        </p:nvSpPr>
+        <p:spPr/>
+        <p:txBody>
+          <a:bodyPr/>
+          <a:lstStyle/>
+          <a:p>
+            <a:r>
+              <a:rPr lang="ru-RU" dirty="0"/>
+              <a:t>Объявление переменных в языке </a:t>
+            </a:r>
+            <a:r>
+              <a:rPr lang="en-US" dirty="0"/>
+              <a:t>C</a:t>
+            </a:r>
+          </a:p>
+        </p:txBody>
+      </p:sp>
+      <p:sp>
+        <p:nvSpPr>
+          <p:cNvPr id="3" name="Content Placeholder 2">
+            <a:extLst>
+              <a:ext uri="{FF2B5EF4-FFF2-40B4-BE49-F238E27FC236}">
+                <a16:creationId xmlns:a16="http://schemas.microsoft.com/office/drawing/2014/main" id="{39924E4C-1E34-BF88-6F77-9D205A10E3E0}"/>
+              </a:ext>
+            </a:extLst>
+          </p:cNvPr>
+          <p:cNvSpPr>
+            <a:spLocks noGrp="1"/>
+          </p:cNvSpPr>
+          <p:nvPr>
+            <p:ph idx="1"/>
+          </p:nvPr>
+        </p:nvSpPr>
+        <p:spPr/>
+        <p:txBody>
+          <a:bodyPr>
+            <a:normAutofit fontScale="92500" lnSpcReduction="20000"/>
+          </a:bodyPr>
+          <a:lstStyle/>
+          <a:p>
+            <a:r>
+              <a:rPr lang="ru-RU" dirty="0"/>
+              <a:t>Объявление переменной</a:t>
+            </a:r>
+          </a:p>
+          <a:p>
+            <a:pPr lvl="1">
+              <a:lnSpc>
+                <a:spcPts val="1425"/>
+              </a:lnSpc>
+              <a:buNone/>
+            </a:pPr>
+            <a:r>
+              <a:rPr lang="en-US" dirty="0">
+                <a:solidFill>
+                  <a:srgbClr val="0000FF"/>
+                </a:solidFill>
+                <a:latin typeface="Consolas" panose="020B0609020204030204" pitchFamily="49" charset="0"/>
+              </a:rPr>
+              <a:t>int</a:t>
+            </a:r>
+            <a:r>
+              <a:rPr lang="en-US" dirty="0">
+                <a:solidFill>
+                  <a:srgbClr val="000000"/>
+                </a:solidFill>
+                <a:latin typeface="Consolas" panose="020B0609020204030204" pitchFamily="49" charset="0"/>
+              </a:rPr>
+              <a:t> a;</a:t>
+            </a:r>
+          </a:p>
+          <a:p>
+            <a:pPr lvl="1">
+              <a:lnSpc>
+                <a:spcPts val="1425"/>
+              </a:lnSpc>
+              <a:buNone/>
+            </a:pPr>
+            <a:r>
+              <a:rPr lang="en-US" dirty="0">
+                <a:solidFill>
+                  <a:srgbClr val="0000FF"/>
+                </a:solidFill>
+                <a:latin typeface="Consolas" panose="020B0609020204030204" pitchFamily="49" charset="0"/>
+              </a:rPr>
+              <a:t>int</a:t>
+            </a:r>
+            <a:r>
+              <a:rPr lang="en-US" dirty="0">
+                <a:solidFill>
+                  <a:srgbClr val="000000"/>
+                </a:solidFill>
+                <a:latin typeface="Consolas" panose="020B0609020204030204" pitchFamily="49" charset="0"/>
+              </a:rPr>
+              <a:t> b = </a:t>
+            </a:r>
+            <a:r>
+              <a:rPr lang="en-US" dirty="0">
+                <a:solidFill>
+                  <a:srgbClr val="098658"/>
+                </a:solidFill>
+                <a:latin typeface="Consolas" panose="020B0609020204030204" pitchFamily="49" charset="0"/>
+              </a:rPr>
+              <a:t>0</a:t>
+            </a:r>
+            <a:r>
+              <a:rPr lang="en-US" dirty="0">
+                <a:solidFill>
+                  <a:srgbClr val="000000"/>
+                </a:solidFill>
+                <a:latin typeface="Consolas" panose="020B0609020204030204" pitchFamily="49" charset="0"/>
+              </a:rPr>
+              <a:t>;</a:t>
+            </a:r>
+          </a:p>
+          <a:p>
+            <a:pPr lvl="1">
+              <a:lnSpc>
+                <a:spcPts val="1425"/>
+              </a:lnSpc>
+              <a:buNone/>
+            </a:pPr>
+            <a:r>
+              <a:rPr lang="en-US" dirty="0">
+                <a:solidFill>
+                  <a:srgbClr val="0000FF"/>
+                </a:solidFill>
+                <a:latin typeface="Consolas" panose="020B0609020204030204" pitchFamily="49" charset="0"/>
+              </a:rPr>
+              <a:t>int</a:t>
+            </a:r>
+            <a:r>
+              <a:rPr lang="en-US" dirty="0">
+                <a:solidFill>
+                  <a:srgbClr val="000000"/>
+                </a:solidFill>
+                <a:latin typeface="Consolas" panose="020B0609020204030204" pitchFamily="49" charset="0"/>
+              </a:rPr>
+              <a:t> sum = a + b;</a:t>
+            </a:r>
+            <a:endParaRPr lang="ru-RU" dirty="0">
+              <a:latin typeface="Consolas" panose="020B0609020204030204" pitchFamily="49" charset="0"/>
+            </a:endParaRPr>
+          </a:p>
+          <a:p>
+            <a:r>
+              <a:rPr lang="ru-RU" b="1" dirty="0"/>
+              <a:t>Основные правила</a:t>
+            </a:r>
+            <a:endParaRPr lang="ru-RU" dirty="0"/>
+          </a:p>
+          <a:p>
+            <a:pPr lvl="1"/>
+            <a:r>
+              <a:rPr lang="ru-RU" dirty="0"/>
+              <a:t>при объявлении всегда указывается тип</a:t>
+            </a:r>
+          </a:p>
+          <a:p>
+            <a:pPr lvl="1"/>
+            <a:r>
+              <a:rPr lang="ru-RU" dirty="0"/>
+              <a:t>тип переменной фиксирован на всё время её жизни</a:t>
+            </a:r>
+          </a:p>
+          <a:p>
+            <a:pPr lvl="1"/>
+            <a:r>
+              <a:rPr lang="ru-RU" dirty="0"/>
+              <a:t>переменные бывают:</a:t>
+            </a:r>
+          </a:p>
+          <a:p>
+            <a:pPr lvl="2"/>
+            <a:r>
+              <a:rPr lang="ru-RU" dirty="0"/>
+              <a:t>локальные (внутри функции или блока)</a:t>
+            </a:r>
+          </a:p>
+          <a:p>
+            <a:pPr lvl="2"/>
+            <a:r>
+              <a:rPr lang="ru-RU" dirty="0"/>
+              <a:t>глобальные (вне функций)</a:t>
+            </a:r>
+            <a:endParaRPr lang="en-US" dirty="0"/>
+          </a:p>
+          <a:p>
+            <a:r>
+              <a:rPr lang="ru-RU" b="1" dirty="0"/>
+              <a:t>Инициализация</a:t>
+            </a:r>
+            <a:endParaRPr lang="ru-RU" dirty="0"/>
+          </a:p>
+          <a:p>
+            <a:pPr lvl="1"/>
+            <a:r>
+              <a:rPr lang="ru-RU" dirty="0"/>
+              <a:t>локальные переменные по умолчанию </a:t>
+            </a:r>
+            <a:r>
+              <a:rPr lang="ru-RU" b="1" dirty="0"/>
+              <a:t>не инициализируются</a:t>
+            </a:r>
+            <a:endParaRPr lang="ru-RU" dirty="0"/>
+          </a:p>
+          <a:p>
+            <a:pPr lvl="1"/>
+            <a:r>
+              <a:rPr lang="ru-RU" dirty="0"/>
+              <a:t>глобальные переменные инициализируются нулём</a:t>
+            </a:r>
+          </a:p>
+          <a:p>
+            <a:pPr lvl="1"/>
+            <a:r>
+              <a:rPr lang="ru-RU" dirty="0"/>
+              <a:t>рекомендуется инициализировать переменные при объявлении</a:t>
+            </a:r>
+          </a:p>
+        </p:txBody>
+      </p:sp>
+    </p:spTree>
+    <p:extLst>
+      <p:ext uri="{BB962C8B-B14F-4D97-AF65-F5344CB8AC3E}">
+        <p14:creationId xmlns:p14="http://schemas.microsoft.com/office/powerpoint/2010/main" val="2972155484"/>
+      </p:ext>
+    </p:extLst>
+  </p:cSld>
+  <p:clrMapOvr>
+    <a:masterClrMapping/>
+  </p:clrMapOvr>
+</p:sld>
+</file>
+
+<file path=ppt/slides/slide31.xml><?xml version="1.0" encoding="utf-8"?>
+<p:sld xmlns:a="http://schemas.openxmlformats.org/drawingml/2006/main" xmlns:r="http://schemas.openxmlformats.org/officeDocument/2006/relationships" xmlns:p="http://schemas.openxmlformats.org/presentationml/2006/main">
+  <p:cSld>
+    <p:spTree>
+      <p:nvGrpSpPr>
+        <p:cNvPr id="1" name=""/>
+        <p:cNvGrpSpPr/>
+        <p:nvPr/>
+      </p:nvGrpSpPr>
+      <p:grpSpPr>
+        <a:xfrm>
+          <a:off x="0" y="0"/>
+          <a:ext cx="0" cy="0"/>
+          <a:chOff x="0" y="0"/>
+          <a:chExt cx="0" cy="0"/>
+        </a:xfrm>
+      </p:grpSpPr>
+      <p:sp>
+        <p:nvSpPr>
           <p:cNvPr id="3" name="Title 2">
             <a:extLst>
               <a:ext uri="{FF2B5EF4-FFF2-40B4-BE49-F238E27FC236}">
@@ -25791,7 +27856,7 @@
 </p:sld>
 </file>
 
-<file path=ppt/slides/slide31.xml><?xml version="1.0" encoding="utf-8"?>
+<file path=ppt/slides/slide32.xml><?xml version="1.0" encoding="utf-8"?>
 <p:sld xmlns:a="http://schemas.openxmlformats.org/drawingml/2006/main" xmlns:r="http://schemas.openxmlformats.org/officeDocument/2006/relationships" xmlns:p="http://schemas.openxmlformats.org/presentationml/2006/main">
   <p:cSld>
     <p:spTree>
@@ -25973,7 +28038,7 @@
 </p:sld>
 </file>
 
-<file path=ppt/slides/slide32.xml><?xml version="1.0" encoding="utf-8"?>
+<file path=ppt/slides/slide33.xml><?xml version="1.0" encoding="utf-8"?>
 <p:sld xmlns:a="http://schemas.openxmlformats.org/drawingml/2006/main" xmlns:r="http://schemas.openxmlformats.org/officeDocument/2006/relationships" xmlns:p="http://schemas.openxmlformats.org/presentationml/2006/main">
   <p:cSld>
     <p:spTree>
@@ -26195,7 +28260,37 @@
                       <a:rPr lang="en-US" b="0" i="1" smtClean="0">
                         <a:latin typeface="Cambria Math" panose="02040503050406030204" pitchFamily="18" charset="0"/>
                       </a:rPr>
-                      <m:t>=16+13=29</m:t>
+                      <m:t>=</m:t>
+                    </m:r>
+                    <m:r>
+                      <a:rPr lang="en-US" b="0" i="1" smtClean="0">
+                        <a:latin typeface="Cambria Math" panose="02040503050406030204" pitchFamily="18" charset="0"/>
+                      </a:rPr>
+                      <m:t>16</m:t>
+                    </m:r>
+                    <m:r>
+                      <a:rPr lang="en-US" b="0" i="1" smtClean="0">
+                        <a:latin typeface="Cambria Math" panose="02040503050406030204" pitchFamily="18" charset="0"/>
+                      </a:rPr>
+                      <m:t>+</m:t>
+                    </m:r>
+                    <m:r>
+                      <a:rPr lang="en-US" b="0" i="1" smtClean="0">
+                        <a:latin typeface="Cambria Math" panose="02040503050406030204" pitchFamily="18" charset="0"/>
+                      </a:rPr>
+                      <m:t>13</m:t>
+                    </m:r>
+                    <m:r>
+                      <a:rPr lang="en-US" b="0" i="1" smtClean="0">
+                        <a:latin typeface="Cambria Math" panose="02040503050406030204" pitchFamily="18" charset="0"/>
+                      </a:rPr>
+                      <m:t>=</m:t>
+                    </m:r>
+                    <m:r>
+                      <a:rPr lang="en-US" b="0" i="1" smtClean="0">
+                        <a:latin typeface="Cambria Math" panose="02040503050406030204" pitchFamily="18" charset="0"/>
+                      </a:rPr>
+                      <m:t>29</m:t>
                     </m:r>
                   </m:oMath>
                 </a14:m>
@@ -26462,19 +28557,61 @@
                       <a:rPr lang="en-US" b="0" i="1" smtClean="0">
                         <a:latin typeface="Cambria Math" panose="02040503050406030204" pitchFamily="18" charset="0"/>
                       </a:rPr>
-                      <m:t>=8+</m:t>
+                      <m:t>=</m:t>
+                    </m:r>
+                    <m:r>
+                      <a:rPr lang="en-US" b="0" i="1" smtClean="0">
+                        <a:latin typeface="Cambria Math" panose="02040503050406030204" pitchFamily="18" charset="0"/>
+                      </a:rPr>
+                      <m:t>8</m:t>
+                    </m:r>
+                    <m:r>
+                      <a:rPr lang="en-US" b="0" i="1" smtClean="0">
+                        <a:latin typeface="Cambria Math" panose="02040503050406030204" pitchFamily="18" charset="0"/>
+                      </a:rPr>
+                      <m:t>+</m:t>
                     </m:r>
                     <m:r>
                       <a:rPr lang="ru-RU" b="0" i="1" smtClean="0">
                         <a:latin typeface="Cambria Math" panose="02040503050406030204" pitchFamily="18" charset="0"/>
                       </a:rPr>
-                      <m:t>0+</m:t>
+                      <m:t>0</m:t>
+                    </m:r>
+                    <m:r>
+                      <a:rPr lang="ru-RU" b="0" i="1" smtClean="0">
+                        <a:latin typeface="Cambria Math" panose="02040503050406030204" pitchFamily="18" charset="0"/>
+                      </a:rPr>
+                      <m:t>+</m:t>
                     </m:r>
                     <m:r>
                       <a:rPr lang="en-US" b="0" i="1" smtClean="0">
                         <a:latin typeface="Cambria Math" panose="02040503050406030204" pitchFamily="18" charset="0"/>
                       </a:rPr>
-                      <m:t>2+1=11</m:t>
+                      <m:t>2</m:t>
+                    </m:r>
+                    <m:r>
+                      <a:rPr lang="en-US" b="0" i="1" smtClean="0">
+                        <a:latin typeface="Cambria Math" panose="02040503050406030204" pitchFamily="18" charset="0"/>
+                      </a:rPr>
+                      <m:t>+</m:t>
+                    </m:r>
+                    <m:r>
+                      <a:rPr lang="en-US" b="0" i="1" smtClean="0">
+                        <a:latin typeface="Cambria Math" panose="02040503050406030204" pitchFamily="18" charset="0"/>
+                      </a:rPr>
+                      <m:t>1</m:t>
+                    </m:r>
+                    <m:r>
+                      <a:rPr lang="en-US" b="0" i="1" smtClean="0">
+                        <a:latin typeface="Cambria Math" panose="02040503050406030204" pitchFamily="18" charset="0"/>
+                      </a:rPr>
+                      <m:t>=</m:t>
+                    </m:r>
+                    <m:r>
+                      <a:rPr lang="en-US" b="0" i="1" smtClean="0">
+                        <a:latin typeface="Cambria Math" panose="02040503050406030204" pitchFamily="18" charset="0"/>
+                      </a:rPr>
+                      <m:t>11</m:t>
                     </m:r>
                   </m:oMath>
                 </a14:m>
@@ -26678,7 +28815,85 @@
                       <a:rPr lang="en-US" b="0" i="1" smtClean="0">
                         <a:latin typeface="Cambria Math" panose="02040503050406030204" pitchFamily="18" charset="0"/>
                       </a:rPr>
-                      <m:t>=2∗64+8+5=128+13=141</m:t>
+                      <m:t>=</m:t>
+                    </m:r>
+                    <m:r>
+                      <a:rPr lang="en-US" b="0" i="1" smtClean="0">
+                        <a:latin typeface="Cambria Math" panose="02040503050406030204" pitchFamily="18" charset="0"/>
+                      </a:rPr>
+                      <m:t>2</m:t>
+                    </m:r>
+                    <m:r>
+                      <a:rPr lang="en-US" b="0" i="1" smtClean="0">
+                        <a:latin typeface="Cambria Math" panose="02040503050406030204" pitchFamily="18" charset="0"/>
+                      </a:rPr>
+                      <m:t>∗</m:t>
+                    </m:r>
+                    <m:r>
+                      <a:rPr lang="en-US" b="0" i="1" smtClean="0">
+                        <a:latin typeface="Cambria Math" panose="02040503050406030204" pitchFamily="18" charset="0"/>
+                      </a:rPr>
+                      <m:t>64</m:t>
+                    </m:r>
+                    <m:r>
+                      <a:rPr lang="en-US" b="0" i="1" smtClean="0">
+                        <a:latin typeface="Cambria Math" panose="02040503050406030204" pitchFamily="18" charset="0"/>
+                      </a:rPr>
+                      <m:t>+</m:t>
+                    </m:r>
+                    <m:r>
+                      <a:rPr lang="en-US" b="0" i="1" smtClean="0">
+                        <a:latin typeface="Cambria Math" panose="02040503050406030204" pitchFamily="18" charset="0"/>
+                      </a:rPr>
+                      <m:t>8</m:t>
+                    </m:r>
+                    <m:r>
+                      <a:rPr lang="en-US" b="0" i="1" smtClean="0">
+                        <a:latin typeface="Cambria Math" panose="02040503050406030204" pitchFamily="18" charset="0"/>
+                      </a:rPr>
+                      <m:t>+</m:t>
+                    </m:r>
+                    <m:r>
+                      <a:rPr lang="en-US" b="0" i="1" smtClean="0">
+                        <a:latin typeface="Cambria Math" panose="02040503050406030204" pitchFamily="18" charset="0"/>
+                      </a:rPr>
+                      <m:t>5</m:t>
+                    </m:r>
+                    <m:r>
+                      <a:rPr lang="en-US" b="0" i="1" smtClean="0">
+                        <a:latin typeface="Cambria Math" panose="02040503050406030204" pitchFamily="18" charset="0"/>
+                      </a:rPr>
+                      <m:t>=</m:t>
+                    </m:r>
+                    <m:r>
+                      <a:rPr lang="en-US" b="0" i="1" smtClean="0">
+                        <a:latin typeface="Cambria Math" panose="02040503050406030204" pitchFamily="18" charset="0"/>
+                      </a:rPr>
+                      <m:t>128</m:t>
+                    </m:r>
+                    <m:r>
+                      <a:rPr lang="en-US" b="0" i="1" smtClean="0">
+                        <a:latin typeface="Cambria Math" panose="02040503050406030204" pitchFamily="18" charset="0"/>
+                      </a:rPr>
+                      <m:t>+</m:t>
+                    </m:r>
+                    <m:r>
+                      <a:rPr lang="en-US" b="0" i="1" smtClean="0">
+                        <a:latin typeface="Cambria Math" panose="02040503050406030204" pitchFamily="18" charset="0"/>
+                      </a:rPr>
+                      <m:t>13</m:t>
+                    </m:r>
+                    <m:r>
+                      <a:rPr lang="en-US" b="0" i="1" smtClean="0">
+                        <a:latin typeface="Cambria Math" panose="02040503050406030204" pitchFamily="18" charset="0"/>
+                      </a:rPr>
+                      <m:t>=</m:t>
+                    </m:r>
+                    <m:r>
+                      <a:rPr lang="en-US" b="0" i="1" smtClean="0">
+                        <a:latin typeface="Cambria Math" panose="02040503050406030204" pitchFamily="18" charset="0"/>
+                      </a:rPr>
+                      <m:t>141</m:t>
                     </m:r>
                   </m:oMath>
                 </a14:m>
@@ -26699,7 +28914,49 @@
                       <a:rPr lang="en-US" b="0" i="1" smtClean="0">
                         <a:latin typeface="Cambria Math" panose="02040503050406030204" pitchFamily="18" charset="0"/>
                       </a:rPr>
-                      <m:t>59=48+11=3∗</m:t>
+                      <m:t>59</m:t>
+                    </m:r>
+                    <m:r>
+                      <a:rPr lang="en-US" b="0" i="1" smtClean="0">
+                        <a:latin typeface="Cambria Math" panose="02040503050406030204" pitchFamily="18" charset="0"/>
+                      </a:rPr>
+                      <m:t>=</m:t>
+                    </m:r>
+                    <m:r>
+                      <a:rPr lang="en-US" b="0" i="1" smtClean="0">
+                        <a:latin typeface="Cambria Math" panose="02040503050406030204" pitchFamily="18" charset="0"/>
+                      </a:rPr>
+                      <m:t>48</m:t>
+                    </m:r>
+                    <m:r>
+                      <a:rPr lang="en-US" b="0" i="1" smtClean="0">
+                        <a:latin typeface="Cambria Math" panose="02040503050406030204" pitchFamily="18" charset="0"/>
+                      </a:rPr>
+                      <m:t>+</m:t>
+                    </m:r>
+                    <m:r>
+                      <a:rPr lang="en-US" b="0" i="1" smtClean="0">
+                        <a:latin typeface="Cambria Math" panose="02040503050406030204" pitchFamily="18" charset="0"/>
+                      </a:rPr>
+                      <m:t>11</m:t>
+                    </m:r>
+                    <m:r>
+                      <a:rPr lang="en-US" b="0" i="1" smtClean="0">
+                        <a:latin typeface="Cambria Math" panose="02040503050406030204" pitchFamily="18" charset="0"/>
+                      </a:rPr>
+                      <m:t>=</m:t>
+                    </m:r>
+                    <m:r>
+                      <a:rPr lang="en-US" b="0" i="1" smtClean="0">
+                        <a:latin typeface="Cambria Math" panose="02040503050406030204" pitchFamily="18" charset="0"/>
+                      </a:rPr>
+                      <m:t>3</m:t>
+                    </m:r>
+                    <m:r>
+                      <a:rPr lang="en-US" b="0" i="1" smtClean="0">
+                        <a:latin typeface="Cambria Math" panose="02040503050406030204" pitchFamily="18" charset="0"/>
+                      </a:rPr>
+                      <m:t>∗</m:t>
                     </m:r>
                     <m:sSup>
                       <m:sSupPr>
@@ -26730,7 +28987,19 @@
                       <a:rPr lang="en-US" b="0" i="1" smtClean="0">
                         <a:latin typeface="Cambria Math" panose="02040503050406030204" pitchFamily="18" charset="0"/>
                       </a:rPr>
-                      <m:t>+11∗</m:t>
+                      <m:t>+</m:t>
+                    </m:r>
+                    <m:r>
+                      <a:rPr lang="en-US" b="0" i="1" smtClean="0">
+                        <a:latin typeface="Cambria Math" panose="02040503050406030204" pitchFamily="18" charset="0"/>
+                      </a:rPr>
+                      <m:t>11</m:t>
+                    </m:r>
+                    <m:r>
+                      <a:rPr lang="en-US" b="0" i="1" smtClean="0">
+                        <a:latin typeface="Cambria Math" panose="02040503050406030204" pitchFamily="18" charset="0"/>
+                      </a:rPr>
+                      <m:t>∗</m:t>
                     </m:r>
                     <m:sSup>
                       <m:sSupPr>
@@ -26819,7 +29088,61 @@
                       <a:rPr lang="en-US" b="0" i="1" smtClean="0">
                         <a:latin typeface="Cambria Math" panose="02040503050406030204" pitchFamily="18" charset="0"/>
                       </a:rPr>
-                      <m:t>19=16+2+1=1∗</m:t>
+                      <m:t>19</m:t>
+                    </m:r>
+                    <m:r>
+                      <a:rPr lang="en-US" b="0" i="1" smtClean="0">
+                        <a:latin typeface="Cambria Math" panose="02040503050406030204" pitchFamily="18" charset="0"/>
+                      </a:rPr>
+                      <m:t>=</m:t>
+                    </m:r>
+                    <m:r>
+                      <a:rPr lang="en-US" b="0" i="1" smtClean="0">
+                        <a:latin typeface="Cambria Math" panose="02040503050406030204" pitchFamily="18" charset="0"/>
+                      </a:rPr>
+                      <m:t>16</m:t>
+                    </m:r>
+                    <m:r>
+                      <a:rPr lang="en-US" b="0" i="1" smtClean="0">
+                        <a:latin typeface="Cambria Math" panose="02040503050406030204" pitchFamily="18" charset="0"/>
+                      </a:rPr>
+                      <m:t>+</m:t>
+                    </m:r>
+                    <m:r>
+                      <a:rPr lang="en-US" b="0" i="1" smtClean="0">
+                        <a:latin typeface="Cambria Math" panose="02040503050406030204" pitchFamily="18" charset="0"/>
+                      </a:rPr>
+                      <m:t>2</m:t>
+                    </m:r>
+                    <m:r>
+                      <a:rPr lang="en-US" b="0" i="1" smtClean="0">
+                        <a:latin typeface="Cambria Math" panose="02040503050406030204" pitchFamily="18" charset="0"/>
+                      </a:rPr>
+                      <m:t>+</m:t>
+                    </m:r>
+                    <m:r>
+                      <a:rPr lang="en-US" b="0" i="1" smtClean="0">
+                        <a:latin typeface="Cambria Math" panose="02040503050406030204" pitchFamily="18" charset="0"/>
+                      </a:rPr>
+                      <m:t>1</m:t>
+                    </m:r>
+                    <m:r>
+                      <a:rPr lang="en-US" b="0" i="1" smtClean="0">
+                        <a:latin typeface="Cambria Math" panose="02040503050406030204" pitchFamily="18" charset="0"/>
+                      </a:rPr>
+                      <m:t>=</m:t>
+                    </m:r>
+                    <m:r>
+                      <a:rPr lang="en-US" b="0" i="1" smtClean="0">
+                        <a:latin typeface="Cambria Math" panose="02040503050406030204" pitchFamily="18" charset="0"/>
+                      </a:rPr>
+                      <m:t>1</m:t>
+                    </m:r>
+                    <m:r>
+                      <a:rPr lang="en-US" b="0" i="1" smtClean="0">
+                        <a:latin typeface="Cambria Math" panose="02040503050406030204" pitchFamily="18" charset="0"/>
+                      </a:rPr>
+                      <m:t>∗</m:t>
                     </m:r>
                     <m:sSup>
                       <m:sSupPr>
@@ -26850,7 +29173,19 @@
                       <a:rPr lang="en-US" b="0" i="1" smtClean="0">
                         <a:latin typeface="Cambria Math" panose="02040503050406030204" pitchFamily="18" charset="0"/>
                       </a:rPr>
-                      <m:t>+0∗</m:t>
+                      <m:t>+</m:t>
+                    </m:r>
+                    <m:r>
+                      <a:rPr lang="en-US" b="0" i="1" smtClean="0">
+                        <a:latin typeface="Cambria Math" panose="02040503050406030204" pitchFamily="18" charset="0"/>
+                      </a:rPr>
+                      <m:t>0</m:t>
+                    </m:r>
+                    <m:r>
+                      <a:rPr lang="en-US" b="0" i="1" smtClean="0">
+                        <a:latin typeface="Cambria Math" panose="02040503050406030204" pitchFamily="18" charset="0"/>
+                      </a:rPr>
+                      <m:t>∗</m:t>
                     </m:r>
                     <m:sSup>
                       <m:sSupPr>
@@ -26881,7 +29216,19 @@
                       <a:rPr lang="en-US" b="0" i="1" smtClean="0">
                         <a:latin typeface="Cambria Math" panose="02040503050406030204" pitchFamily="18" charset="0"/>
                       </a:rPr>
-                      <m:t>+0∗</m:t>
+                      <m:t>+</m:t>
+                    </m:r>
+                    <m:r>
+                      <a:rPr lang="en-US" b="0" i="1" smtClean="0">
+                        <a:latin typeface="Cambria Math" panose="02040503050406030204" pitchFamily="18" charset="0"/>
+                      </a:rPr>
+                      <m:t>0</m:t>
+                    </m:r>
+                    <m:r>
+                      <a:rPr lang="en-US" b="0" i="1" smtClean="0">
+                        <a:latin typeface="Cambria Math" panose="02040503050406030204" pitchFamily="18" charset="0"/>
+                      </a:rPr>
+                      <m:t>∗</m:t>
                     </m:r>
                     <m:sSup>
                       <m:sSupPr>
@@ -26912,7 +29259,19 @@
                       <a:rPr lang="en-US" b="0" i="1" smtClean="0">
                         <a:latin typeface="Cambria Math" panose="02040503050406030204" pitchFamily="18" charset="0"/>
                       </a:rPr>
-                      <m:t>+1∗</m:t>
+                      <m:t>+</m:t>
+                    </m:r>
+                    <m:r>
+                      <a:rPr lang="en-US" b="0" i="1" smtClean="0">
+                        <a:latin typeface="Cambria Math" panose="02040503050406030204" pitchFamily="18" charset="0"/>
+                      </a:rPr>
+                      <m:t>1</m:t>
+                    </m:r>
+                    <m:r>
+                      <a:rPr lang="en-US" b="0" i="1" smtClean="0">
+                        <a:latin typeface="Cambria Math" panose="02040503050406030204" pitchFamily="18" charset="0"/>
+                      </a:rPr>
+                      <m:t>∗</m:t>
                     </m:r>
                     <m:sSup>
                       <m:sSupPr>
@@ -26943,7 +29302,19 @@
                       <a:rPr lang="en-US" b="0" i="1" smtClean="0">
                         <a:latin typeface="Cambria Math" panose="02040503050406030204" pitchFamily="18" charset="0"/>
                       </a:rPr>
-                      <m:t>+1∗</m:t>
+                      <m:t>+</m:t>
+                    </m:r>
+                    <m:r>
+                      <a:rPr lang="en-US" b="0" i="1" smtClean="0">
+                        <a:latin typeface="Cambria Math" panose="02040503050406030204" pitchFamily="18" charset="0"/>
+                      </a:rPr>
+                      <m:t>1</m:t>
+                    </m:r>
+                    <m:r>
+                      <a:rPr lang="en-US" b="0" i="1" smtClean="0">
+                        <a:latin typeface="Cambria Math" panose="02040503050406030204" pitchFamily="18" charset="0"/>
+                      </a:rPr>
+                      <m:t>∗</m:t>
                     </m:r>
                     <m:sSup>
                       <m:sSupPr>
@@ -27704,7 +30075,7 @@
 </p:sld>
 </file>
 
-<file path=ppt/slides/slide33.xml><?xml version="1.0" encoding="utf-8"?>
+<file path=ppt/slides/slide34.xml><?xml version="1.0" encoding="utf-8"?>
 <p:sld xmlns:a="http://schemas.openxmlformats.org/drawingml/2006/main" xmlns:r="http://schemas.openxmlformats.org/officeDocument/2006/relationships" xmlns:p="http://schemas.openxmlformats.org/presentationml/2006/main">
   <p:cSld>
     <p:spTree>
@@ -28807,7 +31178,7 @@
 </p:sld>
 </file>
 
-<file path=ppt/slides/slide34.xml><?xml version="1.0" encoding="utf-8"?>
+<file path=ppt/slides/slide35.xml><?xml version="1.0" encoding="utf-8"?>
 <p:sld xmlns:a="http://schemas.openxmlformats.org/drawingml/2006/main" xmlns:r="http://schemas.openxmlformats.org/officeDocument/2006/relationships" xmlns:p="http://schemas.openxmlformats.org/presentationml/2006/main">
   <p:cSld>
     <p:spTree>
@@ -29013,7 +31384,7 @@
 </p:sld>
 </file>
 
-<file path=ppt/slides/slide35.xml><?xml version="1.0" encoding="utf-8"?>
+<file path=ppt/slides/slide36.xml><?xml version="1.0" encoding="utf-8"?>
 <p:sld xmlns:a="http://schemas.openxmlformats.org/drawingml/2006/main" xmlns:r="http://schemas.openxmlformats.org/officeDocument/2006/relationships" xmlns:p="http://schemas.openxmlformats.org/presentationml/2006/main">
   <p:cSld>
     <p:spTree>
@@ -29659,7 +32030,7 @@
 </p:sld>
 </file>
 
-<file path=ppt/slides/slide36.xml><?xml version="1.0" encoding="utf-8"?>
+<file path=ppt/slides/slide37.xml><?xml version="1.0" encoding="utf-8"?>
 <p:sld xmlns:a="http://schemas.openxmlformats.org/drawingml/2006/main" xmlns:r="http://schemas.openxmlformats.org/officeDocument/2006/relationships" xmlns:p="http://schemas.openxmlformats.org/presentationml/2006/main">
   <p:cSld>
     <p:spTree>
@@ -29898,7 +32269,7 @@
 </p:sld>
 </file>
 
-<file path=ppt/slides/slide37.xml><?xml version="1.0" encoding="utf-8"?>
+<file path=ppt/slides/slide38.xml><?xml version="1.0" encoding="utf-8"?>
 <p:sld xmlns:a="http://schemas.openxmlformats.org/drawingml/2006/main" xmlns:r="http://schemas.openxmlformats.org/officeDocument/2006/relationships" xmlns:p="http://schemas.openxmlformats.org/presentationml/2006/main">
   <p:cSld>
     <p:spTree>
@@ -30269,7 +32640,7 @@
 </p:sld>
 </file>
 
-<file path=ppt/slides/slide38.xml><?xml version="1.0" encoding="utf-8"?>
+<file path=ppt/slides/slide39.xml><?xml version="1.0" encoding="utf-8"?>
 <p:sld xmlns:a="http://schemas.openxmlformats.org/drawingml/2006/main" xmlns:r="http://schemas.openxmlformats.org/officeDocument/2006/relationships" xmlns:p="http://schemas.openxmlformats.org/presentationml/2006/main">
   <p:cSld>
     <p:spTree>
@@ -30682,459 +33053,6 @@
     <p:extLst>
       <p:ext uri="{BB962C8B-B14F-4D97-AF65-F5344CB8AC3E}">
         <p14:creationId xmlns:p14="http://schemas.microsoft.com/office/powerpoint/2010/main" val="1025773341"/>
-      </p:ext>
-    </p:extLst>
-  </p:cSld>
-  <p:clrMapOvr>
-    <a:masterClrMapping/>
-  </p:clrMapOvr>
-</p:sld>
-</file>
-
-<file path=ppt/slides/slide39.xml><?xml version="1.0" encoding="utf-8"?>
-<p:sld xmlns:a="http://schemas.openxmlformats.org/drawingml/2006/main" xmlns:r="http://schemas.openxmlformats.org/officeDocument/2006/relationships" xmlns:p="http://schemas.openxmlformats.org/presentationml/2006/main">
-  <p:cSld>
-    <p:spTree>
-      <p:nvGrpSpPr>
-        <p:cNvPr id="1" name=""/>
-        <p:cNvGrpSpPr/>
-        <p:nvPr/>
-      </p:nvGrpSpPr>
-      <p:grpSpPr>
-        <a:xfrm>
-          <a:off x="0" y="0"/>
-          <a:ext cx="0" cy="0"/>
-          <a:chOff x="0" y="0"/>
-          <a:chExt cx="0" cy="0"/>
-        </a:xfrm>
-      </p:grpSpPr>
-      <p:sp>
-        <p:nvSpPr>
-          <p:cNvPr id="2" name="Title 1">
-            <a:extLst>
-              <a:ext uri="{FF2B5EF4-FFF2-40B4-BE49-F238E27FC236}">
-                <a16:creationId xmlns:a16="http://schemas.microsoft.com/office/drawing/2014/main" id="{A4C6F0EE-EB05-8BF6-E4CF-7286C6442CEB}"/>
-              </a:ext>
-            </a:extLst>
-          </p:cNvPr>
-          <p:cNvSpPr>
-            <a:spLocks noGrp="1"/>
-          </p:cNvSpPr>
-          <p:nvPr>
-            <p:ph type="title"/>
-          </p:nvPr>
-        </p:nvSpPr>
-        <p:spPr/>
-        <p:txBody>
-          <a:bodyPr/>
-          <a:lstStyle/>
-          <a:p>
-            <a:r>
-              <a:rPr lang="ru-RU" dirty="0"/>
-              <a:t>Операции сравнения и логические операции</a:t>
-            </a:r>
-            <a:endParaRPr lang="en-US" dirty="0"/>
-          </a:p>
-        </p:txBody>
-      </p:sp>
-      <p:sp>
-        <p:nvSpPr>
-          <p:cNvPr id="3" name="Content Placeholder 2">
-            <a:extLst>
-              <a:ext uri="{FF2B5EF4-FFF2-40B4-BE49-F238E27FC236}">
-                <a16:creationId xmlns:a16="http://schemas.microsoft.com/office/drawing/2014/main" id="{121DDD38-D546-5A8A-20C4-A05E3A40379E}"/>
-              </a:ext>
-            </a:extLst>
-          </p:cNvPr>
-          <p:cNvSpPr>
-            <a:spLocks noGrp="1"/>
-          </p:cNvSpPr>
-          <p:nvPr>
-            <p:ph sz="half" idx="1"/>
-          </p:nvPr>
-        </p:nvSpPr>
-        <p:spPr/>
-        <p:txBody>
-          <a:bodyPr>
-            <a:normAutofit lnSpcReduction="10000"/>
-          </a:bodyPr>
-          <a:lstStyle/>
-          <a:p>
-            <a:r>
-              <a:rPr lang="ru-RU" dirty="0"/>
-              <a:t>Операции сравнения</a:t>
-            </a:r>
-          </a:p>
-          <a:p>
-            <a:pPr lvl="1"/>
-            <a:r>
-              <a:rPr lang="ru-RU" dirty="0"/>
-              <a:t>Равно: ==</a:t>
-            </a:r>
-          </a:p>
-          <a:p>
-            <a:pPr lvl="1"/>
-            <a:r>
-              <a:rPr lang="ru-RU" dirty="0"/>
-              <a:t>Не равно: !=</a:t>
-            </a:r>
-          </a:p>
-          <a:p>
-            <a:pPr lvl="1"/>
-            <a:r>
-              <a:rPr lang="ru-RU" dirty="0"/>
-              <a:t>Меньше: </a:t>
-            </a:r>
-            <a:r>
-              <a:rPr lang="en-US" dirty="0"/>
-              <a:t>&lt;</a:t>
-            </a:r>
-            <a:endParaRPr lang="ru-RU" dirty="0"/>
-          </a:p>
-          <a:p>
-            <a:pPr lvl="1"/>
-            <a:r>
-              <a:rPr lang="ru-RU" dirty="0"/>
-              <a:t>Больше:</a:t>
-            </a:r>
-            <a:r>
-              <a:rPr lang="en-US" dirty="0"/>
-              <a:t> &gt;</a:t>
-            </a:r>
-            <a:endParaRPr lang="ru-RU" dirty="0"/>
-          </a:p>
-          <a:p>
-            <a:pPr lvl="1"/>
-            <a:r>
-              <a:rPr lang="ru-RU" dirty="0"/>
-              <a:t>Меньше или равно:</a:t>
-            </a:r>
-            <a:r>
-              <a:rPr lang="en-US" dirty="0"/>
-              <a:t> &lt;=</a:t>
-            </a:r>
-            <a:endParaRPr lang="ru-RU" dirty="0"/>
-          </a:p>
-          <a:p>
-            <a:pPr lvl="1"/>
-            <a:r>
-              <a:rPr lang="ru-RU" dirty="0"/>
-              <a:t>Больше или равно:</a:t>
-            </a:r>
-            <a:r>
-              <a:rPr lang="en-US" dirty="0"/>
-              <a:t> &gt;=</a:t>
-            </a:r>
-            <a:endParaRPr lang="ru-RU" dirty="0"/>
-          </a:p>
-          <a:p>
-            <a:pPr lvl="1"/>
-            <a:endParaRPr lang="en-US" dirty="0"/>
-          </a:p>
-        </p:txBody>
-      </p:sp>
-      <p:sp>
-        <p:nvSpPr>
-          <p:cNvPr id="4" name="Content Placeholder 3">
-            <a:extLst>
-              <a:ext uri="{FF2B5EF4-FFF2-40B4-BE49-F238E27FC236}">
-                <a16:creationId xmlns:a16="http://schemas.microsoft.com/office/drawing/2014/main" id="{6F5F1F0B-C01F-755D-4C21-4E362AB05E0F}"/>
-              </a:ext>
-            </a:extLst>
-          </p:cNvPr>
-          <p:cNvSpPr>
-            <a:spLocks noGrp="1"/>
-          </p:cNvSpPr>
-          <p:nvPr>
-            <p:ph sz="half" idx="2"/>
-          </p:nvPr>
-        </p:nvSpPr>
-        <p:spPr/>
-        <p:txBody>
-          <a:bodyPr>
-            <a:normAutofit lnSpcReduction="10000"/>
-          </a:bodyPr>
-          <a:lstStyle/>
-          <a:p>
-            <a:r>
-              <a:rPr lang="ru-RU" dirty="0"/>
-              <a:t>Логические операции</a:t>
-            </a:r>
-            <a:endParaRPr lang="en-US" dirty="0"/>
-          </a:p>
-          <a:p>
-            <a:pPr lvl="1"/>
-            <a:r>
-              <a:rPr lang="ru-RU" dirty="0"/>
-              <a:t>логическое И</a:t>
-            </a:r>
-            <a:r>
-              <a:rPr lang="en-US" dirty="0"/>
-              <a:t>:</a:t>
-            </a:r>
-            <a:r>
-              <a:rPr lang="ru-RU" dirty="0"/>
-              <a:t> &amp;&amp;</a:t>
-            </a:r>
-            <a:endParaRPr lang="en-US" dirty="0"/>
-          </a:p>
-          <a:p>
-            <a:pPr lvl="1"/>
-            <a:r>
-              <a:rPr lang="ru-RU" dirty="0"/>
-              <a:t>логическое ИЛИ</a:t>
-            </a:r>
-            <a:r>
-              <a:rPr lang="en-US" dirty="0"/>
-              <a:t>: ||</a:t>
-            </a:r>
-          </a:p>
-          <a:p>
-            <a:pPr lvl="1"/>
-            <a:r>
-              <a:rPr lang="ru-RU" dirty="0"/>
-              <a:t>логическое НЕ</a:t>
-            </a:r>
-            <a:r>
-              <a:rPr lang="en-US" dirty="0"/>
-              <a:t>: !</a:t>
-            </a:r>
-            <a:endParaRPr lang="ru-RU" dirty="0"/>
-          </a:p>
-          <a:p>
-            <a:r>
-              <a:rPr lang="ru-RU" dirty="0"/>
-              <a:t>Короткое замыкание</a:t>
-            </a:r>
-          </a:p>
-          <a:p>
-            <a:pPr lvl="1"/>
-            <a:r>
-              <a:rPr lang="ru-RU" dirty="0"/>
-              <a:t>Вычисления операторов </a:t>
-            </a:r>
-            <a:r>
-              <a:rPr lang="en-US" dirty="0"/>
-              <a:t>&amp;&amp; </a:t>
-            </a:r>
-            <a:r>
-              <a:rPr lang="ru-RU" dirty="0"/>
-              <a:t>и </a:t>
-            </a:r>
-            <a:r>
-              <a:rPr lang="en-US" dirty="0"/>
-              <a:t>|| </a:t>
-            </a:r>
-            <a:r>
-              <a:rPr lang="ru-RU" dirty="0"/>
-              <a:t>прекращаются как только станет известна истинность или ложность результата</a:t>
-            </a:r>
-          </a:p>
-          <a:p>
-            <a:pPr lvl="2"/>
-            <a:r>
-              <a:rPr lang="ru-RU" dirty="0"/>
-              <a:t>Сначала вычисляется левый аргумент, а правый – только при необходимости</a:t>
-            </a:r>
-          </a:p>
-          <a:p>
-            <a:endParaRPr lang="en-US" dirty="0"/>
-          </a:p>
-        </p:txBody>
-      </p:sp>
-      <p:sp>
-        <p:nvSpPr>
-          <p:cNvPr id="8" name="TextBox 7">
-            <a:extLst>
-              <a:ext uri="{FF2B5EF4-FFF2-40B4-BE49-F238E27FC236}">
-                <a16:creationId xmlns:a16="http://schemas.microsoft.com/office/drawing/2014/main" id="{1F60CD7A-56B7-4654-5FBA-954883D99AA7}"/>
-              </a:ext>
-            </a:extLst>
-          </p:cNvPr>
-          <p:cNvSpPr txBox="1"/>
-          <p:nvPr/>
-        </p:nvSpPr>
-        <p:spPr>
-          <a:xfrm>
-            <a:off x="838200" y="5111571"/>
-            <a:ext cx="4631871" cy="1200329"/>
-          </a:xfrm>
-          <a:prstGeom prst="rect">
-            <a:avLst/>
-          </a:prstGeom>
-          <a:noFill/>
-        </p:spPr>
-        <p:txBody>
-          <a:bodyPr wrap="square">
-            <a:spAutoFit/>
-          </a:bodyPr>
-          <a:lstStyle/>
-          <a:p>
-            <a:pPr>
-              <a:buNone/>
-            </a:pPr>
-            <a:r>
-              <a:rPr lang="ru-RU" b="0" dirty="0" err="1">
-                <a:solidFill>
-                  <a:srgbClr val="8F08C4"/>
-                </a:solidFill>
-                <a:effectLst/>
-                <a:latin typeface="Consolas" panose="020B0609020204030204" pitchFamily="49" charset="0"/>
-              </a:rPr>
-              <a:t>if</a:t>
-            </a:r>
-            <a:r>
-              <a:rPr lang="ru-RU" b="0" dirty="0">
-                <a:solidFill>
-                  <a:srgbClr val="000000"/>
-                </a:solidFill>
-                <a:effectLst/>
-                <a:latin typeface="Consolas" panose="020B0609020204030204" pitchFamily="49" charset="0"/>
-              </a:rPr>
-              <a:t> (a &gt; b &amp;&amp; b != </a:t>
-            </a:r>
-            <a:r>
-              <a:rPr lang="ru-RU" b="0" dirty="0">
-                <a:solidFill>
-                  <a:srgbClr val="098658"/>
-                </a:solidFill>
-                <a:effectLst/>
-                <a:latin typeface="Consolas" panose="020B0609020204030204" pitchFamily="49" charset="0"/>
-              </a:rPr>
-              <a:t>0</a:t>
-            </a:r>
-            <a:r>
-              <a:rPr lang="ru-RU" b="0" dirty="0">
-                <a:solidFill>
-                  <a:srgbClr val="000000"/>
-                </a:solidFill>
-                <a:effectLst/>
-                <a:latin typeface="Consolas" panose="020B0609020204030204" pitchFamily="49" charset="0"/>
-              </a:rPr>
-              <a:t>)</a:t>
-            </a:r>
-          </a:p>
-          <a:p>
-            <a:pPr>
-              <a:buNone/>
-            </a:pPr>
-            <a:r>
-              <a:rPr lang="ru-RU" b="0" dirty="0">
-                <a:solidFill>
-                  <a:srgbClr val="000000"/>
-                </a:solidFill>
-                <a:effectLst/>
-                <a:latin typeface="Consolas" panose="020B0609020204030204" pitchFamily="49" charset="0"/>
-              </a:rPr>
-              <a:t>{</a:t>
-            </a:r>
-          </a:p>
-          <a:p>
-            <a:pPr>
-              <a:buNone/>
-            </a:pPr>
-            <a:r>
-              <a:rPr lang="ru-RU" b="0" dirty="0">
-                <a:solidFill>
-                  <a:srgbClr val="000000"/>
-                </a:solidFill>
-                <a:effectLst/>
-                <a:latin typeface="Consolas" panose="020B0609020204030204" pitchFamily="49" charset="0"/>
-              </a:rPr>
-              <a:t>    </a:t>
-            </a:r>
-            <a:r>
-              <a:rPr lang="ru-RU" b="0" dirty="0" err="1">
-                <a:solidFill>
-                  <a:srgbClr val="74531F"/>
-                </a:solidFill>
-                <a:effectLst/>
-                <a:latin typeface="Consolas" panose="020B0609020204030204" pitchFamily="49" charset="0"/>
-              </a:rPr>
-              <a:t>printf</a:t>
-            </a:r>
-            <a:r>
-              <a:rPr lang="ru-RU" b="0" dirty="0">
-                <a:solidFill>
-                  <a:srgbClr val="000000"/>
-                </a:solidFill>
-                <a:effectLst/>
-                <a:latin typeface="Consolas" panose="020B0609020204030204" pitchFamily="49" charset="0"/>
-              </a:rPr>
-              <a:t>(</a:t>
-            </a:r>
-            <a:r>
-              <a:rPr lang="ru-RU" b="0" dirty="0">
-                <a:solidFill>
-                  <a:srgbClr val="E21F1F"/>
-                </a:solidFill>
-                <a:effectLst/>
-                <a:latin typeface="Consolas" panose="020B0609020204030204" pitchFamily="49" charset="0"/>
-              </a:rPr>
-              <a:t>"</a:t>
-            </a:r>
-            <a:r>
-              <a:rPr lang="ru-RU" b="0" dirty="0">
-                <a:solidFill>
-                  <a:srgbClr val="A31515"/>
-                </a:solidFill>
-                <a:effectLst/>
-                <a:latin typeface="Consolas" panose="020B0609020204030204" pitchFamily="49" charset="0"/>
-              </a:rPr>
-              <a:t>Условие выполнено</a:t>
-            </a:r>
-            <a:r>
-              <a:rPr lang="ru-RU" b="0" dirty="0">
-                <a:solidFill>
-                  <a:srgbClr val="B776FB"/>
-                </a:solidFill>
-                <a:effectLst/>
-                <a:latin typeface="Consolas" panose="020B0609020204030204" pitchFamily="49" charset="0"/>
-              </a:rPr>
-              <a:t>\n</a:t>
-            </a:r>
-            <a:r>
-              <a:rPr lang="ru-RU" b="0" dirty="0">
-                <a:solidFill>
-                  <a:srgbClr val="E21F1F"/>
-                </a:solidFill>
-                <a:effectLst/>
-                <a:latin typeface="Consolas" panose="020B0609020204030204" pitchFamily="49" charset="0"/>
-              </a:rPr>
-              <a:t>"</a:t>
-            </a:r>
-            <a:r>
-              <a:rPr lang="ru-RU" b="0" dirty="0">
-                <a:solidFill>
-                  <a:srgbClr val="000000"/>
-                </a:solidFill>
-                <a:effectLst/>
-                <a:latin typeface="Consolas" panose="020B0609020204030204" pitchFamily="49" charset="0"/>
-              </a:rPr>
-              <a:t>);</a:t>
-            </a:r>
-          </a:p>
-          <a:p>
-            <a:pPr>
-              <a:buNone/>
-            </a:pPr>
-            <a:r>
-              <a:rPr lang="ru-RU" b="0" dirty="0">
-                <a:solidFill>
-                  <a:srgbClr val="000000"/>
-                </a:solidFill>
-                <a:effectLst/>
-                <a:latin typeface="Consolas" panose="020B0609020204030204" pitchFamily="49" charset="0"/>
-              </a:rPr>
-              <a:t>}</a:t>
-            </a:r>
-          </a:p>
-        </p:txBody>
-      </p:sp>
-    </p:spTree>
-    <p:extLst>
-      <p:ext uri="{BB962C8B-B14F-4D97-AF65-F5344CB8AC3E}">
-        <p14:creationId xmlns:p14="http://schemas.microsoft.com/office/powerpoint/2010/main" val="3628272676"/>
       </p:ext>
     </p:extLst>
   </p:cSld>
@@ -31247,6 +33165,459 @@
       </p:grpSpPr>
       <p:sp>
         <p:nvSpPr>
+          <p:cNvPr id="2" name="Title 1">
+            <a:extLst>
+              <a:ext uri="{FF2B5EF4-FFF2-40B4-BE49-F238E27FC236}">
+                <a16:creationId xmlns:a16="http://schemas.microsoft.com/office/drawing/2014/main" id="{A4C6F0EE-EB05-8BF6-E4CF-7286C6442CEB}"/>
+              </a:ext>
+            </a:extLst>
+          </p:cNvPr>
+          <p:cNvSpPr>
+            <a:spLocks noGrp="1"/>
+          </p:cNvSpPr>
+          <p:nvPr>
+            <p:ph type="title"/>
+          </p:nvPr>
+        </p:nvSpPr>
+        <p:spPr/>
+        <p:txBody>
+          <a:bodyPr/>
+          <a:lstStyle/>
+          <a:p>
+            <a:r>
+              <a:rPr lang="ru-RU" dirty="0"/>
+              <a:t>Операции сравнения и логические операции</a:t>
+            </a:r>
+            <a:endParaRPr lang="en-US" dirty="0"/>
+          </a:p>
+        </p:txBody>
+      </p:sp>
+      <p:sp>
+        <p:nvSpPr>
+          <p:cNvPr id="3" name="Content Placeholder 2">
+            <a:extLst>
+              <a:ext uri="{FF2B5EF4-FFF2-40B4-BE49-F238E27FC236}">
+                <a16:creationId xmlns:a16="http://schemas.microsoft.com/office/drawing/2014/main" id="{121DDD38-D546-5A8A-20C4-A05E3A40379E}"/>
+              </a:ext>
+            </a:extLst>
+          </p:cNvPr>
+          <p:cNvSpPr>
+            <a:spLocks noGrp="1"/>
+          </p:cNvSpPr>
+          <p:nvPr>
+            <p:ph sz="half" idx="1"/>
+          </p:nvPr>
+        </p:nvSpPr>
+        <p:spPr/>
+        <p:txBody>
+          <a:bodyPr>
+            <a:normAutofit lnSpcReduction="10000"/>
+          </a:bodyPr>
+          <a:lstStyle/>
+          <a:p>
+            <a:r>
+              <a:rPr lang="ru-RU" dirty="0"/>
+              <a:t>Операции сравнения</a:t>
+            </a:r>
+          </a:p>
+          <a:p>
+            <a:pPr lvl="1"/>
+            <a:r>
+              <a:rPr lang="ru-RU" dirty="0"/>
+              <a:t>Равно: ==</a:t>
+            </a:r>
+          </a:p>
+          <a:p>
+            <a:pPr lvl="1"/>
+            <a:r>
+              <a:rPr lang="ru-RU" dirty="0"/>
+              <a:t>Не равно: !=</a:t>
+            </a:r>
+          </a:p>
+          <a:p>
+            <a:pPr lvl="1"/>
+            <a:r>
+              <a:rPr lang="ru-RU" dirty="0"/>
+              <a:t>Меньше: </a:t>
+            </a:r>
+            <a:r>
+              <a:rPr lang="en-US" dirty="0"/>
+              <a:t>&lt;</a:t>
+            </a:r>
+            <a:endParaRPr lang="ru-RU" dirty="0"/>
+          </a:p>
+          <a:p>
+            <a:pPr lvl="1"/>
+            <a:r>
+              <a:rPr lang="ru-RU" dirty="0"/>
+              <a:t>Больше:</a:t>
+            </a:r>
+            <a:r>
+              <a:rPr lang="en-US" dirty="0"/>
+              <a:t> &gt;</a:t>
+            </a:r>
+            <a:endParaRPr lang="ru-RU" dirty="0"/>
+          </a:p>
+          <a:p>
+            <a:pPr lvl="1"/>
+            <a:r>
+              <a:rPr lang="ru-RU" dirty="0"/>
+              <a:t>Меньше или равно:</a:t>
+            </a:r>
+            <a:r>
+              <a:rPr lang="en-US" dirty="0"/>
+              <a:t> &lt;=</a:t>
+            </a:r>
+            <a:endParaRPr lang="ru-RU" dirty="0"/>
+          </a:p>
+          <a:p>
+            <a:pPr lvl="1"/>
+            <a:r>
+              <a:rPr lang="ru-RU" dirty="0"/>
+              <a:t>Больше или равно:</a:t>
+            </a:r>
+            <a:r>
+              <a:rPr lang="en-US" dirty="0"/>
+              <a:t> &gt;=</a:t>
+            </a:r>
+            <a:endParaRPr lang="ru-RU" dirty="0"/>
+          </a:p>
+          <a:p>
+            <a:pPr lvl="1"/>
+            <a:endParaRPr lang="en-US" dirty="0"/>
+          </a:p>
+        </p:txBody>
+      </p:sp>
+      <p:sp>
+        <p:nvSpPr>
+          <p:cNvPr id="4" name="Content Placeholder 3">
+            <a:extLst>
+              <a:ext uri="{FF2B5EF4-FFF2-40B4-BE49-F238E27FC236}">
+                <a16:creationId xmlns:a16="http://schemas.microsoft.com/office/drawing/2014/main" id="{6F5F1F0B-C01F-755D-4C21-4E362AB05E0F}"/>
+              </a:ext>
+            </a:extLst>
+          </p:cNvPr>
+          <p:cNvSpPr>
+            <a:spLocks noGrp="1"/>
+          </p:cNvSpPr>
+          <p:nvPr>
+            <p:ph sz="half" idx="2"/>
+          </p:nvPr>
+        </p:nvSpPr>
+        <p:spPr/>
+        <p:txBody>
+          <a:bodyPr>
+            <a:normAutofit lnSpcReduction="10000"/>
+          </a:bodyPr>
+          <a:lstStyle/>
+          <a:p>
+            <a:r>
+              <a:rPr lang="ru-RU" dirty="0"/>
+              <a:t>Логические операции</a:t>
+            </a:r>
+            <a:endParaRPr lang="en-US" dirty="0"/>
+          </a:p>
+          <a:p>
+            <a:pPr lvl="1"/>
+            <a:r>
+              <a:rPr lang="ru-RU" dirty="0"/>
+              <a:t>логическое И</a:t>
+            </a:r>
+            <a:r>
+              <a:rPr lang="en-US" dirty="0"/>
+              <a:t>:</a:t>
+            </a:r>
+            <a:r>
+              <a:rPr lang="ru-RU" dirty="0"/>
+              <a:t> &amp;&amp;</a:t>
+            </a:r>
+            <a:endParaRPr lang="en-US" dirty="0"/>
+          </a:p>
+          <a:p>
+            <a:pPr lvl="1"/>
+            <a:r>
+              <a:rPr lang="ru-RU" dirty="0"/>
+              <a:t>логическое ИЛИ</a:t>
+            </a:r>
+            <a:r>
+              <a:rPr lang="en-US" dirty="0"/>
+              <a:t>: ||</a:t>
+            </a:r>
+          </a:p>
+          <a:p>
+            <a:pPr lvl="1"/>
+            <a:r>
+              <a:rPr lang="ru-RU" dirty="0"/>
+              <a:t>логическое НЕ</a:t>
+            </a:r>
+            <a:r>
+              <a:rPr lang="en-US" dirty="0"/>
+              <a:t>: !</a:t>
+            </a:r>
+            <a:endParaRPr lang="ru-RU" dirty="0"/>
+          </a:p>
+          <a:p>
+            <a:r>
+              <a:rPr lang="ru-RU" dirty="0"/>
+              <a:t>Короткое замыкание</a:t>
+            </a:r>
+          </a:p>
+          <a:p>
+            <a:pPr lvl="1"/>
+            <a:r>
+              <a:rPr lang="ru-RU" dirty="0"/>
+              <a:t>Вычисления операторов </a:t>
+            </a:r>
+            <a:r>
+              <a:rPr lang="en-US" dirty="0"/>
+              <a:t>&amp;&amp; </a:t>
+            </a:r>
+            <a:r>
+              <a:rPr lang="ru-RU" dirty="0"/>
+              <a:t>и </a:t>
+            </a:r>
+            <a:r>
+              <a:rPr lang="en-US" dirty="0"/>
+              <a:t>|| </a:t>
+            </a:r>
+            <a:r>
+              <a:rPr lang="ru-RU" dirty="0"/>
+              <a:t>прекращаются как только станет известна истинность или ложность результата</a:t>
+            </a:r>
+          </a:p>
+          <a:p>
+            <a:pPr lvl="2"/>
+            <a:r>
+              <a:rPr lang="ru-RU" dirty="0"/>
+              <a:t>Сначала вычисляется левый аргумент, а правый – только при необходимости</a:t>
+            </a:r>
+          </a:p>
+          <a:p>
+            <a:endParaRPr lang="en-US" dirty="0"/>
+          </a:p>
+        </p:txBody>
+      </p:sp>
+      <p:sp>
+        <p:nvSpPr>
+          <p:cNvPr id="8" name="TextBox 7">
+            <a:extLst>
+              <a:ext uri="{FF2B5EF4-FFF2-40B4-BE49-F238E27FC236}">
+                <a16:creationId xmlns:a16="http://schemas.microsoft.com/office/drawing/2014/main" id="{1F60CD7A-56B7-4654-5FBA-954883D99AA7}"/>
+              </a:ext>
+            </a:extLst>
+          </p:cNvPr>
+          <p:cNvSpPr txBox="1"/>
+          <p:nvPr/>
+        </p:nvSpPr>
+        <p:spPr>
+          <a:xfrm>
+            <a:off x="838200" y="5111571"/>
+            <a:ext cx="4631871" cy="1200329"/>
+          </a:xfrm>
+          <a:prstGeom prst="rect">
+            <a:avLst/>
+          </a:prstGeom>
+          <a:noFill/>
+        </p:spPr>
+        <p:txBody>
+          <a:bodyPr wrap="square">
+            <a:spAutoFit/>
+          </a:bodyPr>
+          <a:lstStyle/>
+          <a:p>
+            <a:pPr>
+              <a:buNone/>
+            </a:pPr>
+            <a:r>
+              <a:rPr lang="ru-RU" b="0" dirty="0" err="1">
+                <a:solidFill>
+                  <a:srgbClr val="8F08C4"/>
+                </a:solidFill>
+                <a:effectLst/>
+                <a:latin typeface="Consolas" panose="020B0609020204030204" pitchFamily="49" charset="0"/>
+              </a:rPr>
+              <a:t>if</a:t>
+            </a:r>
+            <a:r>
+              <a:rPr lang="ru-RU" b="0" dirty="0">
+                <a:solidFill>
+                  <a:srgbClr val="000000"/>
+                </a:solidFill>
+                <a:effectLst/>
+                <a:latin typeface="Consolas" panose="020B0609020204030204" pitchFamily="49" charset="0"/>
+              </a:rPr>
+              <a:t> (a &gt; b &amp;&amp; b != </a:t>
+            </a:r>
+            <a:r>
+              <a:rPr lang="ru-RU" b="0" dirty="0">
+                <a:solidFill>
+                  <a:srgbClr val="098658"/>
+                </a:solidFill>
+                <a:effectLst/>
+                <a:latin typeface="Consolas" panose="020B0609020204030204" pitchFamily="49" charset="0"/>
+              </a:rPr>
+              <a:t>0</a:t>
+            </a:r>
+            <a:r>
+              <a:rPr lang="ru-RU" b="0" dirty="0">
+                <a:solidFill>
+                  <a:srgbClr val="000000"/>
+                </a:solidFill>
+                <a:effectLst/>
+                <a:latin typeface="Consolas" panose="020B0609020204030204" pitchFamily="49" charset="0"/>
+              </a:rPr>
+              <a:t>)</a:t>
+            </a:r>
+          </a:p>
+          <a:p>
+            <a:pPr>
+              <a:buNone/>
+            </a:pPr>
+            <a:r>
+              <a:rPr lang="ru-RU" b="0" dirty="0">
+                <a:solidFill>
+                  <a:srgbClr val="000000"/>
+                </a:solidFill>
+                <a:effectLst/>
+                <a:latin typeface="Consolas" panose="020B0609020204030204" pitchFamily="49" charset="0"/>
+              </a:rPr>
+              <a:t>{</a:t>
+            </a:r>
+          </a:p>
+          <a:p>
+            <a:pPr>
+              <a:buNone/>
+            </a:pPr>
+            <a:r>
+              <a:rPr lang="ru-RU" b="0" dirty="0">
+                <a:solidFill>
+                  <a:srgbClr val="000000"/>
+                </a:solidFill>
+                <a:effectLst/>
+                <a:latin typeface="Consolas" panose="020B0609020204030204" pitchFamily="49" charset="0"/>
+              </a:rPr>
+              <a:t>    </a:t>
+            </a:r>
+            <a:r>
+              <a:rPr lang="ru-RU" b="0" dirty="0" err="1">
+                <a:solidFill>
+                  <a:srgbClr val="74531F"/>
+                </a:solidFill>
+                <a:effectLst/>
+                <a:latin typeface="Consolas" panose="020B0609020204030204" pitchFamily="49" charset="0"/>
+              </a:rPr>
+              <a:t>printf</a:t>
+            </a:r>
+            <a:r>
+              <a:rPr lang="ru-RU" b="0" dirty="0">
+                <a:solidFill>
+                  <a:srgbClr val="000000"/>
+                </a:solidFill>
+                <a:effectLst/>
+                <a:latin typeface="Consolas" panose="020B0609020204030204" pitchFamily="49" charset="0"/>
+              </a:rPr>
+              <a:t>(</a:t>
+            </a:r>
+            <a:r>
+              <a:rPr lang="ru-RU" b="0" dirty="0">
+                <a:solidFill>
+                  <a:srgbClr val="E21F1F"/>
+                </a:solidFill>
+                <a:effectLst/>
+                <a:latin typeface="Consolas" panose="020B0609020204030204" pitchFamily="49" charset="0"/>
+              </a:rPr>
+              <a:t>"</a:t>
+            </a:r>
+            <a:r>
+              <a:rPr lang="ru-RU" b="0" dirty="0">
+                <a:solidFill>
+                  <a:srgbClr val="A31515"/>
+                </a:solidFill>
+                <a:effectLst/>
+                <a:latin typeface="Consolas" panose="020B0609020204030204" pitchFamily="49" charset="0"/>
+              </a:rPr>
+              <a:t>Условие выполнено</a:t>
+            </a:r>
+            <a:r>
+              <a:rPr lang="ru-RU" b="0" dirty="0">
+                <a:solidFill>
+                  <a:srgbClr val="B776FB"/>
+                </a:solidFill>
+                <a:effectLst/>
+                <a:latin typeface="Consolas" panose="020B0609020204030204" pitchFamily="49" charset="0"/>
+              </a:rPr>
+              <a:t>\n</a:t>
+            </a:r>
+            <a:r>
+              <a:rPr lang="ru-RU" b="0" dirty="0">
+                <a:solidFill>
+                  <a:srgbClr val="E21F1F"/>
+                </a:solidFill>
+                <a:effectLst/>
+                <a:latin typeface="Consolas" panose="020B0609020204030204" pitchFamily="49" charset="0"/>
+              </a:rPr>
+              <a:t>"</a:t>
+            </a:r>
+            <a:r>
+              <a:rPr lang="ru-RU" b="0" dirty="0">
+                <a:solidFill>
+                  <a:srgbClr val="000000"/>
+                </a:solidFill>
+                <a:effectLst/>
+                <a:latin typeface="Consolas" panose="020B0609020204030204" pitchFamily="49" charset="0"/>
+              </a:rPr>
+              <a:t>);</a:t>
+            </a:r>
+          </a:p>
+          <a:p>
+            <a:pPr>
+              <a:buNone/>
+            </a:pPr>
+            <a:r>
+              <a:rPr lang="ru-RU" b="0" dirty="0">
+                <a:solidFill>
+                  <a:srgbClr val="000000"/>
+                </a:solidFill>
+                <a:effectLst/>
+                <a:latin typeface="Consolas" panose="020B0609020204030204" pitchFamily="49" charset="0"/>
+              </a:rPr>
+              <a:t>}</a:t>
+            </a:r>
+          </a:p>
+        </p:txBody>
+      </p:sp>
+    </p:spTree>
+    <p:extLst>
+      <p:ext uri="{BB962C8B-B14F-4D97-AF65-F5344CB8AC3E}">
+        <p14:creationId xmlns:p14="http://schemas.microsoft.com/office/powerpoint/2010/main" val="3628272676"/>
+      </p:ext>
+    </p:extLst>
+  </p:cSld>
+  <p:clrMapOvr>
+    <a:masterClrMapping/>
+  </p:clrMapOvr>
+</p:sld>
+</file>
+
+<file path=ppt/slides/slide41.xml><?xml version="1.0" encoding="utf-8"?>
+<p:sld xmlns:a="http://schemas.openxmlformats.org/drawingml/2006/main" xmlns:r="http://schemas.openxmlformats.org/officeDocument/2006/relationships" xmlns:p="http://schemas.openxmlformats.org/presentationml/2006/main">
+  <p:cSld>
+    <p:spTree>
+      <p:nvGrpSpPr>
+        <p:cNvPr id="1" name=""/>
+        <p:cNvGrpSpPr/>
+        <p:nvPr/>
+      </p:nvGrpSpPr>
+      <p:grpSpPr>
+        <a:xfrm>
+          <a:off x="0" y="0"/>
+          <a:ext cx="0" cy="0"/>
+          <a:chOff x="0" y="0"/>
+          <a:chExt cx="0" cy="0"/>
+        </a:xfrm>
+      </p:grpSpPr>
+      <p:sp>
+        <p:nvSpPr>
           <p:cNvPr id="5" name="Title 4">
             <a:extLst>
               <a:ext uri="{FF2B5EF4-FFF2-40B4-BE49-F238E27FC236}">
@@ -31698,7 +34069,7 @@
 </p:sld>
 </file>
 
-<file path=ppt/slides/slide41.xml><?xml version="1.0" encoding="utf-8"?>
+<file path=ppt/slides/slide42.xml><?xml version="1.0" encoding="utf-8"?>
 <p:sld xmlns:a="http://schemas.openxmlformats.org/drawingml/2006/main" xmlns:r="http://schemas.openxmlformats.org/officeDocument/2006/relationships" xmlns:p="http://schemas.openxmlformats.org/presentationml/2006/main">
   <p:cSld>
     <p:spTree>
@@ -32246,7 +34617,7 @@
 </p:sld>
 </file>
 
-<file path=ppt/slides/slide42.xml><?xml version="1.0" encoding="utf-8"?>
+<file path=ppt/slides/slide43.xml><?xml version="1.0" encoding="utf-8"?>
 <p:sld xmlns:a="http://schemas.openxmlformats.org/drawingml/2006/main" xmlns:r="http://schemas.openxmlformats.org/officeDocument/2006/relationships" xmlns:p="http://schemas.openxmlformats.org/presentationml/2006/main">
   <p:cSld>
     <p:spTree>
@@ -32330,7 +34701,7 @@
 </p:sld>
 </file>
 
-<file path=ppt/slides/slide43.xml><?xml version="1.0" encoding="utf-8"?>
+<file path=ppt/slides/slide44.xml><?xml version="1.0" encoding="utf-8"?>
 <p:sld xmlns:a="http://schemas.openxmlformats.org/drawingml/2006/main" xmlns:r="http://schemas.openxmlformats.org/officeDocument/2006/relationships" xmlns:p="http://schemas.openxmlformats.org/presentationml/2006/main">
   <p:cSld>
     <p:spTree>
@@ -32628,7 +34999,7 @@
 </p:sld>
 </file>
 
-<file path=ppt/slides/slide44.xml><?xml version="1.0" encoding="utf-8"?>
+<file path=ppt/slides/slide45.xml><?xml version="1.0" encoding="utf-8"?>
 <p:sld xmlns:a="http://schemas.openxmlformats.org/drawingml/2006/main" xmlns:r="http://schemas.openxmlformats.org/officeDocument/2006/relationships" xmlns:p="http://schemas.openxmlformats.org/presentationml/2006/main">
   <p:cSld>
     <p:spTree>
@@ -33177,7 +35548,7 @@
 </p:sld>
 </file>
 
-<file path=ppt/slides/slide45.xml><?xml version="1.0" encoding="utf-8"?>
+<file path=ppt/slides/slide46.xml><?xml version="1.0" encoding="utf-8"?>
 <p:sld xmlns:a="http://schemas.openxmlformats.org/drawingml/2006/main" xmlns:r="http://schemas.openxmlformats.org/officeDocument/2006/relationships" xmlns:p="http://schemas.openxmlformats.org/presentationml/2006/main">
   <p:cSld>
     <p:spTree>
@@ -33722,7 +36093,7 @@
 </p:sld>
 </file>
 
-<file path=ppt/slides/slide46.xml><?xml version="1.0" encoding="utf-8"?>
+<file path=ppt/slides/slide47.xml><?xml version="1.0" encoding="utf-8"?>
 <p:sld xmlns:a="http://schemas.openxmlformats.org/drawingml/2006/main" xmlns:r="http://schemas.openxmlformats.org/officeDocument/2006/relationships" xmlns:p="http://schemas.openxmlformats.org/presentationml/2006/main">
   <p:cSld>
     <p:spTree>
@@ -34552,7 +36923,7 @@
 </p:sld>
 </file>
 
-<file path=ppt/slides/slide47.xml><?xml version="1.0" encoding="utf-8"?>
+<file path=ppt/slides/slide48.xml><?xml version="1.0" encoding="utf-8"?>
 <p:sld xmlns:a="http://schemas.openxmlformats.org/drawingml/2006/main" xmlns:r="http://schemas.openxmlformats.org/officeDocument/2006/relationships" xmlns:p="http://schemas.openxmlformats.org/presentationml/2006/main">
   <p:cSld>
     <p:spTree>
@@ -35266,7 +37637,7 @@
 </p:sld>
 </file>
 
-<file path=ppt/slides/slide48.xml><?xml version="1.0" encoding="utf-8"?>
+<file path=ppt/slides/slide49.xml><?xml version="1.0" encoding="utf-8"?>
 <p:sld xmlns:a="http://schemas.openxmlformats.org/drawingml/2006/main" xmlns:r="http://schemas.openxmlformats.org/officeDocument/2006/relationships" xmlns:p="http://schemas.openxmlformats.org/presentationml/2006/main">
   <p:cSld>
     <p:spTree>
@@ -35589,164 +37960,6 @@
     <p:extLst>
       <p:ext uri="{BB962C8B-B14F-4D97-AF65-F5344CB8AC3E}">
         <p14:creationId xmlns:p14="http://schemas.microsoft.com/office/powerpoint/2010/main" val="4153020467"/>
-      </p:ext>
-    </p:extLst>
-  </p:cSld>
-  <p:clrMapOvr>
-    <a:masterClrMapping/>
-  </p:clrMapOvr>
-</p:sld>
-</file>
-
-<file path=ppt/slides/slide49.xml><?xml version="1.0" encoding="utf-8"?>
-<p:sld xmlns:a="http://schemas.openxmlformats.org/drawingml/2006/main" xmlns:r="http://schemas.openxmlformats.org/officeDocument/2006/relationships" xmlns:p="http://schemas.openxmlformats.org/presentationml/2006/main">
-  <p:cSld>
-    <p:spTree>
-      <p:nvGrpSpPr>
-        <p:cNvPr id="1" name=""/>
-        <p:cNvGrpSpPr/>
-        <p:nvPr/>
-      </p:nvGrpSpPr>
-      <p:grpSpPr>
-        <a:xfrm>
-          <a:off x="0" y="0"/>
-          <a:ext cx="0" cy="0"/>
-          <a:chOff x="0" y="0"/>
-          <a:chExt cx="0" cy="0"/>
-        </a:xfrm>
-      </p:grpSpPr>
-      <p:sp>
-        <p:nvSpPr>
-          <p:cNvPr id="2" name="Title 1">
-            <a:extLst>
-              <a:ext uri="{FF2B5EF4-FFF2-40B4-BE49-F238E27FC236}">
-                <a16:creationId xmlns:a16="http://schemas.microsoft.com/office/drawing/2014/main" id="{6D9CBA6E-E405-6121-6320-A5705755F4D7}"/>
-              </a:ext>
-            </a:extLst>
-          </p:cNvPr>
-          <p:cNvSpPr>
-            <a:spLocks noGrp="1"/>
-          </p:cNvSpPr>
-          <p:nvPr>
-            <p:ph type="title"/>
-          </p:nvPr>
-        </p:nvSpPr>
-        <p:spPr/>
-        <p:txBody>
-          <a:bodyPr/>
-          <a:lstStyle/>
-          <a:p>
-            <a:r>
-              <a:rPr lang="ru-RU" dirty="0"/>
-              <a:t>Итоги</a:t>
-            </a:r>
-            <a:endParaRPr lang="en-US" dirty="0"/>
-          </a:p>
-        </p:txBody>
-      </p:sp>
-      <p:sp>
-        <p:nvSpPr>
-          <p:cNvPr id="3" name="Content Placeholder 2">
-            <a:extLst>
-              <a:ext uri="{FF2B5EF4-FFF2-40B4-BE49-F238E27FC236}">
-                <a16:creationId xmlns:a16="http://schemas.microsoft.com/office/drawing/2014/main" id="{E40A3DC0-0D1B-6F96-9C71-55B5252F9E54}"/>
-              </a:ext>
-            </a:extLst>
-          </p:cNvPr>
-          <p:cNvSpPr>
-            <a:spLocks noGrp="1"/>
-          </p:cNvSpPr>
-          <p:nvPr>
-            <p:ph idx="1"/>
-          </p:nvPr>
-        </p:nvSpPr>
-        <p:spPr/>
-        <p:txBody>
-          <a:bodyPr>
-            <a:normAutofit lnSpcReduction="10000"/>
-          </a:bodyPr>
-          <a:lstStyle/>
-          <a:p>
-            <a:r>
-              <a:rPr lang="ru-RU" dirty="0"/>
-              <a:t>Что мы сегодня сделали:</a:t>
-            </a:r>
-          </a:p>
-          <a:p>
-            <a:pPr lvl="1"/>
-            <a:r>
-              <a:rPr lang="ru-RU" dirty="0"/>
-              <a:t>разобрали, что такое микропроцессор и как он выполняет программу</a:t>
-            </a:r>
-          </a:p>
-          <a:p>
-            <a:pPr lvl="1"/>
-            <a:r>
-              <a:rPr lang="ru-RU" dirty="0"/>
-              <a:t>увидели связь: C → ассемблер → машинный код</a:t>
-            </a:r>
-          </a:p>
-          <a:p>
-            <a:pPr lvl="1"/>
-            <a:r>
-              <a:rPr lang="ru-RU" dirty="0"/>
-              <a:t>познакомились с языком C и его стандартной библиотекой</a:t>
-            </a:r>
-          </a:p>
-          <a:p>
-            <a:pPr lvl="1"/>
-            <a:r>
-              <a:rPr lang="ru-RU" dirty="0"/>
-              <a:t>научились писать, компилировать и запускать простые программы</a:t>
-            </a:r>
-          </a:p>
-          <a:p>
-            <a:pPr lvl="1"/>
-            <a:r>
-              <a:rPr lang="ru-RU" dirty="0"/>
-              <a:t>разобрали работу с целыми числами, условиями и циклами</a:t>
-            </a:r>
-          </a:p>
-          <a:p>
-            <a:pPr lvl="1"/>
-            <a:r>
-              <a:rPr lang="ru-RU" dirty="0"/>
-              <a:t>научились читать ввод из консоли и проверять его корректность</a:t>
-            </a:r>
-          </a:p>
-          <a:p>
-            <a:r>
-              <a:rPr lang="ru-RU" dirty="0"/>
-              <a:t>Дальше в курсе:</a:t>
-            </a:r>
-          </a:p>
-          <a:p>
-            <a:pPr lvl="1"/>
-            <a:r>
-              <a:rPr lang="ru-RU" dirty="0"/>
-              <a:t>больше практики на C</a:t>
-            </a:r>
-          </a:p>
-          <a:p>
-            <a:pPr lvl="1"/>
-            <a:r>
-              <a:rPr lang="ru-RU" dirty="0"/>
-              <a:t>переход к памяти, стеку и вызовам функций</a:t>
-            </a:r>
-          </a:p>
-          <a:p>
-            <a:pPr lvl="1"/>
-            <a:r>
-              <a:rPr lang="ru-RU" dirty="0"/>
-              <a:t>постепенный разбор ассемблера и работы процессора</a:t>
-            </a:r>
-          </a:p>
-        </p:txBody>
-      </p:sp>
-    </p:spTree>
-    <p:extLst>
-      <p:ext uri="{BB962C8B-B14F-4D97-AF65-F5344CB8AC3E}">
-        <p14:creationId xmlns:p14="http://schemas.microsoft.com/office/powerpoint/2010/main" val="4236918666"/>
       </p:ext>
     </p:extLst>
   </p:cSld>
@@ -35885,6 +38098,164 @@
     <p:extLst>
       <p:ext uri="{BB962C8B-B14F-4D97-AF65-F5344CB8AC3E}">
         <p14:creationId xmlns:p14="http://schemas.microsoft.com/office/powerpoint/2010/main" val="3276020914"/>
+      </p:ext>
+    </p:extLst>
+  </p:cSld>
+  <p:clrMapOvr>
+    <a:masterClrMapping/>
+  </p:clrMapOvr>
+</p:sld>
+</file>
+
+<file path=ppt/slides/slide50.xml><?xml version="1.0" encoding="utf-8"?>
+<p:sld xmlns:a="http://schemas.openxmlformats.org/drawingml/2006/main" xmlns:r="http://schemas.openxmlformats.org/officeDocument/2006/relationships" xmlns:p="http://schemas.openxmlformats.org/presentationml/2006/main">
+  <p:cSld>
+    <p:spTree>
+      <p:nvGrpSpPr>
+        <p:cNvPr id="1" name=""/>
+        <p:cNvGrpSpPr/>
+        <p:nvPr/>
+      </p:nvGrpSpPr>
+      <p:grpSpPr>
+        <a:xfrm>
+          <a:off x="0" y="0"/>
+          <a:ext cx="0" cy="0"/>
+          <a:chOff x="0" y="0"/>
+          <a:chExt cx="0" cy="0"/>
+        </a:xfrm>
+      </p:grpSpPr>
+      <p:sp>
+        <p:nvSpPr>
+          <p:cNvPr id="2" name="Title 1">
+            <a:extLst>
+              <a:ext uri="{FF2B5EF4-FFF2-40B4-BE49-F238E27FC236}">
+                <a16:creationId xmlns:a16="http://schemas.microsoft.com/office/drawing/2014/main" id="{6D9CBA6E-E405-6121-6320-A5705755F4D7}"/>
+              </a:ext>
+            </a:extLst>
+          </p:cNvPr>
+          <p:cNvSpPr>
+            <a:spLocks noGrp="1"/>
+          </p:cNvSpPr>
+          <p:nvPr>
+            <p:ph type="title"/>
+          </p:nvPr>
+        </p:nvSpPr>
+        <p:spPr/>
+        <p:txBody>
+          <a:bodyPr/>
+          <a:lstStyle/>
+          <a:p>
+            <a:r>
+              <a:rPr lang="ru-RU" dirty="0"/>
+              <a:t>Итоги</a:t>
+            </a:r>
+            <a:endParaRPr lang="en-US" dirty="0"/>
+          </a:p>
+        </p:txBody>
+      </p:sp>
+      <p:sp>
+        <p:nvSpPr>
+          <p:cNvPr id="3" name="Content Placeholder 2">
+            <a:extLst>
+              <a:ext uri="{FF2B5EF4-FFF2-40B4-BE49-F238E27FC236}">
+                <a16:creationId xmlns:a16="http://schemas.microsoft.com/office/drawing/2014/main" id="{E40A3DC0-0D1B-6F96-9C71-55B5252F9E54}"/>
+              </a:ext>
+            </a:extLst>
+          </p:cNvPr>
+          <p:cNvSpPr>
+            <a:spLocks noGrp="1"/>
+          </p:cNvSpPr>
+          <p:nvPr>
+            <p:ph idx="1"/>
+          </p:nvPr>
+        </p:nvSpPr>
+        <p:spPr/>
+        <p:txBody>
+          <a:bodyPr>
+            <a:normAutofit lnSpcReduction="10000"/>
+          </a:bodyPr>
+          <a:lstStyle/>
+          <a:p>
+            <a:r>
+              <a:rPr lang="ru-RU" dirty="0"/>
+              <a:t>Что мы сегодня сделали:</a:t>
+            </a:r>
+          </a:p>
+          <a:p>
+            <a:pPr lvl="1"/>
+            <a:r>
+              <a:rPr lang="ru-RU" dirty="0"/>
+              <a:t>разобрали, что такое микропроцессор и как он выполняет программу</a:t>
+            </a:r>
+          </a:p>
+          <a:p>
+            <a:pPr lvl="1"/>
+            <a:r>
+              <a:rPr lang="ru-RU" dirty="0"/>
+              <a:t>увидели связь: C → ассемблер → машинный код</a:t>
+            </a:r>
+          </a:p>
+          <a:p>
+            <a:pPr lvl="1"/>
+            <a:r>
+              <a:rPr lang="ru-RU" dirty="0"/>
+              <a:t>познакомились с языком C и его стандартной библиотекой</a:t>
+            </a:r>
+          </a:p>
+          <a:p>
+            <a:pPr lvl="1"/>
+            <a:r>
+              <a:rPr lang="ru-RU" dirty="0"/>
+              <a:t>научились писать, компилировать и запускать простые программы</a:t>
+            </a:r>
+          </a:p>
+          <a:p>
+            <a:pPr lvl="1"/>
+            <a:r>
+              <a:rPr lang="ru-RU" dirty="0"/>
+              <a:t>разобрали работу с целыми числами, условиями и циклами</a:t>
+            </a:r>
+          </a:p>
+          <a:p>
+            <a:pPr lvl="1"/>
+            <a:r>
+              <a:rPr lang="ru-RU" dirty="0"/>
+              <a:t>научились читать ввод из консоли и проверять его корректность</a:t>
+            </a:r>
+          </a:p>
+          <a:p>
+            <a:r>
+              <a:rPr lang="ru-RU" dirty="0"/>
+              <a:t>Дальше в курсе:</a:t>
+            </a:r>
+          </a:p>
+          <a:p>
+            <a:pPr lvl="1"/>
+            <a:r>
+              <a:rPr lang="ru-RU" dirty="0"/>
+              <a:t>больше практики на C</a:t>
+            </a:r>
+          </a:p>
+          <a:p>
+            <a:pPr lvl="1"/>
+            <a:r>
+              <a:rPr lang="ru-RU" dirty="0"/>
+              <a:t>переход к памяти, стеку и вызовам функций</a:t>
+            </a:r>
+          </a:p>
+          <a:p>
+            <a:pPr lvl="1"/>
+            <a:r>
+              <a:rPr lang="ru-RU" dirty="0"/>
+              <a:t>постепенный разбор ассемблера и работы процессора</a:t>
+            </a:r>
+          </a:p>
+        </p:txBody>
+      </p:sp>
+    </p:spTree>
+    <p:extLst>
+      <p:ext uri="{BB962C8B-B14F-4D97-AF65-F5344CB8AC3E}">
+        <p14:creationId xmlns:p14="http://schemas.microsoft.com/office/powerpoint/2010/main" val="4236918666"/>
       </p:ext>
     </p:extLst>
   </p:cSld>
@@ -37328,10 +39699,10 @@
       </p:grpSpPr>
       <p:sp>
         <p:nvSpPr>
-          <p:cNvPr id="2" name="Title 1">
+          <p:cNvPr id="7" name="Title 6">
             <a:extLst>
               <a:ext uri="{FF2B5EF4-FFF2-40B4-BE49-F238E27FC236}">
-                <a16:creationId xmlns:a16="http://schemas.microsoft.com/office/drawing/2014/main" id="{8829A8F3-E04C-D7B3-743A-3CE0A8C62AC1}"/>
+                <a16:creationId xmlns:a16="http://schemas.microsoft.com/office/drawing/2014/main" id="{79D9C3EF-C2F5-2AFD-DD1C-B31629B9B6F5}"/>
               </a:ext>
             </a:extLst>
           </p:cNvPr>
@@ -37349,21 +39720,18 @@
           <a:p>
             <a:r>
               <a:rPr lang="ru-RU" dirty="0"/>
-              <a:t>Что такое программа</a:t>
-            </a:r>
-            <a:r>
-              <a:rPr lang="en-US" dirty="0"/>
-              <a:t>?</a:t>
-            </a:r>
+              <a:t>Как процессор выполняет программу</a:t>
+            </a:r>
+            <a:endParaRPr lang="en-US" dirty="0"/>
           </a:p>
         </p:txBody>
       </p:sp>
       <p:sp>
         <p:nvSpPr>
-          <p:cNvPr id="3" name="Content Placeholder 2">
+          <p:cNvPr id="8" name="Text Placeholder 7">
             <a:extLst>
               <a:ext uri="{FF2B5EF4-FFF2-40B4-BE49-F238E27FC236}">
-                <a16:creationId xmlns:a16="http://schemas.microsoft.com/office/drawing/2014/main" id="{2777EB19-6E51-5108-5909-3CDF55BA8207}"/>
+                <a16:creationId xmlns:a16="http://schemas.microsoft.com/office/drawing/2014/main" id="{6E0FF105-E386-1F8E-ABD7-A6D2CE0F1F0D}"/>
               </a:ext>
             </a:extLst>
           </p:cNvPr>
@@ -37371,91 +39739,22 @@
             <a:spLocks noGrp="1"/>
           </p:cNvSpPr>
           <p:nvPr>
-            <p:ph idx="1"/>
+            <p:ph type="body" idx="1"/>
           </p:nvPr>
         </p:nvSpPr>
         <p:spPr/>
         <p:txBody>
-          <a:bodyPr>
-            <a:normAutofit/>
-          </a:bodyPr>
+          <a:bodyPr/>
           <a:lstStyle/>
           <a:p>
-            <a:r>
-              <a:rPr lang="ru-RU" b="1" dirty="0"/>
-              <a:t>Программа для микропроцессора — </a:t>
-            </a:r>
-            <a:r>
-              <a:rPr lang="ru-RU" dirty="0"/>
-              <a:t>последовательность </a:t>
-            </a:r>
-            <a:r>
-              <a:rPr lang="ru-RU" b="1" dirty="0"/>
-              <a:t>машинных инструкций</a:t>
-            </a:r>
-            <a:r>
-              <a:rPr lang="ru-RU" dirty="0"/>
-              <a:t>, которые расположены в </a:t>
-            </a:r>
-            <a:r>
-              <a:rPr lang="ru-RU" b="1" dirty="0"/>
-              <a:t>памяти</a:t>
-            </a:r>
-            <a:r>
-              <a:rPr lang="ru-RU" dirty="0"/>
-              <a:t> и выполняются по шагам</a:t>
-            </a:r>
-          </a:p>
-          <a:p>
-            <a:r>
-              <a:rPr lang="ru-RU" b="1" dirty="0"/>
-              <a:t>Каждая инструкция определяет: </a:t>
-            </a:r>
-            <a:r>
-              <a:rPr lang="ru-RU" dirty="0"/>
-              <a:t>что сделать (операцию), с какими данными, и откуда взять следующую инструкцию</a:t>
-            </a:r>
-          </a:p>
-          <a:p>
-            <a:r>
-              <a:rPr lang="ru-RU" dirty="0"/>
-              <a:t>Процессор </a:t>
-            </a:r>
-            <a:r>
-              <a:rPr lang="ru-RU" b="1" dirty="0"/>
-              <a:t>не понимает</a:t>
-            </a:r>
-            <a:r>
-              <a:rPr lang="ru-RU" dirty="0"/>
-              <a:t> C, Python и т. д. он выполняет только </a:t>
-            </a:r>
-            <a:r>
-              <a:rPr lang="ru-RU" b="1" dirty="0"/>
-              <a:t>двоичный машинный код </a:t>
-            </a:r>
-            <a:endParaRPr lang="ru-RU" dirty="0"/>
-          </a:p>
-          <a:p>
-            <a:pPr lvl="1"/>
-            <a:r>
-              <a:rPr lang="ru-RU" dirty="0"/>
-              <a:t>C и ассемблер — способы </a:t>
-            </a:r>
-            <a:r>
-              <a:rPr lang="ru-RU" i="1" dirty="0"/>
-              <a:t>описать</a:t>
-            </a:r>
-            <a:r>
-              <a:rPr lang="ru-RU" dirty="0"/>
-              <a:t> этот код</a:t>
-            </a:r>
+            <a:endParaRPr lang="en-US"/>
           </a:p>
         </p:txBody>
       </p:sp>
     </p:spTree>
     <p:extLst>
       <p:ext uri="{BB962C8B-B14F-4D97-AF65-F5344CB8AC3E}">
-        <p14:creationId xmlns:p14="http://schemas.microsoft.com/office/powerpoint/2010/main" val="2129179516"/>
+        <p14:creationId xmlns:p14="http://schemas.microsoft.com/office/powerpoint/2010/main" val="3372711384"/>
       </p:ext>
     </p:extLst>
   </p:cSld>
@@ -37484,10 +39783,10 @@
       </p:grpSpPr>
       <p:sp>
         <p:nvSpPr>
-          <p:cNvPr id="4" name="Title 3">
+          <p:cNvPr id="2" name="Title 1">
             <a:extLst>
               <a:ext uri="{FF2B5EF4-FFF2-40B4-BE49-F238E27FC236}">
-                <a16:creationId xmlns:a16="http://schemas.microsoft.com/office/drawing/2014/main" id="{0466239D-AC6F-9C37-2F7F-DBE182E79A3C}"/>
+                <a16:creationId xmlns:a16="http://schemas.microsoft.com/office/drawing/2014/main" id="{8829A8F3-E04C-D7B3-743A-3CE0A8C62AC1}"/>
               </a:ext>
             </a:extLst>
           </p:cNvPr>
@@ -37505,1963 +39804,113 @@
           <a:p>
             <a:r>
               <a:rPr lang="ru-RU" dirty="0"/>
-              <a:t>Нахождение максимального элемента массива (</a:t>
+              <a:t>Что такое программа</a:t>
             </a:r>
             <a:r>
               <a:rPr lang="en-US" dirty="0"/>
-              <a:t>x86-64)</a:t>
+              <a:t>?</a:t>
             </a:r>
           </a:p>
         </p:txBody>
       </p:sp>
       <p:sp>
         <p:nvSpPr>
-          <p:cNvPr id="6" name="TextBox 5">
+          <p:cNvPr id="3" name="Content Placeholder 2">
             <a:extLst>
               <a:ext uri="{FF2B5EF4-FFF2-40B4-BE49-F238E27FC236}">
-                <a16:creationId xmlns:a16="http://schemas.microsoft.com/office/drawing/2014/main" id="{3ECF2728-6F83-2C45-80DB-B89E33097825}"/>
+                <a16:creationId xmlns:a16="http://schemas.microsoft.com/office/drawing/2014/main" id="{2777EB19-6E51-5108-5909-3CDF55BA8207}"/>
               </a:ext>
             </a:extLst>
           </p:cNvPr>
-          <p:cNvSpPr txBox="1"/>
-          <p:nvPr/>
+          <p:cNvSpPr>
+            <a:spLocks noGrp="1"/>
+          </p:cNvSpPr>
+          <p:nvPr>
+            <p:ph idx="1"/>
+          </p:nvPr>
         </p:nvSpPr>
-        <p:spPr>
-          <a:xfrm>
-            <a:off x="838200" y="1964854"/>
-            <a:ext cx="4502426" cy="4247317"/>
-          </a:xfrm>
-          <a:prstGeom prst="rect">
-            <a:avLst/>
-          </a:prstGeom>
-          <a:noFill/>
-        </p:spPr>
+        <p:spPr/>
         <p:txBody>
-          <a:bodyPr wrap="square">
-            <a:spAutoFit/>
+          <a:bodyPr>
+            <a:normAutofit/>
           </a:bodyPr>
           <a:lstStyle/>
           <a:p>
-            <a:pPr>
-              <a:buNone/>
-            </a:pPr>
-            <a:r>
-              <a:rPr lang="en-US" b="0" dirty="0">
-                <a:solidFill>
-                  <a:srgbClr val="0000FF"/>
-                </a:solidFill>
-                <a:effectLst/>
-                <a:latin typeface="Consolas" panose="020B0609020204030204" pitchFamily="49" charset="0"/>
-              </a:rPr>
-              <a:t>#include</a:t>
-            </a:r>
-            <a:r>
-              <a:rPr lang="en-US" b="0" dirty="0">
-                <a:solidFill>
-                  <a:srgbClr val="000000"/>
-                </a:solidFill>
-                <a:effectLst/>
-                <a:latin typeface="Consolas" panose="020B0609020204030204" pitchFamily="49" charset="0"/>
-              </a:rPr>
-              <a:t> </a:t>
-            </a:r>
-            <a:r>
-              <a:rPr lang="en-US" b="0" dirty="0">
-                <a:solidFill>
-                  <a:srgbClr val="0000FF"/>
-                </a:solidFill>
-                <a:effectLst/>
-                <a:latin typeface="Consolas" panose="020B0609020204030204" pitchFamily="49" charset="0"/>
-              </a:rPr>
-              <a:t>&lt;</a:t>
-            </a:r>
-            <a:r>
-              <a:rPr lang="en-US" b="0" dirty="0" err="1">
-                <a:solidFill>
-                  <a:srgbClr val="A31515"/>
-                </a:solidFill>
-                <a:effectLst/>
-                <a:latin typeface="Consolas" panose="020B0609020204030204" pitchFamily="49" charset="0"/>
-              </a:rPr>
-              <a:t>limits.h</a:t>
-            </a:r>
-            <a:r>
-              <a:rPr lang="en-US" b="0" dirty="0">
-                <a:solidFill>
-                  <a:srgbClr val="0000FF"/>
-                </a:solidFill>
-                <a:effectLst/>
-                <a:latin typeface="Consolas" panose="020B0609020204030204" pitchFamily="49" charset="0"/>
-              </a:rPr>
-              <a:t>&gt;</a:t>
-            </a:r>
-            <a:endParaRPr lang="en-US" b="0" dirty="0">
-              <a:solidFill>
-                <a:srgbClr val="000000"/>
-              </a:solidFill>
-              <a:effectLst/>
-              <a:latin typeface="Consolas" panose="020B0609020204030204" pitchFamily="49" charset="0"/>
-            </a:endParaRPr>
-          </a:p>
-          <a:p>
-            <a:pPr>
-              <a:buNone/>
-            </a:pPr>
-            <a:endParaRPr lang="en-US" b="0" dirty="0">
-              <a:solidFill>
-                <a:srgbClr val="000000"/>
-              </a:solidFill>
-              <a:effectLst/>
-              <a:latin typeface="Consolas" panose="020B0609020204030204" pitchFamily="49" charset="0"/>
-            </a:endParaRPr>
-          </a:p>
-          <a:p>
-            <a:pPr>
-              <a:buNone/>
-            </a:pPr>
-            <a:r>
-              <a:rPr lang="en-US" b="0" dirty="0">
-                <a:solidFill>
-                  <a:srgbClr val="0000FF"/>
-                </a:solidFill>
-                <a:effectLst/>
-                <a:latin typeface="Consolas" panose="020B0609020204030204" pitchFamily="49" charset="0"/>
-              </a:rPr>
-              <a:t>int</a:t>
-            </a:r>
-            <a:r>
-              <a:rPr lang="en-US" b="0" dirty="0">
-                <a:solidFill>
-                  <a:srgbClr val="000000"/>
-                </a:solidFill>
-                <a:effectLst/>
-                <a:latin typeface="Consolas" panose="020B0609020204030204" pitchFamily="49" charset="0"/>
-              </a:rPr>
-              <a:t> max(</a:t>
-            </a:r>
-            <a:r>
-              <a:rPr lang="en-US" b="0" dirty="0">
-                <a:solidFill>
-                  <a:srgbClr val="0000FF"/>
-                </a:solidFill>
-                <a:effectLst/>
-                <a:latin typeface="Consolas" panose="020B0609020204030204" pitchFamily="49" charset="0"/>
-              </a:rPr>
-              <a:t>int</a:t>
-            </a:r>
-            <a:r>
-              <a:rPr lang="en-US" b="0" dirty="0">
-                <a:solidFill>
-                  <a:srgbClr val="000000"/>
-                </a:solidFill>
-                <a:effectLst/>
-                <a:latin typeface="Consolas" panose="020B0609020204030204" pitchFamily="49" charset="0"/>
-              </a:rPr>
-              <a:t> *a, </a:t>
-            </a:r>
-            <a:r>
-              <a:rPr lang="en-US" b="0" dirty="0">
-                <a:solidFill>
-                  <a:srgbClr val="0000FF"/>
-                </a:solidFill>
-                <a:effectLst/>
-                <a:latin typeface="Consolas" panose="020B0609020204030204" pitchFamily="49" charset="0"/>
-              </a:rPr>
-              <a:t>int</a:t>
-            </a:r>
-            <a:r>
-              <a:rPr lang="en-US" b="0" dirty="0">
-                <a:solidFill>
-                  <a:srgbClr val="000000"/>
-                </a:solidFill>
-                <a:effectLst/>
-                <a:latin typeface="Consolas" panose="020B0609020204030204" pitchFamily="49" charset="0"/>
-              </a:rPr>
-              <a:t> n) {</a:t>
-            </a:r>
-          </a:p>
-          <a:p>
-            <a:pPr>
-              <a:buNone/>
-            </a:pPr>
-            <a:r>
-              <a:rPr lang="en-US" b="0" dirty="0">
-                <a:solidFill>
-                  <a:srgbClr val="000000"/>
-                </a:solidFill>
-                <a:effectLst/>
-                <a:latin typeface="Consolas" panose="020B0609020204030204" pitchFamily="49" charset="0"/>
-              </a:rPr>
-              <a:t>    </a:t>
-            </a:r>
-            <a:r>
-              <a:rPr lang="en-US" b="0" dirty="0">
-                <a:solidFill>
-                  <a:srgbClr val="0000FF"/>
-                </a:solidFill>
-                <a:effectLst/>
-                <a:latin typeface="Consolas" panose="020B0609020204030204" pitchFamily="49" charset="0"/>
-              </a:rPr>
-              <a:t>if</a:t>
-            </a:r>
-            <a:r>
-              <a:rPr lang="en-US" b="0" dirty="0">
-                <a:solidFill>
-                  <a:srgbClr val="000000"/>
-                </a:solidFill>
-                <a:effectLst/>
-                <a:latin typeface="Consolas" panose="020B0609020204030204" pitchFamily="49" charset="0"/>
-              </a:rPr>
-              <a:t> (n == </a:t>
-            </a:r>
-            <a:r>
-              <a:rPr lang="en-US" b="0" dirty="0">
-                <a:solidFill>
-                  <a:srgbClr val="098658"/>
-                </a:solidFill>
-                <a:effectLst/>
-                <a:latin typeface="Consolas" panose="020B0609020204030204" pitchFamily="49" charset="0"/>
-              </a:rPr>
-              <a:t>0</a:t>
-            </a:r>
-            <a:r>
-              <a:rPr lang="en-US" b="0" dirty="0">
-                <a:solidFill>
-                  <a:srgbClr val="000000"/>
-                </a:solidFill>
-                <a:effectLst/>
-                <a:latin typeface="Consolas" panose="020B0609020204030204" pitchFamily="49" charset="0"/>
-              </a:rPr>
-              <a:t>) {</a:t>
-            </a:r>
-          </a:p>
-          <a:p>
-            <a:pPr>
-              <a:buNone/>
-            </a:pPr>
-            <a:r>
-              <a:rPr lang="en-US" b="0" dirty="0">
-                <a:solidFill>
-                  <a:srgbClr val="000000"/>
-                </a:solidFill>
-                <a:effectLst/>
-                <a:latin typeface="Consolas" panose="020B0609020204030204" pitchFamily="49" charset="0"/>
-              </a:rPr>
-              <a:t>        </a:t>
-            </a:r>
-            <a:r>
-              <a:rPr lang="en-US" b="0" dirty="0">
-                <a:solidFill>
-                  <a:srgbClr val="0000FF"/>
-                </a:solidFill>
-                <a:effectLst/>
-                <a:latin typeface="Consolas" panose="020B0609020204030204" pitchFamily="49" charset="0"/>
-              </a:rPr>
-              <a:t>return</a:t>
-            </a:r>
-            <a:r>
-              <a:rPr lang="en-US" b="0" dirty="0">
-                <a:solidFill>
-                  <a:srgbClr val="000000"/>
-                </a:solidFill>
-                <a:effectLst/>
-                <a:latin typeface="Consolas" panose="020B0609020204030204" pitchFamily="49" charset="0"/>
-              </a:rPr>
-              <a:t> INT_MIN;</a:t>
-            </a:r>
-          </a:p>
-          <a:p>
-            <a:pPr>
-              <a:buNone/>
-            </a:pPr>
-            <a:r>
-              <a:rPr lang="en-US" b="0" dirty="0">
-                <a:solidFill>
-                  <a:srgbClr val="000000"/>
-                </a:solidFill>
-                <a:effectLst/>
-                <a:latin typeface="Consolas" panose="020B0609020204030204" pitchFamily="49" charset="0"/>
-              </a:rPr>
-              <a:t>    }</a:t>
-            </a:r>
-          </a:p>
-          <a:p>
-            <a:pPr>
-              <a:buNone/>
-            </a:pPr>
-            <a:endParaRPr lang="en-US" b="0" dirty="0">
-              <a:solidFill>
-                <a:srgbClr val="000000"/>
-              </a:solidFill>
-              <a:effectLst/>
-              <a:latin typeface="Consolas" panose="020B0609020204030204" pitchFamily="49" charset="0"/>
-            </a:endParaRPr>
-          </a:p>
-          <a:p>
-            <a:pPr>
-              <a:buNone/>
-            </a:pPr>
-            <a:r>
-              <a:rPr lang="en-US" b="0" dirty="0">
-                <a:solidFill>
-                  <a:srgbClr val="000000"/>
-                </a:solidFill>
-                <a:effectLst/>
-                <a:latin typeface="Consolas" panose="020B0609020204030204" pitchFamily="49" charset="0"/>
-              </a:rPr>
-              <a:t>    </a:t>
-            </a:r>
-            <a:r>
-              <a:rPr lang="en-US" b="0" dirty="0">
-                <a:solidFill>
-                  <a:srgbClr val="0000FF"/>
-                </a:solidFill>
-                <a:effectLst/>
-                <a:latin typeface="Consolas" panose="020B0609020204030204" pitchFamily="49" charset="0"/>
-              </a:rPr>
-              <a:t>int</a:t>
-            </a:r>
-            <a:r>
-              <a:rPr lang="en-US" b="0" dirty="0">
-                <a:solidFill>
-                  <a:srgbClr val="000000"/>
-                </a:solidFill>
-                <a:effectLst/>
-                <a:latin typeface="Consolas" panose="020B0609020204030204" pitchFamily="49" charset="0"/>
-              </a:rPr>
-              <a:t> m = a[</a:t>
-            </a:r>
-            <a:r>
-              <a:rPr lang="en-US" b="0" dirty="0">
-                <a:solidFill>
-                  <a:srgbClr val="098658"/>
-                </a:solidFill>
-                <a:effectLst/>
-                <a:latin typeface="Consolas" panose="020B0609020204030204" pitchFamily="49" charset="0"/>
-              </a:rPr>
-              <a:t>0</a:t>
-            </a:r>
-            <a:r>
-              <a:rPr lang="en-US" b="0" dirty="0">
-                <a:solidFill>
-                  <a:srgbClr val="000000"/>
-                </a:solidFill>
-                <a:effectLst/>
-                <a:latin typeface="Consolas" panose="020B0609020204030204" pitchFamily="49" charset="0"/>
-              </a:rPr>
-              <a:t>];</a:t>
-            </a:r>
-          </a:p>
-          <a:p>
-            <a:pPr>
-              <a:buNone/>
-            </a:pPr>
-            <a:r>
-              <a:rPr lang="en-US" b="0" dirty="0">
-                <a:solidFill>
-                  <a:srgbClr val="000000"/>
-                </a:solidFill>
-                <a:effectLst/>
-                <a:latin typeface="Consolas" panose="020B0609020204030204" pitchFamily="49" charset="0"/>
-              </a:rPr>
-              <a:t>    </a:t>
-            </a:r>
-            <a:r>
-              <a:rPr lang="en-US" b="0" dirty="0">
-                <a:solidFill>
-                  <a:srgbClr val="0000FF"/>
-                </a:solidFill>
-                <a:effectLst/>
-                <a:latin typeface="Consolas" panose="020B0609020204030204" pitchFamily="49" charset="0"/>
-              </a:rPr>
-              <a:t>for</a:t>
-            </a:r>
-            <a:r>
-              <a:rPr lang="en-US" b="0" dirty="0">
-                <a:solidFill>
-                  <a:srgbClr val="000000"/>
-                </a:solidFill>
-                <a:effectLst/>
-                <a:latin typeface="Consolas" panose="020B0609020204030204" pitchFamily="49" charset="0"/>
-              </a:rPr>
-              <a:t> (</a:t>
-            </a:r>
-            <a:r>
-              <a:rPr lang="en-US" b="0" dirty="0">
-                <a:solidFill>
-                  <a:srgbClr val="0000FF"/>
-                </a:solidFill>
-                <a:effectLst/>
-                <a:latin typeface="Consolas" panose="020B0609020204030204" pitchFamily="49" charset="0"/>
-              </a:rPr>
-              <a:t>int</a:t>
-            </a:r>
-            <a:r>
-              <a:rPr lang="en-US" b="0" dirty="0">
-                <a:solidFill>
-                  <a:srgbClr val="000000"/>
-                </a:solidFill>
-                <a:effectLst/>
-                <a:latin typeface="Consolas" panose="020B0609020204030204" pitchFamily="49" charset="0"/>
-              </a:rPr>
-              <a:t> </a:t>
-            </a:r>
-            <a:r>
-              <a:rPr lang="en-US" b="0" dirty="0" err="1">
-                <a:solidFill>
-                  <a:srgbClr val="000000"/>
-                </a:solidFill>
-                <a:effectLst/>
-                <a:latin typeface="Consolas" panose="020B0609020204030204" pitchFamily="49" charset="0"/>
-              </a:rPr>
-              <a:t>i</a:t>
-            </a:r>
-            <a:r>
-              <a:rPr lang="en-US" b="0" dirty="0">
-                <a:solidFill>
-                  <a:srgbClr val="000000"/>
-                </a:solidFill>
-                <a:effectLst/>
-                <a:latin typeface="Consolas" panose="020B0609020204030204" pitchFamily="49" charset="0"/>
-              </a:rPr>
-              <a:t> = </a:t>
-            </a:r>
-            <a:r>
-              <a:rPr lang="en-US" b="0" dirty="0">
-                <a:solidFill>
-                  <a:srgbClr val="098658"/>
-                </a:solidFill>
-                <a:effectLst/>
-                <a:latin typeface="Consolas" panose="020B0609020204030204" pitchFamily="49" charset="0"/>
-              </a:rPr>
-              <a:t>1</a:t>
-            </a:r>
-            <a:r>
-              <a:rPr lang="en-US" b="0" dirty="0">
-                <a:solidFill>
-                  <a:srgbClr val="000000"/>
-                </a:solidFill>
-                <a:effectLst/>
-                <a:latin typeface="Consolas" panose="020B0609020204030204" pitchFamily="49" charset="0"/>
-              </a:rPr>
-              <a:t>; </a:t>
-            </a:r>
-            <a:r>
-              <a:rPr lang="en-US" b="0" dirty="0" err="1">
-                <a:solidFill>
-                  <a:srgbClr val="000000"/>
-                </a:solidFill>
-                <a:effectLst/>
-                <a:latin typeface="Consolas" panose="020B0609020204030204" pitchFamily="49" charset="0"/>
-              </a:rPr>
-              <a:t>i</a:t>
-            </a:r>
-            <a:r>
-              <a:rPr lang="en-US" b="0" dirty="0">
-                <a:solidFill>
-                  <a:srgbClr val="000000"/>
-                </a:solidFill>
-                <a:effectLst/>
-                <a:latin typeface="Consolas" panose="020B0609020204030204" pitchFamily="49" charset="0"/>
-              </a:rPr>
-              <a:t> &lt; n; </a:t>
-            </a:r>
-            <a:r>
-              <a:rPr lang="en-US" b="0" dirty="0" err="1">
-                <a:solidFill>
-                  <a:srgbClr val="000000"/>
-                </a:solidFill>
-                <a:effectLst/>
-                <a:latin typeface="Consolas" panose="020B0609020204030204" pitchFamily="49" charset="0"/>
-              </a:rPr>
-              <a:t>i</a:t>
-            </a:r>
-            <a:r>
-              <a:rPr lang="en-US" b="0" dirty="0">
-                <a:solidFill>
-                  <a:srgbClr val="000000"/>
-                </a:solidFill>
-                <a:effectLst/>
-                <a:latin typeface="Consolas" panose="020B0609020204030204" pitchFamily="49" charset="0"/>
-              </a:rPr>
-              <a:t>++) {</a:t>
-            </a:r>
-          </a:p>
-          <a:p>
-            <a:pPr>
-              <a:buNone/>
-            </a:pPr>
-            <a:r>
-              <a:rPr lang="en-US" b="0" dirty="0">
-                <a:solidFill>
-                  <a:srgbClr val="000000"/>
-                </a:solidFill>
-                <a:effectLst/>
-                <a:latin typeface="Consolas" panose="020B0609020204030204" pitchFamily="49" charset="0"/>
-              </a:rPr>
-              <a:t>        </a:t>
-            </a:r>
-            <a:r>
-              <a:rPr lang="en-US" b="0" dirty="0">
-                <a:solidFill>
-                  <a:srgbClr val="0000FF"/>
-                </a:solidFill>
-                <a:effectLst/>
-                <a:latin typeface="Consolas" panose="020B0609020204030204" pitchFamily="49" charset="0"/>
-              </a:rPr>
-              <a:t>if</a:t>
-            </a:r>
-            <a:r>
-              <a:rPr lang="en-US" b="0" dirty="0">
-                <a:solidFill>
-                  <a:srgbClr val="000000"/>
-                </a:solidFill>
-                <a:effectLst/>
-                <a:latin typeface="Consolas" panose="020B0609020204030204" pitchFamily="49" charset="0"/>
-              </a:rPr>
-              <a:t> (a[</a:t>
-            </a:r>
-            <a:r>
-              <a:rPr lang="en-US" b="0" dirty="0" err="1">
-                <a:solidFill>
-                  <a:srgbClr val="000000"/>
-                </a:solidFill>
-                <a:effectLst/>
-                <a:latin typeface="Consolas" panose="020B0609020204030204" pitchFamily="49" charset="0"/>
-              </a:rPr>
-              <a:t>i</a:t>
-            </a:r>
-            <a:r>
-              <a:rPr lang="en-US" b="0" dirty="0">
-                <a:solidFill>
-                  <a:srgbClr val="000000"/>
-                </a:solidFill>
-                <a:effectLst/>
-                <a:latin typeface="Consolas" panose="020B0609020204030204" pitchFamily="49" charset="0"/>
-              </a:rPr>
-              <a:t>] &gt; m) {</a:t>
-            </a:r>
-          </a:p>
-          <a:p>
-            <a:pPr>
-              <a:buNone/>
-            </a:pPr>
-            <a:r>
-              <a:rPr lang="en-US" b="0" dirty="0">
-                <a:solidFill>
-                  <a:srgbClr val="000000"/>
-                </a:solidFill>
-                <a:effectLst/>
-                <a:latin typeface="Consolas" panose="020B0609020204030204" pitchFamily="49" charset="0"/>
-              </a:rPr>
-              <a:t>            m = a[</a:t>
-            </a:r>
-            <a:r>
-              <a:rPr lang="en-US" b="0" dirty="0" err="1">
-                <a:solidFill>
-                  <a:srgbClr val="000000"/>
-                </a:solidFill>
-                <a:effectLst/>
-                <a:latin typeface="Consolas" panose="020B0609020204030204" pitchFamily="49" charset="0"/>
-              </a:rPr>
-              <a:t>i</a:t>
-            </a:r>
-            <a:r>
-              <a:rPr lang="en-US" b="0" dirty="0">
-                <a:solidFill>
-                  <a:srgbClr val="000000"/>
-                </a:solidFill>
-                <a:effectLst/>
-                <a:latin typeface="Consolas" panose="020B0609020204030204" pitchFamily="49" charset="0"/>
-              </a:rPr>
-              <a:t>];</a:t>
-            </a:r>
-          </a:p>
-          <a:p>
-            <a:pPr>
-              <a:buNone/>
-            </a:pPr>
-            <a:r>
-              <a:rPr lang="en-US" b="0" dirty="0">
-                <a:solidFill>
-                  <a:srgbClr val="000000"/>
-                </a:solidFill>
-                <a:effectLst/>
-                <a:latin typeface="Consolas" panose="020B0609020204030204" pitchFamily="49" charset="0"/>
-              </a:rPr>
-              <a:t>        }</a:t>
-            </a:r>
-          </a:p>
-          <a:p>
-            <a:pPr>
-              <a:buNone/>
-            </a:pPr>
-            <a:r>
-              <a:rPr lang="en-US" b="0" dirty="0">
-                <a:solidFill>
-                  <a:srgbClr val="000000"/>
-                </a:solidFill>
-                <a:effectLst/>
-                <a:latin typeface="Consolas" panose="020B0609020204030204" pitchFamily="49" charset="0"/>
-              </a:rPr>
-              <a:t>    }</a:t>
-            </a:r>
-          </a:p>
-          <a:p>
-            <a:pPr>
-              <a:buNone/>
-            </a:pPr>
-            <a:r>
-              <a:rPr lang="en-US" b="0" dirty="0">
-                <a:solidFill>
-                  <a:srgbClr val="000000"/>
-                </a:solidFill>
-                <a:effectLst/>
-                <a:latin typeface="Consolas" panose="020B0609020204030204" pitchFamily="49" charset="0"/>
-              </a:rPr>
-              <a:t>    </a:t>
-            </a:r>
-            <a:r>
-              <a:rPr lang="en-US" b="0" dirty="0">
-                <a:solidFill>
-                  <a:srgbClr val="0000FF"/>
-                </a:solidFill>
-                <a:effectLst/>
-                <a:latin typeface="Consolas" panose="020B0609020204030204" pitchFamily="49" charset="0"/>
-              </a:rPr>
-              <a:t>return</a:t>
-            </a:r>
-            <a:r>
-              <a:rPr lang="en-US" b="0" dirty="0">
-                <a:solidFill>
-                  <a:srgbClr val="000000"/>
-                </a:solidFill>
-                <a:effectLst/>
-                <a:latin typeface="Consolas" panose="020B0609020204030204" pitchFamily="49" charset="0"/>
-              </a:rPr>
-              <a:t> m;</a:t>
-            </a:r>
-          </a:p>
-          <a:p>
-            <a:pPr>
-              <a:buNone/>
-            </a:pPr>
-            <a:r>
-              <a:rPr lang="en-US" b="0" dirty="0">
-                <a:solidFill>
-                  <a:srgbClr val="000000"/>
-                </a:solidFill>
-                <a:effectLst/>
-                <a:latin typeface="Consolas" panose="020B0609020204030204" pitchFamily="49" charset="0"/>
-              </a:rPr>
-              <a:t>}</a:t>
-            </a:r>
-          </a:p>
-        </p:txBody>
-      </p:sp>
-      <p:sp>
-        <p:nvSpPr>
-          <p:cNvPr id="17" name="TextBox 16">
-            <a:extLst>
-              <a:ext uri="{FF2B5EF4-FFF2-40B4-BE49-F238E27FC236}">
-                <a16:creationId xmlns:a16="http://schemas.microsoft.com/office/drawing/2014/main" id="{A3690909-DF54-B0B9-8B78-592C2C410E9E}"/>
-              </a:ext>
-            </a:extLst>
-          </p:cNvPr>
-          <p:cNvSpPr txBox="1"/>
-          <p:nvPr/>
-        </p:nvSpPr>
-        <p:spPr>
-          <a:xfrm>
-            <a:off x="5785658" y="1964854"/>
-            <a:ext cx="6406342" cy="4524315"/>
-          </a:xfrm>
-          <a:prstGeom prst="rect">
-            <a:avLst/>
-          </a:prstGeom>
-          <a:noFill/>
-        </p:spPr>
-        <p:txBody>
-          <a:bodyPr wrap="square">
-            <a:spAutoFit/>
-          </a:bodyPr>
-          <a:lstStyle/>
-          <a:p>
-            <a:pPr>
-              <a:buNone/>
-            </a:pPr>
-            <a:r>
-              <a:rPr lang="en-US" b="0" dirty="0">
-                <a:solidFill>
-                  <a:srgbClr val="0000FF"/>
-                </a:solidFill>
-                <a:effectLst/>
-                <a:latin typeface="Consolas" panose="020B0609020204030204" pitchFamily="49" charset="0"/>
-              </a:rPr>
-              <a:t>max</a:t>
-            </a:r>
-            <a:r>
-              <a:rPr lang="en-US" b="0" dirty="0">
-                <a:solidFill>
-                  <a:srgbClr val="000000"/>
-                </a:solidFill>
-                <a:effectLst/>
-                <a:latin typeface="Consolas" panose="020B0609020204030204" pitchFamily="49" charset="0"/>
-              </a:rPr>
-              <a:t>:</a:t>
-            </a:r>
-          </a:p>
-          <a:p>
-            <a:pPr>
-              <a:buNone/>
-            </a:pPr>
-            <a:r>
-              <a:rPr lang="en-US" b="0" dirty="0">
-                <a:solidFill>
-                  <a:srgbClr val="000000"/>
-                </a:solidFill>
-                <a:effectLst/>
-                <a:latin typeface="Consolas" panose="020B0609020204030204" pitchFamily="49" charset="0"/>
-              </a:rPr>
-              <a:t>  </a:t>
-            </a:r>
-            <a:r>
-              <a:rPr lang="en-US" b="0" dirty="0">
-                <a:solidFill>
-                  <a:srgbClr val="0000FF"/>
-                </a:solidFill>
-                <a:effectLst/>
-                <a:latin typeface="Consolas" panose="020B0609020204030204" pitchFamily="49" charset="0"/>
-              </a:rPr>
-              <a:t>mov</a:t>
-            </a:r>
-            <a:r>
-              <a:rPr lang="en-US" b="0" dirty="0">
-                <a:solidFill>
-                  <a:srgbClr val="000000"/>
-                </a:solidFill>
-                <a:effectLst/>
-                <a:latin typeface="Consolas" panose="020B0609020204030204" pitchFamily="49" charset="0"/>
-              </a:rPr>
-              <a:t> </a:t>
-            </a:r>
-            <a:r>
-              <a:rPr lang="en-US" b="0" dirty="0" err="1">
-                <a:solidFill>
-                  <a:srgbClr val="4864AA"/>
-                </a:solidFill>
-                <a:effectLst/>
-                <a:latin typeface="Consolas" panose="020B0609020204030204" pitchFamily="49" charset="0"/>
-              </a:rPr>
-              <a:t>eax</a:t>
-            </a:r>
-            <a:r>
-              <a:rPr lang="en-US" b="0" dirty="0">
-                <a:solidFill>
-                  <a:srgbClr val="000000"/>
-                </a:solidFill>
-                <a:effectLst/>
-                <a:latin typeface="Consolas" panose="020B0609020204030204" pitchFamily="49" charset="0"/>
-              </a:rPr>
-              <a:t>, -</a:t>
-            </a:r>
-            <a:r>
-              <a:rPr lang="en-US" b="0" dirty="0">
-                <a:solidFill>
-                  <a:srgbClr val="098658"/>
-                </a:solidFill>
-                <a:effectLst/>
-                <a:latin typeface="Consolas" panose="020B0609020204030204" pitchFamily="49" charset="0"/>
-              </a:rPr>
-              <a:t>2147483648           </a:t>
-            </a:r>
-            <a:r>
-              <a:rPr lang="en-US" b="0" dirty="0">
-                <a:solidFill>
-                  <a:srgbClr val="00B050"/>
-                </a:solidFill>
-                <a:effectLst/>
-                <a:latin typeface="Consolas" panose="020B0609020204030204" pitchFamily="49" charset="0"/>
-              </a:rPr>
-              <a:t># b8 00 00 00 80</a:t>
-            </a:r>
-            <a:endParaRPr lang="en-US" b="0" dirty="0">
-              <a:solidFill>
-                <a:srgbClr val="000000"/>
-              </a:solidFill>
-              <a:effectLst/>
-              <a:latin typeface="Consolas" panose="020B0609020204030204" pitchFamily="49" charset="0"/>
-            </a:endParaRPr>
-          </a:p>
-          <a:p>
-            <a:pPr>
-              <a:buNone/>
-            </a:pPr>
-            <a:r>
-              <a:rPr lang="en-US" b="0" dirty="0">
-                <a:solidFill>
-                  <a:srgbClr val="000000"/>
-                </a:solidFill>
-                <a:effectLst/>
-                <a:latin typeface="Consolas" panose="020B0609020204030204" pitchFamily="49" charset="0"/>
-              </a:rPr>
-              <a:t>  </a:t>
-            </a:r>
-            <a:r>
-              <a:rPr lang="en-US" b="0" dirty="0">
-                <a:solidFill>
-                  <a:srgbClr val="0000FF"/>
-                </a:solidFill>
-                <a:effectLst/>
-                <a:latin typeface="Consolas" panose="020B0609020204030204" pitchFamily="49" charset="0"/>
-              </a:rPr>
-              <a:t>test</a:t>
-            </a:r>
-            <a:r>
-              <a:rPr lang="en-US" b="0" dirty="0">
-                <a:solidFill>
-                  <a:srgbClr val="000000"/>
-                </a:solidFill>
-                <a:effectLst/>
-                <a:latin typeface="Consolas" panose="020B0609020204030204" pitchFamily="49" charset="0"/>
-              </a:rPr>
-              <a:t> </a:t>
-            </a:r>
-            <a:r>
-              <a:rPr lang="en-US" b="0" dirty="0" err="1">
-                <a:solidFill>
-                  <a:srgbClr val="4864AA"/>
-                </a:solidFill>
-                <a:effectLst/>
-                <a:latin typeface="Consolas" panose="020B0609020204030204" pitchFamily="49" charset="0"/>
-              </a:rPr>
-              <a:t>esi</a:t>
-            </a:r>
-            <a:r>
-              <a:rPr lang="en-US" b="0" dirty="0">
-                <a:solidFill>
-                  <a:srgbClr val="000000"/>
-                </a:solidFill>
-                <a:effectLst/>
-                <a:latin typeface="Consolas" panose="020B0609020204030204" pitchFamily="49" charset="0"/>
-              </a:rPr>
-              <a:t>, </a:t>
-            </a:r>
-            <a:r>
-              <a:rPr lang="en-US" b="0" dirty="0" err="1">
-                <a:solidFill>
-                  <a:srgbClr val="4864AA"/>
-                </a:solidFill>
-                <a:effectLst/>
-                <a:latin typeface="Consolas" panose="020B0609020204030204" pitchFamily="49" charset="0"/>
-              </a:rPr>
-              <a:t>esi</a:t>
-            </a:r>
-            <a:r>
-              <a:rPr lang="en-US" b="0" dirty="0">
-                <a:solidFill>
-                  <a:srgbClr val="4864AA"/>
-                </a:solidFill>
-                <a:effectLst/>
-                <a:latin typeface="Consolas" panose="020B0609020204030204" pitchFamily="49" charset="0"/>
-              </a:rPr>
-              <a:t>                  </a:t>
-            </a:r>
-            <a:r>
-              <a:rPr lang="en-US" b="0" dirty="0">
-                <a:solidFill>
-                  <a:srgbClr val="00B050"/>
-                </a:solidFill>
-                <a:effectLst/>
-                <a:latin typeface="Consolas" panose="020B0609020204030204" pitchFamily="49" charset="0"/>
-              </a:rPr>
-              <a:t># 85 f6</a:t>
-            </a:r>
-            <a:endParaRPr lang="en-US" b="0" dirty="0">
-              <a:solidFill>
-                <a:srgbClr val="000000"/>
-              </a:solidFill>
-              <a:effectLst/>
-              <a:latin typeface="Consolas" panose="020B0609020204030204" pitchFamily="49" charset="0"/>
-            </a:endParaRPr>
-          </a:p>
-          <a:p>
-            <a:pPr>
-              <a:buNone/>
-            </a:pPr>
-            <a:r>
-              <a:rPr lang="en-US" b="0" dirty="0">
-                <a:solidFill>
-                  <a:srgbClr val="000000"/>
-                </a:solidFill>
-                <a:effectLst/>
-                <a:latin typeface="Consolas" panose="020B0609020204030204" pitchFamily="49" charset="0"/>
-              </a:rPr>
-              <a:t>  </a:t>
-            </a:r>
-            <a:r>
-              <a:rPr lang="en-US" b="0" dirty="0">
-                <a:solidFill>
-                  <a:srgbClr val="0000FF"/>
-                </a:solidFill>
-                <a:effectLst/>
-                <a:latin typeface="Consolas" panose="020B0609020204030204" pitchFamily="49" charset="0"/>
-              </a:rPr>
-              <a:t>je</a:t>
-            </a:r>
-            <a:r>
-              <a:rPr lang="en-US" b="0" dirty="0">
-                <a:solidFill>
-                  <a:srgbClr val="000000"/>
-                </a:solidFill>
-                <a:effectLst/>
-                <a:latin typeface="Consolas" panose="020B0609020204030204" pitchFamily="49" charset="0"/>
-              </a:rPr>
-              <a:t> </a:t>
-            </a:r>
-            <a:r>
-              <a:rPr lang="en-US" b="0" dirty="0">
-                <a:solidFill>
-                  <a:srgbClr val="008080"/>
-                </a:solidFill>
-                <a:effectLst/>
-                <a:latin typeface="Consolas" panose="020B0609020204030204" pitchFamily="49" charset="0"/>
-              </a:rPr>
-              <a:t>.L1                         </a:t>
-            </a:r>
-            <a:r>
-              <a:rPr lang="en-US" b="0" dirty="0">
-                <a:solidFill>
-                  <a:srgbClr val="00B050"/>
-                </a:solidFill>
-                <a:effectLst/>
-                <a:latin typeface="Consolas" panose="020B0609020204030204" pitchFamily="49" charset="0"/>
-              </a:rPr>
-              <a:t># 74 15</a:t>
-            </a:r>
-          </a:p>
-          <a:p>
-            <a:pPr>
-              <a:buNone/>
-            </a:pPr>
-            <a:r>
-              <a:rPr lang="en-US" b="0" dirty="0">
-                <a:solidFill>
-                  <a:srgbClr val="000000"/>
-                </a:solidFill>
-                <a:effectLst/>
-                <a:latin typeface="Consolas" panose="020B0609020204030204" pitchFamily="49" charset="0"/>
-              </a:rPr>
-              <a:t>  </a:t>
-            </a:r>
-            <a:r>
-              <a:rPr lang="en-US" b="0" dirty="0">
-                <a:solidFill>
-                  <a:srgbClr val="0000FF"/>
-                </a:solidFill>
-                <a:effectLst/>
-                <a:latin typeface="Consolas" panose="020B0609020204030204" pitchFamily="49" charset="0"/>
-              </a:rPr>
-              <a:t>mov</a:t>
-            </a:r>
-            <a:r>
-              <a:rPr lang="en-US" b="0" dirty="0">
-                <a:solidFill>
-                  <a:srgbClr val="000000"/>
-                </a:solidFill>
-                <a:effectLst/>
-                <a:latin typeface="Consolas" panose="020B0609020204030204" pitchFamily="49" charset="0"/>
-              </a:rPr>
-              <a:t> </a:t>
-            </a:r>
-            <a:r>
-              <a:rPr lang="en-US" b="0" dirty="0" err="1">
-                <a:solidFill>
-                  <a:srgbClr val="4864AA"/>
-                </a:solidFill>
-                <a:effectLst/>
-                <a:latin typeface="Consolas" panose="020B0609020204030204" pitchFamily="49" charset="0"/>
-              </a:rPr>
-              <a:t>eax</a:t>
-            </a:r>
-            <a:r>
-              <a:rPr lang="en-US" b="0" dirty="0">
-                <a:solidFill>
-                  <a:srgbClr val="000000"/>
-                </a:solidFill>
-                <a:effectLst/>
-                <a:latin typeface="Consolas" panose="020B0609020204030204" pitchFamily="49" charset="0"/>
-              </a:rPr>
-              <a:t>, </a:t>
-            </a:r>
-            <a:r>
-              <a:rPr lang="en-US" b="0" dirty="0">
-                <a:solidFill>
-                  <a:srgbClr val="808080"/>
-                </a:solidFill>
-                <a:effectLst/>
-                <a:latin typeface="Consolas" panose="020B0609020204030204" pitchFamily="49" charset="0"/>
-              </a:rPr>
-              <a:t>DWORD</a:t>
-            </a:r>
-            <a:r>
-              <a:rPr lang="en-US" b="0" dirty="0">
-                <a:solidFill>
-                  <a:srgbClr val="000000"/>
-                </a:solidFill>
-                <a:effectLst/>
-                <a:latin typeface="Consolas" panose="020B0609020204030204" pitchFamily="49" charset="0"/>
-              </a:rPr>
-              <a:t> </a:t>
-            </a:r>
-            <a:r>
-              <a:rPr lang="en-US" b="0" dirty="0">
-                <a:solidFill>
-                  <a:srgbClr val="808080"/>
-                </a:solidFill>
-                <a:effectLst/>
-                <a:latin typeface="Consolas" panose="020B0609020204030204" pitchFamily="49" charset="0"/>
-              </a:rPr>
-              <a:t>PTR</a:t>
-            </a:r>
-            <a:r>
-              <a:rPr lang="en-US" b="0" dirty="0">
-                <a:solidFill>
-                  <a:srgbClr val="000000"/>
-                </a:solidFill>
-                <a:effectLst/>
-                <a:latin typeface="Consolas" panose="020B0609020204030204" pitchFamily="49" charset="0"/>
-              </a:rPr>
-              <a:t> [</a:t>
-            </a:r>
-            <a:r>
-              <a:rPr lang="en-US" b="0" dirty="0" err="1">
-                <a:solidFill>
-                  <a:srgbClr val="4864AA"/>
-                </a:solidFill>
-                <a:effectLst/>
-                <a:latin typeface="Consolas" panose="020B0609020204030204" pitchFamily="49" charset="0"/>
-              </a:rPr>
-              <a:t>rdi</a:t>
-            </a:r>
-            <a:r>
-              <a:rPr lang="en-US" b="0" dirty="0">
-                <a:solidFill>
-                  <a:srgbClr val="000000"/>
-                </a:solidFill>
-                <a:effectLst/>
-                <a:latin typeface="Consolas" panose="020B0609020204030204" pitchFamily="49" charset="0"/>
-              </a:rPr>
-              <a:t>]       </a:t>
-            </a:r>
-            <a:r>
-              <a:rPr lang="en-US" b="0" dirty="0">
-                <a:solidFill>
-                  <a:srgbClr val="00B050"/>
-                </a:solidFill>
-                <a:effectLst/>
-                <a:latin typeface="Consolas" panose="020B0609020204030204" pitchFamily="49" charset="0"/>
-              </a:rPr>
-              <a:t># 8b 07</a:t>
-            </a:r>
-            <a:endParaRPr lang="en-US" b="0" dirty="0">
-              <a:solidFill>
-                <a:srgbClr val="000000"/>
-              </a:solidFill>
-              <a:effectLst/>
-              <a:latin typeface="Consolas" panose="020B0609020204030204" pitchFamily="49" charset="0"/>
-            </a:endParaRPr>
-          </a:p>
-          <a:p>
-            <a:pPr>
-              <a:buNone/>
-            </a:pPr>
-            <a:r>
-              <a:rPr lang="en-US" b="0" dirty="0">
-                <a:solidFill>
-                  <a:srgbClr val="000000"/>
-                </a:solidFill>
-                <a:effectLst/>
-                <a:latin typeface="Consolas" panose="020B0609020204030204" pitchFamily="49" charset="0"/>
-              </a:rPr>
-              <a:t>  </a:t>
-            </a:r>
-            <a:r>
-              <a:rPr lang="en-US" b="0" dirty="0" err="1">
-                <a:solidFill>
-                  <a:srgbClr val="0000FF"/>
-                </a:solidFill>
-                <a:effectLst/>
-                <a:latin typeface="Consolas" panose="020B0609020204030204" pitchFamily="49" charset="0"/>
-              </a:rPr>
-              <a:t>xor</a:t>
-            </a:r>
-            <a:r>
-              <a:rPr lang="en-US" b="0" dirty="0">
-                <a:solidFill>
-                  <a:srgbClr val="000000"/>
-                </a:solidFill>
-                <a:effectLst/>
-                <a:latin typeface="Consolas" panose="020B0609020204030204" pitchFamily="49" charset="0"/>
-              </a:rPr>
-              <a:t> </a:t>
-            </a:r>
-            <a:r>
-              <a:rPr lang="en-US" b="0" dirty="0" err="1">
-                <a:solidFill>
-                  <a:srgbClr val="4864AA"/>
-                </a:solidFill>
-                <a:effectLst/>
-                <a:latin typeface="Consolas" panose="020B0609020204030204" pitchFamily="49" charset="0"/>
-              </a:rPr>
-              <a:t>edx</a:t>
-            </a:r>
-            <a:r>
-              <a:rPr lang="en-US" b="0" dirty="0">
-                <a:solidFill>
-                  <a:srgbClr val="000000"/>
-                </a:solidFill>
-                <a:effectLst/>
-                <a:latin typeface="Consolas" panose="020B0609020204030204" pitchFamily="49" charset="0"/>
-              </a:rPr>
-              <a:t>, </a:t>
-            </a:r>
-            <a:r>
-              <a:rPr lang="en-US" b="0" dirty="0" err="1">
-                <a:solidFill>
-                  <a:srgbClr val="4864AA"/>
-                </a:solidFill>
-                <a:effectLst/>
-                <a:latin typeface="Consolas" panose="020B0609020204030204" pitchFamily="49" charset="0"/>
-              </a:rPr>
-              <a:t>edx</a:t>
-            </a:r>
-            <a:r>
-              <a:rPr lang="en-US" b="0" dirty="0">
-                <a:solidFill>
-                  <a:srgbClr val="4864AA"/>
-                </a:solidFill>
-                <a:effectLst/>
-                <a:latin typeface="Consolas" panose="020B0609020204030204" pitchFamily="49" charset="0"/>
-              </a:rPr>
-              <a:t>                   </a:t>
-            </a:r>
-            <a:r>
-              <a:rPr lang="en-US" dirty="0">
-                <a:solidFill>
-                  <a:srgbClr val="00B050"/>
-                </a:solidFill>
-                <a:latin typeface="Consolas" panose="020B0609020204030204" pitchFamily="49" charset="0"/>
-              </a:rPr>
-              <a:t># 31 d2</a:t>
-            </a:r>
-            <a:endParaRPr lang="en-US" b="0" dirty="0">
-              <a:solidFill>
-                <a:srgbClr val="000000"/>
-              </a:solidFill>
-              <a:effectLst/>
-              <a:latin typeface="Consolas" panose="020B0609020204030204" pitchFamily="49" charset="0"/>
-            </a:endParaRPr>
-          </a:p>
-          <a:p>
-            <a:pPr>
-              <a:buNone/>
-            </a:pPr>
-            <a:r>
-              <a:rPr lang="en-US" b="0" dirty="0">
-                <a:solidFill>
-                  <a:srgbClr val="0000FF"/>
-                </a:solidFill>
-                <a:effectLst/>
-                <a:latin typeface="Consolas" panose="020B0609020204030204" pitchFamily="49" charset="0"/>
-              </a:rPr>
-              <a:t>.L3</a:t>
-            </a:r>
-            <a:r>
-              <a:rPr lang="en-US" b="0" dirty="0">
-                <a:solidFill>
-                  <a:srgbClr val="000000"/>
-                </a:solidFill>
-                <a:effectLst/>
-                <a:latin typeface="Consolas" panose="020B0609020204030204" pitchFamily="49" charset="0"/>
-              </a:rPr>
-              <a:t>:</a:t>
-            </a:r>
-          </a:p>
-          <a:p>
-            <a:pPr>
-              <a:buNone/>
-            </a:pPr>
-            <a:r>
-              <a:rPr lang="en-US" b="0" dirty="0">
-                <a:solidFill>
-                  <a:srgbClr val="000000"/>
-                </a:solidFill>
-                <a:effectLst/>
-                <a:latin typeface="Consolas" panose="020B0609020204030204" pitchFamily="49" charset="0"/>
-              </a:rPr>
-              <a:t>  </a:t>
-            </a:r>
-            <a:r>
-              <a:rPr lang="en-US" b="0" dirty="0" err="1">
-                <a:solidFill>
-                  <a:srgbClr val="0000FF"/>
-                </a:solidFill>
-                <a:effectLst/>
-                <a:latin typeface="Consolas" panose="020B0609020204030204" pitchFamily="49" charset="0"/>
-              </a:rPr>
-              <a:t>inc</a:t>
-            </a:r>
-            <a:r>
-              <a:rPr lang="en-US" b="0" dirty="0">
-                <a:solidFill>
-                  <a:srgbClr val="000000"/>
-                </a:solidFill>
-                <a:effectLst/>
-                <a:latin typeface="Consolas" panose="020B0609020204030204" pitchFamily="49" charset="0"/>
-              </a:rPr>
-              <a:t> </a:t>
-            </a:r>
-            <a:r>
-              <a:rPr lang="en-US" b="0" dirty="0" err="1">
-                <a:solidFill>
-                  <a:srgbClr val="4864AA"/>
-                </a:solidFill>
-                <a:effectLst/>
-                <a:latin typeface="Consolas" panose="020B0609020204030204" pitchFamily="49" charset="0"/>
-              </a:rPr>
-              <a:t>rdx</a:t>
-            </a:r>
-            <a:r>
-              <a:rPr lang="en-US" b="0" dirty="0">
-                <a:solidFill>
-                  <a:srgbClr val="4864AA"/>
-                </a:solidFill>
-                <a:effectLst/>
-                <a:latin typeface="Consolas" panose="020B0609020204030204" pitchFamily="49" charset="0"/>
-              </a:rPr>
-              <a:t>                        </a:t>
-            </a:r>
-            <a:r>
-              <a:rPr lang="en-US" b="0" dirty="0">
-                <a:solidFill>
-                  <a:srgbClr val="00B050"/>
-                </a:solidFill>
-                <a:effectLst/>
-                <a:latin typeface="Consolas" panose="020B0609020204030204" pitchFamily="49" charset="0"/>
-              </a:rPr>
-              <a:t># 48 ff c2</a:t>
-            </a:r>
-            <a:endParaRPr lang="en-US" b="0" dirty="0">
-              <a:solidFill>
-                <a:srgbClr val="000000"/>
-              </a:solidFill>
-              <a:effectLst/>
-              <a:latin typeface="Consolas" panose="020B0609020204030204" pitchFamily="49" charset="0"/>
-            </a:endParaRPr>
-          </a:p>
-          <a:p>
-            <a:pPr>
-              <a:buNone/>
-            </a:pPr>
-            <a:r>
-              <a:rPr lang="en-US" b="0" dirty="0">
-                <a:solidFill>
-                  <a:srgbClr val="000000"/>
-                </a:solidFill>
-                <a:effectLst/>
-                <a:latin typeface="Consolas" panose="020B0609020204030204" pitchFamily="49" charset="0"/>
-              </a:rPr>
-              <a:t>  </a:t>
-            </a:r>
-            <a:r>
-              <a:rPr lang="en-US" b="0" dirty="0" err="1">
-                <a:solidFill>
-                  <a:srgbClr val="0000FF"/>
-                </a:solidFill>
-                <a:effectLst/>
-                <a:latin typeface="Consolas" panose="020B0609020204030204" pitchFamily="49" charset="0"/>
-              </a:rPr>
-              <a:t>cmp</a:t>
-            </a:r>
-            <a:r>
-              <a:rPr lang="en-US" b="0" dirty="0">
-                <a:solidFill>
-                  <a:srgbClr val="000000"/>
-                </a:solidFill>
-                <a:effectLst/>
-                <a:latin typeface="Consolas" panose="020B0609020204030204" pitchFamily="49" charset="0"/>
-              </a:rPr>
-              <a:t> </a:t>
-            </a:r>
-            <a:r>
-              <a:rPr lang="en-US" b="0" dirty="0" err="1">
-                <a:solidFill>
-                  <a:srgbClr val="4864AA"/>
-                </a:solidFill>
-                <a:effectLst/>
-                <a:latin typeface="Consolas" panose="020B0609020204030204" pitchFamily="49" charset="0"/>
-              </a:rPr>
-              <a:t>esi</a:t>
-            </a:r>
-            <a:r>
-              <a:rPr lang="en-US" b="0" dirty="0">
-                <a:solidFill>
-                  <a:srgbClr val="000000"/>
-                </a:solidFill>
-                <a:effectLst/>
-                <a:latin typeface="Consolas" panose="020B0609020204030204" pitchFamily="49" charset="0"/>
-              </a:rPr>
-              <a:t>, </a:t>
-            </a:r>
-            <a:r>
-              <a:rPr lang="en-US" b="0" dirty="0" err="1">
-                <a:solidFill>
-                  <a:srgbClr val="4864AA"/>
-                </a:solidFill>
-                <a:effectLst/>
-                <a:latin typeface="Consolas" panose="020B0609020204030204" pitchFamily="49" charset="0"/>
-              </a:rPr>
-              <a:t>edx</a:t>
-            </a:r>
-            <a:r>
-              <a:rPr lang="en-US" b="0" dirty="0">
-                <a:solidFill>
-                  <a:srgbClr val="4864AA"/>
-                </a:solidFill>
-                <a:effectLst/>
-                <a:latin typeface="Consolas" panose="020B0609020204030204" pitchFamily="49" charset="0"/>
-              </a:rPr>
-              <a:t>                   </a:t>
-            </a:r>
-            <a:r>
-              <a:rPr lang="en-US" b="0" dirty="0">
-                <a:solidFill>
-                  <a:srgbClr val="00B050"/>
-                </a:solidFill>
-                <a:effectLst/>
-                <a:latin typeface="Consolas" panose="020B0609020204030204" pitchFamily="49" charset="0"/>
-              </a:rPr>
-              <a:t># 39 d6</a:t>
-            </a:r>
-            <a:endParaRPr lang="en-US" b="0" dirty="0">
-              <a:solidFill>
-                <a:srgbClr val="000000"/>
-              </a:solidFill>
-              <a:effectLst/>
-              <a:latin typeface="Consolas" panose="020B0609020204030204" pitchFamily="49" charset="0"/>
-            </a:endParaRPr>
-          </a:p>
-          <a:p>
-            <a:pPr>
-              <a:buNone/>
-            </a:pPr>
-            <a:r>
-              <a:rPr lang="en-US" b="0" dirty="0">
-                <a:solidFill>
-                  <a:srgbClr val="000000"/>
-                </a:solidFill>
-                <a:effectLst/>
-                <a:latin typeface="Consolas" panose="020B0609020204030204" pitchFamily="49" charset="0"/>
-              </a:rPr>
-              <a:t>  </a:t>
-            </a:r>
-            <a:r>
-              <a:rPr lang="en-US" b="0" dirty="0" err="1">
-                <a:solidFill>
-                  <a:srgbClr val="0000FF"/>
-                </a:solidFill>
-                <a:effectLst/>
-                <a:latin typeface="Consolas" panose="020B0609020204030204" pitchFamily="49" charset="0"/>
-              </a:rPr>
-              <a:t>jle</a:t>
-            </a:r>
-            <a:r>
-              <a:rPr lang="en-US" b="0" dirty="0">
-                <a:solidFill>
-                  <a:srgbClr val="000000"/>
-                </a:solidFill>
-                <a:effectLst/>
-                <a:latin typeface="Consolas" panose="020B0609020204030204" pitchFamily="49" charset="0"/>
-              </a:rPr>
-              <a:t> </a:t>
-            </a:r>
-            <a:r>
-              <a:rPr lang="en-US" b="0" dirty="0">
-                <a:solidFill>
-                  <a:srgbClr val="008080"/>
-                </a:solidFill>
-                <a:effectLst/>
-                <a:latin typeface="Consolas" panose="020B0609020204030204" pitchFamily="49" charset="0"/>
-              </a:rPr>
-              <a:t>.L1                        </a:t>
-            </a:r>
-            <a:r>
-              <a:rPr lang="en-US" b="0" dirty="0">
-                <a:solidFill>
-                  <a:srgbClr val="00B050"/>
-                </a:solidFill>
-                <a:effectLst/>
-                <a:latin typeface="Consolas" panose="020B0609020204030204" pitchFamily="49" charset="0"/>
-              </a:rPr>
-              <a:t># 7e 0a</a:t>
-            </a:r>
-          </a:p>
-          <a:p>
-            <a:pPr>
-              <a:buNone/>
-            </a:pPr>
-            <a:r>
-              <a:rPr lang="en-US" b="0" dirty="0">
-                <a:solidFill>
-                  <a:srgbClr val="000000"/>
-                </a:solidFill>
-                <a:effectLst/>
-                <a:latin typeface="Consolas" panose="020B0609020204030204" pitchFamily="49" charset="0"/>
-              </a:rPr>
-              <a:t>  </a:t>
-            </a:r>
-            <a:r>
-              <a:rPr lang="en-US" b="0" dirty="0">
-                <a:solidFill>
-                  <a:srgbClr val="0000FF"/>
-                </a:solidFill>
-                <a:effectLst/>
-                <a:latin typeface="Consolas" panose="020B0609020204030204" pitchFamily="49" charset="0"/>
-              </a:rPr>
-              <a:t>mov</a:t>
-            </a:r>
-            <a:r>
-              <a:rPr lang="en-US" b="0" dirty="0">
-                <a:solidFill>
-                  <a:srgbClr val="000000"/>
-                </a:solidFill>
-                <a:effectLst/>
-                <a:latin typeface="Consolas" panose="020B0609020204030204" pitchFamily="49" charset="0"/>
-              </a:rPr>
-              <a:t> </a:t>
-            </a:r>
-            <a:r>
-              <a:rPr lang="en-US" b="0" dirty="0" err="1">
-                <a:solidFill>
-                  <a:srgbClr val="4864AA"/>
-                </a:solidFill>
-                <a:effectLst/>
-                <a:latin typeface="Consolas" panose="020B0609020204030204" pitchFamily="49" charset="0"/>
-              </a:rPr>
-              <a:t>ecx</a:t>
-            </a:r>
-            <a:r>
-              <a:rPr lang="en-US" b="0" dirty="0">
-                <a:solidFill>
-                  <a:srgbClr val="000000"/>
-                </a:solidFill>
-                <a:effectLst/>
-                <a:latin typeface="Consolas" panose="020B0609020204030204" pitchFamily="49" charset="0"/>
-              </a:rPr>
-              <a:t>, </a:t>
-            </a:r>
-            <a:r>
-              <a:rPr lang="en-US" b="0" dirty="0">
-                <a:solidFill>
-                  <a:srgbClr val="808080"/>
-                </a:solidFill>
-                <a:effectLst/>
-                <a:latin typeface="Consolas" panose="020B0609020204030204" pitchFamily="49" charset="0"/>
-              </a:rPr>
-              <a:t>DWORD</a:t>
-            </a:r>
-            <a:r>
-              <a:rPr lang="en-US" b="0" dirty="0">
-                <a:solidFill>
-                  <a:srgbClr val="000000"/>
-                </a:solidFill>
-                <a:effectLst/>
-                <a:latin typeface="Consolas" panose="020B0609020204030204" pitchFamily="49" charset="0"/>
-              </a:rPr>
-              <a:t> </a:t>
-            </a:r>
-            <a:r>
-              <a:rPr lang="en-US" b="0" dirty="0">
-                <a:solidFill>
-                  <a:srgbClr val="808080"/>
-                </a:solidFill>
-                <a:effectLst/>
-                <a:latin typeface="Consolas" panose="020B0609020204030204" pitchFamily="49" charset="0"/>
-              </a:rPr>
-              <a:t>PTR</a:t>
-            </a:r>
-            <a:r>
-              <a:rPr lang="en-US" b="0" dirty="0">
-                <a:solidFill>
-                  <a:srgbClr val="000000"/>
-                </a:solidFill>
-                <a:effectLst/>
-                <a:latin typeface="Consolas" panose="020B0609020204030204" pitchFamily="49" charset="0"/>
-              </a:rPr>
-              <a:t> [</a:t>
-            </a:r>
-            <a:r>
-              <a:rPr lang="en-US" b="0" dirty="0" err="1">
-                <a:solidFill>
-                  <a:srgbClr val="4864AA"/>
-                </a:solidFill>
-                <a:effectLst/>
-                <a:latin typeface="Consolas" panose="020B0609020204030204" pitchFamily="49" charset="0"/>
-              </a:rPr>
-              <a:t>rdi</a:t>
-            </a:r>
-            <a:r>
-              <a:rPr lang="en-US" b="0" dirty="0" err="1">
-                <a:solidFill>
-                  <a:srgbClr val="000000"/>
-                </a:solidFill>
-                <a:effectLst/>
-                <a:latin typeface="Consolas" panose="020B0609020204030204" pitchFamily="49" charset="0"/>
-              </a:rPr>
-              <a:t>+</a:t>
-            </a:r>
-            <a:r>
-              <a:rPr lang="en-US" b="0" dirty="0" err="1">
-                <a:solidFill>
-                  <a:srgbClr val="4864AA"/>
-                </a:solidFill>
-                <a:effectLst/>
-                <a:latin typeface="Consolas" panose="020B0609020204030204" pitchFamily="49" charset="0"/>
-              </a:rPr>
-              <a:t>rdx</a:t>
-            </a:r>
-            <a:r>
-              <a:rPr lang="en-US" b="0" dirty="0">
-                <a:solidFill>
-                  <a:srgbClr val="000000"/>
-                </a:solidFill>
-                <a:effectLst/>
-                <a:latin typeface="Consolas" panose="020B0609020204030204" pitchFamily="49" charset="0"/>
-              </a:rPr>
-              <a:t>*</a:t>
-            </a:r>
-            <a:r>
-              <a:rPr lang="en-US" b="0" dirty="0">
-                <a:solidFill>
-                  <a:srgbClr val="098658"/>
-                </a:solidFill>
-                <a:effectLst/>
-                <a:latin typeface="Consolas" panose="020B0609020204030204" pitchFamily="49" charset="0"/>
-              </a:rPr>
-              <a:t>4</a:t>
-            </a:r>
-            <a:r>
-              <a:rPr lang="en-US" b="0" dirty="0">
-                <a:solidFill>
-                  <a:srgbClr val="000000"/>
-                </a:solidFill>
-                <a:effectLst/>
-                <a:latin typeface="Consolas" panose="020B0609020204030204" pitchFamily="49" charset="0"/>
-              </a:rPr>
-              <a:t>] </a:t>
-            </a:r>
-            <a:r>
-              <a:rPr lang="en-US" b="0" dirty="0">
-                <a:solidFill>
-                  <a:srgbClr val="00B050"/>
-                </a:solidFill>
-                <a:effectLst/>
-                <a:latin typeface="Consolas" panose="020B0609020204030204" pitchFamily="49" charset="0"/>
-              </a:rPr>
-              <a:t># 8b 0c 97</a:t>
-            </a:r>
-            <a:endParaRPr lang="en-US" b="0" dirty="0">
-              <a:solidFill>
-                <a:srgbClr val="000000"/>
-              </a:solidFill>
-              <a:effectLst/>
-              <a:latin typeface="Consolas" panose="020B0609020204030204" pitchFamily="49" charset="0"/>
-            </a:endParaRPr>
-          </a:p>
-          <a:p>
-            <a:pPr>
-              <a:buNone/>
-            </a:pPr>
-            <a:r>
-              <a:rPr lang="en-US" b="0" dirty="0">
-                <a:solidFill>
-                  <a:srgbClr val="000000"/>
-                </a:solidFill>
-                <a:effectLst/>
-                <a:latin typeface="Consolas" panose="020B0609020204030204" pitchFamily="49" charset="0"/>
-              </a:rPr>
-              <a:t>  </a:t>
-            </a:r>
-            <a:r>
-              <a:rPr lang="en-US" b="0" dirty="0" err="1">
-                <a:solidFill>
-                  <a:srgbClr val="0000FF"/>
-                </a:solidFill>
-                <a:effectLst/>
-                <a:latin typeface="Consolas" panose="020B0609020204030204" pitchFamily="49" charset="0"/>
-              </a:rPr>
-              <a:t>cmp</a:t>
-            </a:r>
-            <a:r>
-              <a:rPr lang="en-US" b="0" dirty="0">
-                <a:solidFill>
-                  <a:srgbClr val="000000"/>
-                </a:solidFill>
-                <a:effectLst/>
-                <a:latin typeface="Consolas" panose="020B0609020204030204" pitchFamily="49" charset="0"/>
-              </a:rPr>
-              <a:t> </a:t>
-            </a:r>
-            <a:r>
-              <a:rPr lang="en-US" b="0" dirty="0" err="1">
-                <a:solidFill>
-                  <a:srgbClr val="4864AA"/>
-                </a:solidFill>
-                <a:effectLst/>
-                <a:latin typeface="Consolas" panose="020B0609020204030204" pitchFamily="49" charset="0"/>
-              </a:rPr>
-              <a:t>eax</a:t>
-            </a:r>
-            <a:r>
-              <a:rPr lang="en-US" b="0" dirty="0">
-                <a:solidFill>
-                  <a:srgbClr val="000000"/>
-                </a:solidFill>
-                <a:effectLst/>
-                <a:latin typeface="Consolas" panose="020B0609020204030204" pitchFamily="49" charset="0"/>
-              </a:rPr>
-              <a:t>, </a:t>
-            </a:r>
-            <a:r>
-              <a:rPr lang="en-US" b="0" dirty="0" err="1">
-                <a:solidFill>
-                  <a:srgbClr val="4864AA"/>
-                </a:solidFill>
-                <a:effectLst/>
-                <a:latin typeface="Consolas" panose="020B0609020204030204" pitchFamily="49" charset="0"/>
-              </a:rPr>
-              <a:t>ecx</a:t>
-            </a:r>
-            <a:r>
-              <a:rPr lang="en-US" b="0" dirty="0">
-                <a:solidFill>
-                  <a:srgbClr val="4864AA"/>
-                </a:solidFill>
-                <a:effectLst/>
-                <a:latin typeface="Consolas" panose="020B0609020204030204" pitchFamily="49" charset="0"/>
-              </a:rPr>
-              <a:t>                   </a:t>
-            </a:r>
-            <a:r>
-              <a:rPr lang="en-US" b="0" dirty="0">
-                <a:solidFill>
-                  <a:srgbClr val="00B050"/>
-                </a:solidFill>
-                <a:effectLst/>
-                <a:latin typeface="Consolas" panose="020B0609020204030204" pitchFamily="49" charset="0"/>
-              </a:rPr>
-              <a:t># 39 c8</a:t>
-            </a:r>
-            <a:endParaRPr lang="en-US" b="0" dirty="0">
-              <a:solidFill>
-                <a:srgbClr val="000000"/>
-              </a:solidFill>
-              <a:effectLst/>
-              <a:latin typeface="Consolas" panose="020B0609020204030204" pitchFamily="49" charset="0"/>
-            </a:endParaRPr>
-          </a:p>
-          <a:p>
-            <a:pPr>
-              <a:buNone/>
-            </a:pPr>
-            <a:r>
-              <a:rPr lang="en-US" b="0" dirty="0">
-                <a:solidFill>
-                  <a:srgbClr val="000000"/>
-                </a:solidFill>
-                <a:effectLst/>
-                <a:latin typeface="Consolas" panose="020B0609020204030204" pitchFamily="49" charset="0"/>
-              </a:rPr>
-              <a:t>  </a:t>
-            </a:r>
-            <a:r>
-              <a:rPr lang="en-US" b="0" dirty="0" err="1">
-                <a:solidFill>
-                  <a:srgbClr val="0000FF"/>
-                </a:solidFill>
-                <a:effectLst/>
-                <a:latin typeface="Consolas" panose="020B0609020204030204" pitchFamily="49" charset="0"/>
-              </a:rPr>
-              <a:t>cmovl</a:t>
-            </a:r>
-            <a:r>
-              <a:rPr lang="en-US" b="0" dirty="0">
-                <a:solidFill>
-                  <a:srgbClr val="000000"/>
-                </a:solidFill>
-                <a:effectLst/>
-                <a:latin typeface="Consolas" panose="020B0609020204030204" pitchFamily="49" charset="0"/>
-              </a:rPr>
-              <a:t> </a:t>
-            </a:r>
-            <a:r>
-              <a:rPr lang="en-US" b="0" dirty="0" err="1">
-                <a:solidFill>
-                  <a:srgbClr val="4864AA"/>
-                </a:solidFill>
-                <a:effectLst/>
-                <a:latin typeface="Consolas" panose="020B0609020204030204" pitchFamily="49" charset="0"/>
-              </a:rPr>
-              <a:t>eax</a:t>
-            </a:r>
-            <a:r>
-              <a:rPr lang="en-US" b="0" dirty="0">
-                <a:solidFill>
-                  <a:srgbClr val="000000"/>
-                </a:solidFill>
-                <a:effectLst/>
-                <a:latin typeface="Consolas" panose="020B0609020204030204" pitchFamily="49" charset="0"/>
-              </a:rPr>
-              <a:t>, </a:t>
-            </a:r>
-            <a:r>
-              <a:rPr lang="en-US" b="0" dirty="0" err="1">
-                <a:solidFill>
-                  <a:srgbClr val="4864AA"/>
-                </a:solidFill>
-                <a:effectLst/>
-                <a:latin typeface="Consolas" panose="020B0609020204030204" pitchFamily="49" charset="0"/>
-              </a:rPr>
-              <a:t>ecx</a:t>
-            </a:r>
-            <a:r>
-              <a:rPr lang="en-US" b="0" dirty="0">
-                <a:solidFill>
-                  <a:srgbClr val="4864AA"/>
-                </a:solidFill>
-                <a:effectLst/>
-                <a:latin typeface="Consolas" panose="020B0609020204030204" pitchFamily="49" charset="0"/>
-              </a:rPr>
-              <a:t>                 </a:t>
-            </a:r>
-            <a:r>
-              <a:rPr lang="en-US" b="0" dirty="0">
-                <a:solidFill>
-                  <a:srgbClr val="00B050"/>
-                </a:solidFill>
-                <a:effectLst/>
-                <a:latin typeface="Consolas" panose="020B0609020204030204" pitchFamily="49" charset="0"/>
-              </a:rPr>
-              <a:t># 0f 4c c1</a:t>
-            </a:r>
-            <a:endParaRPr lang="en-US" b="0" dirty="0">
-              <a:solidFill>
-                <a:srgbClr val="000000"/>
-              </a:solidFill>
-              <a:effectLst/>
-              <a:latin typeface="Consolas" panose="020B0609020204030204" pitchFamily="49" charset="0"/>
-            </a:endParaRPr>
-          </a:p>
-          <a:p>
-            <a:pPr>
-              <a:buNone/>
-            </a:pPr>
-            <a:r>
-              <a:rPr lang="en-US" b="0" dirty="0">
-                <a:solidFill>
-                  <a:srgbClr val="000000"/>
-                </a:solidFill>
-                <a:effectLst/>
-                <a:latin typeface="Consolas" panose="020B0609020204030204" pitchFamily="49" charset="0"/>
-              </a:rPr>
-              <a:t>  </a:t>
-            </a:r>
-            <a:r>
-              <a:rPr lang="en-US" b="0" dirty="0" err="1">
-                <a:solidFill>
-                  <a:srgbClr val="0000FF"/>
-                </a:solidFill>
-                <a:effectLst/>
-                <a:latin typeface="Consolas" panose="020B0609020204030204" pitchFamily="49" charset="0"/>
-              </a:rPr>
-              <a:t>jmp</a:t>
-            </a:r>
-            <a:r>
-              <a:rPr lang="en-US" b="0" dirty="0">
-                <a:solidFill>
-                  <a:srgbClr val="000000"/>
-                </a:solidFill>
-                <a:effectLst/>
-                <a:latin typeface="Consolas" panose="020B0609020204030204" pitchFamily="49" charset="0"/>
-              </a:rPr>
-              <a:t> </a:t>
-            </a:r>
-            <a:r>
-              <a:rPr lang="en-US" b="0" dirty="0">
-                <a:solidFill>
-                  <a:srgbClr val="008080"/>
-                </a:solidFill>
-                <a:effectLst/>
-                <a:latin typeface="Consolas" panose="020B0609020204030204" pitchFamily="49" charset="0"/>
-              </a:rPr>
-              <a:t>.L3                        </a:t>
-            </a:r>
-            <a:r>
-              <a:rPr lang="en-US" dirty="0">
-                <a:solidFill>
-                  <a:srgbClr val="00B050"/>
-                </a:solidFill>
-                <a:latin typeface="Consolas" panose="020B0609020204030204" pitchFamily="49" charset="0"/>
-              </a:rPr>
-              <a:t># </a:t>
-            </a:r>
-            <a:r>
-              <a:rPr lang="en-US" dirty="0" err="1">
-                <a:solidFill>
-                  <a:srgbClr val="00B050"/>
-                </a:solidFill>
-                <a:latin typeface="Consolas" panose="020B0609020204030204" pitchFamily="49" charset="0"/>
-              </a:rPr>
-              <a:t>eb</a:t>
-            </a:r>
-            <a:r>
-              <a:rPr lang="en-US" dirty="0">
-                <a:solidFill>
-                  <a:srgbClr val="00B050"/>
-                </a:solidFill>
-                <a:latin typeface="Consolas" panose="020B0609020204030204" pitchFamily="49" charset="0"/>
-              </a:rPr>
-              <a:t> </a:t>
-            </a:r>
-            <a:r>
-              <a:rPr lang="en-US" dirty="0" err="1">
-                <a:solidFill>
-                  <a:srgbClr val="00B050"/>
-                </a:solidFill>
-                <a:latin typeface="Consolas" panose="020B0609020204030204" pitchFamily="49" charset="0"/>
-              </a:rPr>
-              <a:t>ef</a:t>
-            </a:r>
-            <a:endParaRPr lang="en-US" b="0" dirty="0">
-              <a:solidFill>
-                <a:srgbClr val="000000"/>
-              </a:solidFill>
-              <a:effectLst/>
-              <a:latin typeface="Consolas" panose="020B0609020204030204" pitchFamily="49" charset="0"/>
-            </a:endParaRPr>
-          </a:p>
-          <a:p>
-            <a:pPr>
-              <a:buNone/>
-            </a:pPr>
-            <a:r>
-              <a:rPr lang="en-US" b="0" dirty="0">
-                <a:solidFill>
-                  <a:srgbClr val="0000FF"/>
-                </a:solidFill>
-                <a:effectLst/>
-                <a:latin typeface="Consolas" panose="020B0609020204030204" pitchFamily="49" charset="0"/>
-              </a:rPr>
-              <a:t>.L1</a:t>
-            </a:r>
-            <a:r>
-              <a:rPr lang="en-US" b="0" dirty="0">
-                <a:solidFill>
-                  <a:srgbClr val="000000"/>
-                </a:solidFill>
-                <a:effectLst/>
-                <a:latin typeface="Consolas" panose="020B0609020204030204" pitchFamily="49" charset="0"/>
-              </a:rPr>
-              <a:t>:</a:t>
-            </a:r>
-          </a:p>
-          <a:p>
-            <a:pPr>
-              <a:buNone/>
-            </a:pPr>
-            <a:r>
-              <a:rPr lang="en-US" b="0" dirty="0">
-                <a:solidFill>
-                  <a:srgbClr val="000000"/>
-                </a:solidFill>
-                <a:effectLst/>
-                <a:latin typeface="Consolas" panose="020B0609020204030204" pitchFamily="49" charset="0"/>
-              </a:rPr>
-              <a:t>  </a:t>
-            </a:r>
-            <a:r>
-              <a:rPr lang="en-US" b="0" dirty="0">
-                <a:solidFill>
-                  <a:srgbClr val="0000FF"/>
-                </a:solidFill>
-                <a:effectLst/>
-                <a:latin typeface="Consolas" panose="020B0609020204030204" pitchFamily="49" charset="0"/>
-              </a:rPr>
-              <a:t>ret                            </a:t>
-            </a:r>
-            <a:r>
-              <a:rPr lang="en-US" b="0" dirty="0">
-                <a:solidFill>
-                  <a:srgbClr val="00B050"/>
-                </a:solidFill>
-                <a:effectLst/>
-                <a:latin typeface="Consolas" panose="020B0609020204030204" pitchFamily="49" charset="0"/>
-              </a:rPr>
-              <a:t># c3</a:t>
-            </a:r>
-            <a:endParaRPr lang="en-US" b="0" dirty="0">
-              <a:solidFill>
-                <a:srgbClr val="000000"/>
-              </a:solidFill>
-              <a:effectLst/>
-              <a:latin typeface="Consolas" panose="020B0609020204030204" pitchFamily="49" charset="0"/>
-            </a:endParaRPr>
-          </a:p>
-        </p:txBody>
-      </p:sp>
-      <p:sp>
-        <p:nvSpPr>
-          <p:cNvPr id="19" name="TextBox 18">
-            <a:extLst>
-              <a:ext uri="{FF2B5EF4-FFF2-40B4-BE49-F238E27FC236}">
-                <a16:creationId xmlns:a16="http://schemas.microsoft.com/office/drawing/2014/main" id="{6096FFB2-21F1-898B-168A-CB802B7B410E}"/>
-              </a:ext>
-            </a:extLst>
-          </p:cNvPr>
-          <p:cNvSpPr txBox="1"/>
-          <p:nvPr/>
-        </p:nvSpPr>
-        <p:spPr>
-          <a:xfrm>
-            <a:off x="838200" y="6394003"/>
-            <a:ext cx="4947458" cy="369332"/>
-          </a:xfrm>
-          <a:prstGeom prst="rect">
-            <a:avLst/>
-          </a:prstGeom>
-          <a:noFill/>
-        </p:spPr>
-        <p:txBody>
-          <a:bodyPr wrap="square">
-            <a:spAutoFit/>
-          </a:bodyPr>
-          <a:lstStyle/>
-          <a:p>
-            <a:r>
-              <a:rPr lang="en-US" dirty="0">
-                <a:hlinkClick r:id="rId3"/>
-              </a:rPr>
-              <a:t>https://godbolt.org/z/rfjq9ov3c</a:t>
-            </a:r>
-            <a:endParaRPr lang="en-US" dirty="0"/>
+            <a:r>
+              <a:rPr lang="ru-RU" b="1" dirty="0"/>
+              <a:t>Программа для микропроцессора — </a:t>
+            </a:r>
+            <a:r>
+              <a:rPr lang="ru-RU" dirty="0"/>
+              <a:t>последовательность </a:t>
+            </a:r>
+            <a:r>
+              <a:rPr lang="ru-RU" b="1" dirty="0"/>
+              <a:t>машинных инструкций</a:t>
+            </a:r>
+            <a:r>
+              <a:rPr lang="ru-RU" dirty="0"/>
+              <a:t>, которые расположены в </a:t>
+            </a:r>
+            <a:r>
+              <a:rPr lang="ru-RU" b="1" dirty="0"/>
+              <a:t>памяти</a:t>
+            </a:r>
+            <a:r>
+              <a:rPr lang="ru-RU" dirty="0"/>
+              <a:t> и выполняются по шагам</a:t>
+            </a:r>
+          </a:p>
+          <a:p>
+            <a:r>
+              <a:rPr lang="ru-RU" b="1" dirty="0"/>
+              <a:t>Каждая инструкция определяет: </a:t>
+            </a:r>
+            <a:r>
+              <a:rPr lang="ru-RU" dirty="0"/>
+              <a:t>что сделать (операцию), с какими данными, и откуда взять следующую инструкцию</a:t>
+            </a:r>
+          </a:p>
+          <a:p>
+            <a:r>
+              <a:rPr lang="ru-RU" dirty="0"/>
+              <a:t>Процессор </a:t>
+            </a:r>
+            <a:r>
+              <a:rPr lang="ru-RU" b="1" dirty="0"/>
+              <a:t>не понимает</a:t>
+            </a:r>
+            <a:r>
+              <a:rPr lang="ru-RU" dirty="0"/>
+              <a:t> C, Python и т. д. он выполняет только </a:t>
+            </a:r>
+            <a:r>
+              <a:rPr lang="ru-RU" b="1" dirty="0"/>
+              <a:t>двоичный машинный код </a:t>
+            </a:r>
+            <a:endParaRPr lang="ru-RU" dirty="0"/>
+          </a:p>
+          <a:p>
+            <a:pPr lvl="1"/>
+            <a:r>
+              <a:rPr lang="ru-RU" dirty="0"/>
+              <a:t>C и ассемблер — способы </a:t>
+            </a:r>
+            <a:r>
+              <a:rPr lang="ru-RU" i="1" dirty="0"/>
+              <a:t>описать</a:t>
+            </a:r>
+            <a:r>
+              <a:rPr lang="ru-RU" dirty="0"/>
+              <a:t> этот код</a:t>
+            </a:r>
           </a:p>
         </p:txBody>
       </p:sp>
     </p:spTree>
     <p:extLst>
       <p:ext uri="{BB962C8B-B14F-4D97-AF65-F5344CB8AC3E}">
-        <p14:creationId xmlns:p14="http://schemas.microsoft.com/office/powerpoint/2010/main" val="1570858258"/>
+        <p14:creationId xmlns:p14="http://schemas.microsoft.com/office/powerpoint/2010/main" val="2129179516"/>
       </p:ext>
     </p:extLst>
   </p:cSld>
